--- a/docs/video/WMDG-Video-Folien.pptx
+++ b/docs/video/WMDG-Video-Folien.pptx
@@ -62,6 +62,39 @@
     <p:sldId id="310" r:id="rId62"/>
     <p:sldId id="311" r:id="rId63"/>
     <p:sldId id="312" r:id="rId64"/>
+    <p:sldId id="313" r:id="rId65"/>
+    <p:sldId id="314" r:id="rId66"/>
+    <p:sldId id="315" r:id="rId67"/>
+    <p:sldId id="316" r:id="rId68"/>
+    <p:sldId id="317" r:id="rId69"/>
+    <p:sldId id="318" r:id="rId70"/>
+    <p:sldId id="319" r:id="rId71"/>
+    <p:sldId id="320" r:id="rId72"/>
+    <p:sldId id="321" r:id="rId73"/>
+    <p:sldId id="322" r:id="rId74"/>
+    <p:sldId id="323" r:id="rId75"/>
+    <p:sldId id="324" r:id="rId76"/>
+    <p:sldId id="325" r:id="rId77"/>
+    <p:sldId id="326" r:id="rId78"/>
+    <p:sldId id="327" r:id="rId79"/>
+    <p:sldId id="328" r:id="rId80"/>
+    <p:sldId id="329" r:id="rId81"/>
+    <p:sldId id="330" r:id="rId82"/>
+    <p:sldId id="331" r:id="rId83"/>
+    <p:sldId id="332" r:id="rId84"/>
+    <p:sldId id="333" r:id="rId85"/>
+    <p:sldId id="334" r:id="rId86"/>
+    <p:sldId id="335" r:id="rId87"/>
+    <p:sldId id="336" r:id="rId88"/>
+    <p:sldId id="337" r:id="rId89"/>
+    <p:sldId id="338" r:id="rId90"/>
+    <p:sldId id="339" r:id="rId91"/>
+    <p:sldId id="340" r:id="rId92"/>
+    <p:sldId id="341" r:id="rId93"/>
+    <p:sldId id="342" r:id="rId94"/>
+    <p:sldId id="343" r:id="rId95"/>
+    <p:sldId id="344" r:id="rId96"/>
+    <p:sldId id="345" r:id="rId97"/>
   </p:sldIdLst>
   <p:sldSz cx="12191695" cy="6858000" type="screen4x3"/>
   <p:notesSz cx="6858000" cy="9144000"/>
@@ -3943,6 +3976,426 @@
 </p:notes>
 </file>
 
+<file path=ppt/notesSlides/notesSlide54.xml><?xml version="1.0" encoding="utf-8"?>
+<p:notes xmlns:a="http://schemas.openxmlformats.org/drawingml/2006/main" xmlns:p="http://schemas.openxmlformats.org/presentationml/2006/main" xmlns:r="http://schemas.openxmlformats.org/officeDocument/2006/relationships">
+  <p:cSld>
+    <p:spTree>
+      <p:nvGrpSpPr>
+        <p:cNvPr id="1" name=""/>
+        <p:cNvGrpSpPr/>
+        <p:nvPr/>
+      </p:nvGrpSpPr>
+      <p:grpSpPr>
+        <a:xfrm>
+          <a:off x="0" y="0"/>
+          <a:ext cx="0" cy="0"/>
+          <a:chOff x="0" y="0"/>
+          <a:chExt cx="0" cy="0"/>
+        </a:xfrm>
+      </p:grpSpPr>
+      <p:sp>
+        <p:nvSpPr>
+          <p:cNvPr id="2" name="Slide Image Placeholder 1"/>
+          <p:cNvSpPr>
+            <a:spLocks noGrp="1"/>
+          </p:cNvSpPr>
+          <p:nvPr>
+            <p:ph type="sldImg" idx="2"/>
+          </p:nvPr>
+        </p:nvSpPr>
+        <p:spPr/>
+      </p:sp>
+      <p:sp>
+        <p:nvSpPr>
+          <p:cNvPr id="3" name="Notes Placeholder 2"/>
+          <p:cNvSpPr>
+            <a:spLocks noGrp="1"/>
+          </p:cNvSpPr>
+          <p:nvPr>
+            <p:ph type="body" idx="3" sz="quarter"/>
+          </p:nvPr>
+        </p:nvSpPr>
+        <p:spPr/>
+        <p:txBody>
+          <a:bodyPr/>
+          <a:lstStyle/>
+          <a:p>
+            <a:r>
+              <a:t>Titel-Einblendung SV 1: Propaganda &amp; Konditionierung.</a:t>
+            </a:r>
+          </a:p>
+        </p:txBody>
+      </p:sp>
+      <p:sp>
+        <p:nvSpPr>
+          <p:cNvPr id="4" name="Slide Number Placeholder 3"/>
+          <p:cNvSpPr>
+            <a:spLocks noGrp="1"/>
+          </p:cNvSpPr>
+          <p:nvPr>
+            <p:ph type="sldNum" idx="5" sz="quarter"/>
+          </p:nvPr>
+        </p:nvSpPr>
+        <p:spPr/>
+      </p:sp>
+    </p:spTree>
+  </p:cSld>
+  <p:clrMapOvr>
+    <a:masterClrMapping/>
+  </p:clrMapOvr>
+</p:notes>
+</file>
+
+<file path=ppt/notesSlides/notesSlide55.xml><?xml version="1.0" encoding="utf-8"?>
+<p:notes xmlns:a="http://schemas.openxmlformats.org/drawingml/2006/main" xmlns:p="http://schemas.openxmlformats.org/presentationml/2006/main" xmlns:r="http://schemas.openxmlformats.org/officeDocument/2006/relationships">
+  <p:cSld>
+    <p:spTree>
+      <p:nvGrpSpPr>
+        <p:cNvPr id="1" name=""/>
+        <p:cNvGrpSpPr/>
+        <p:nvPr/>
+      </p:nvGrpSpPr>
+      <p:grpSpPr>
+        <a:xfrm>
+          <a:off x="0" y="0"/>
+          <a:ext cx="0" cy="0"/>
+          <a:chOff x="0" y="0"/>
+          <a:chExt cx="0" cy="0"/>
+        </a:xfrm>
+      </p:grpSpPr>
+      <p:sp>
+        <p:nvSpPr>
+          <p:cNvPr id="2" name="Slide Image Placeholder 1"/>
+          <p:cNvSpPr>
+            <a:spLocks noGrp="1"/>
+          </p:cNvSpPr>
+          <p:nvPr>
+            <p:ph type="sldImg" idx="2"/>
+          </p:nvPr>
+        </p:nvSpPr>
+        <p:spPr/>
+      </p:sp>
+      <p:sp>
+        <p:nvSpPr>
+          <p:cNvPr id="3" name="Notes Placeholder 2"/>
+          <p:cNvSpPr>
+            <a:spLocks noGrp="1"/>
+          </p:cNvSpPr>
+          <p:nvPr>
+            <p:ph type="body" idx="3" sz="quarter"/>
+          </p:nvPr>
+        </p:nvSpPr>
+        <p:spPr/>
+        <p:txBody>
+          <a:bodyPr/>
+          <a:lstStyle/>
+          <a:p>
+            <a:r>
+              <a:t>Merksatz-Einblendung (Abschluss). Propaganda &amp; Konditionierung</a:t>
+            </a:r>
+          </a:p>
+        </p:txBody>
+      </p:sp>
+      <p:sp>
+        <p:nvSpPr>
+          <p:cNvPr id="4" name="Slide Number Placeholder 3"/>
+          <p:cNvSpPr>
+            <a:spLocks noGrp="1"/>
+          </p:cNvSpPr>
+          <p:nvPr>
+            <p:ph type="sldNum" idx="5" sz="quarter"/>
+          </p:nvPr>
+        </p:nvSpPr>
+        <p:spPr/>
+      </p:sp>
+    </p:spTree>
+  </p:cSld>
+  <p:clrMapOvr>
+    <a:masterClrMapping/>
+  </p:clrMapOvr>
+</p:notes>
+</file>
+
+<file path=ppt/notesSlides/notesSlide56.xml><?xml version="1.0" encoding="utf-8"?>
+<p:notes xmlns:a="http://schemas.openxmlformats.org/drawingml/2006/main" xmlns:p="http://schemas.openxmlformats.org/presentationml/2006/main" xmlns:r="http://schemas.openxmlformats.org/officeDocument/2006/relationships">
+  <p:cSld>
+    <p:spTree>
+      <p:nvGrpSpPr>
+        <p:cNvPr id="1" name=""/>
+        <p:cNvGrpSpPr/>
+        <p:nvPr/>
+      </p:nvGrpSpPr>
+      <p:grpSpPr>
+        <a:xfrm>
+          <a:off x="0" y="0"/>
+          <a:ext cx="0" cy="0"/>
+          <a:chOff x="0" y="0"/>
+          <a:chExt cx="0" cy="0"/>
+        </a:xfrm>
+      </p:grpSpPr>
+      <p:sp>
+        <p:nvSpPr>
+          <p:cNvPr id="2" name="Slide Image Placeholder 1"/>
+          <p:cNvSpPr>
+            <a:spLocks noGrp="1"/>
+          </p:cNvSpPr>
+          <p:nvPr>
+            <p:ph type="sldImg" idx="2"/>
+          </p:nvPr>
+        </p:nvSpPr>
+        <p:spPr/>
+      </p:sp>
+      <p:sp>
+        <p:nvSpPr>
+          <p:cNvPr id="3" name="Notes Placeholder 2"/>
+          <p:cNvSpPr>
+            <a:spLocks noGrp="1"/>
+          </p:cNvSpPr>
+          <p:nvPr>
+            <p:ph type="body" idx="3" sz="quarter"/>
+          </p:nvPr>
+        </p:nvSpPr>
+        <p:spPr/>
+        <p:txBody>
+          <a:bodyPr/>
+          <a:lstStyle/>
+          <a:p>
+            <a:r>
+              <a:t>Titel-Einblendung SV 2: Framing.</a:t>
+            </a:r>
+          </a:p>
+        </p:txBody>
+      </p:sp>
+      <p:sp>
+        <p:nvSpPr>
+          <p:cNvPr id="4" name="Slide Number Placeholder 3"/>
+          <p:cNvSpPr>
+            <a:spLocks noGrp="1"/>
+          </p:cNvSpPr>
+          <p:nvPr>
+            <p:ph type="sldNum" idx="5" sz="quarter"/>
+          </p:nvPr>
+        </p:nvSpPr>
+        <p:spPr/>
+      </p:sp>
+    </p:spTree>
+  </p:cSld>
+  <p:clrMapOvr>
+    <a:masterClrMapping/>
+  </p:clrMapOvr>
+</p:notes>
+</file>
+
+<file path=ppt/notesSlides/notesSlide57.xml><?xml version="1.0" encoding="utf-8"?>
+<p:notes xmlns:a="http://schemas.openxmlformats.org/drawingml/2006/main" xmlns:p="http://schemas.openxmlformats.org/presentationml/2006/main" xmlns:r="http://schemas.openxmlformats.org/officeDocument/2006/relationships">
+  <p:cSld>
+    <p:spTree>
+      <p:nvGrpSpPr>
+        <p:cNvPr id="1" name=""/>
+        <p:cNvGrpSpPr/>
+        <p:nvPr/>
+      </p:nvGrpSpPr>
+      <p:grpSpPr>
+        <a:xfrm>
+          <a:off x="0" y="0"/>
+          <a:ext cx="0" cy="0"/>
+          <a:chOff x="0" y="0"/>
+          <a:chExt cx="0" cy="0"/>
+        </a:xfrm>
+      </p:grpSpPr>
+      <p:sp>
+        <p:nvSpPr>
+          <p:cNvPr id="2" name="Slide Image Placeholder 1"/>
+          <p:cNvSpPr>
+            <a:spLocks noGrp="1"/>
+          </p:cNvSpPr>
+          <p:nvPr>
+            <p:ph type="sldImg" idx="2"/>
+          </p:nvPr>
+        </p:nvSpPr>
+        <p:spPr/>
+      </p:sp>
+      <p:sp>
+        <p:nvSpPr>
+          <p:cNvPr id="3" name="Notes Placeholder 2"/>
+          <p:cNvSpPr>
+            <a:spLocks noGrp="1"/>
+          </p:cNvSpPr>
+          <p:nvPr>
+            <p:ph type="body" idx="3" sz="quarter"/>
+          </p:nvPr>
+        </p:nvSpPr>
+        <p:spPr/>
+        <p:txBody>
+          <a:bodyPr/>
+          <a:lstStyle/>
+          <a:p>
+            <a:r>
+              <a:t>Merksatz-Einblendung (Abschluss). Framing</a:t>
+            </a:r>
+          </a:p>
+        </p:txBody>
+      </p:sp>
+      <p:sp>
+        <p:nvSpPr>
+          <p:cNvPr id="4" name="Slide Number Placeholder 3"/>
+          <p:cNvSpPr>
+            <a:spLocks noGrp="1"/>
+          </p:cNvSpPr>
+          <p:nvPr>
+            <p:ph type="sldNum" idx="5" sz="quarter"/>
+          </p:nvPr>
+        </p:nvSpPr>
+        <p:spPr/>
+      </p:sp>
+    </p:spTree>
+  </p:cSld>
+  <p:clrMapOvr>
+    <a:masterClrMapping/>
+  </p:clrMapOvr>
+</p:notes>
+</file>
+
+<file path=ppt/notesSlides/notesSlide58.xml><?xml version="1.0" encoding="utf-8"?>
+<p:notes xmlns:a="http://schemas.openxmlformats.org/drawingml/2006/main" xmlns:p="http://schemas.openxmlformats.org/presentationml/2006/main" xmlns:r="http://schemas.openxmlformats.org/officeDocument/2006/relationships">
+  <p:cSld>
+    <p:spTree>
+      <p:nvGrpSpPr>
+        <p:cNvPr id="1" name=""/>
+        <p:cNvGrpSpPr/>
+        <p:nvPr/>
+      </p:nvGrpSpPr>
+      <p:grpSpPr>
+        <a:xfrm>
+          <a:off x="0" y="0"/>
+          <a:ext cx="0" cy="0"/>
+          <a:chOff x="0" y="0"/>
+          <a:chExt cx="0" cy="0"/>
+        </a:xfrm>
+      </p:grpSpPr>
+      <p:sp>
+        <p:nvSpPr>
+          <p:cNvPr id="2" name="Slide Image Placeholder 1"/>
+          <p:cNvSpPr>
+            <a:spLocks noGrp="1"/>
+          </p:cNvSpPr>
+          <p:nvPr>
+            <p:ph type="sldImg" idx="2"/>
+          </p:nvPr>
+        </p:nvSpPr>
+        <p:spPr/>
+      </p:sp>
+      <p:sp>
+        <p:nvSpPr>
+          <p:cNvPr id="3" name="Notes Placeholder 2"/>
+          <p:cNvSpPr>
+            <a:spLocks noGrp="1"/>
+          </p:cNvSpPr>
+          <p:nvPr>
+            <p:ph type="body" idx="3" sz="quarter"/>
+          </p:nvPr>
+        </p:nvSpPr>
+        <p:spPr/>
+        <p:txBody>
+          <a:bodyPr/>
+          <a:lstStyle/>
+          <a:p>
+            <a:r>
+              <a:t>Titel-Einblendung SV 3: Sprache &amp; Etiketten.</a:t>
+            </a:r>
+          </a:p>
+        </p:txBody>
+      </p:sp>
+      <p:sp>
+        <p:nvSpPr>
+          <p:cNvPr id="4" name="Slide Number Placeholder 3"/>
+          <p:cNvSpPr>
+            <a:spLocks noGrp="1"/>
+          </p:cNvSpPr>
+          <p:nvPr>
+            <p:ph type="sldNum" idx="5" sz="quarter"/>
+          </p:nvPr>
+        </p:nvSpPr>
+        <p:spPr/>
+      </p:sp>
+    </p:spTree>
+  </p:cSld>
+  <p:clrMapOvr>
+    <a:masterClrMapping/>
+  </p:clrMapOvr>
+</p:notes>
+</file>
+
+<file path=ppt/notesSlides/notesSlide59.xml><?xml version="1.0" encoding="utf-8"?>
+<p:notes xmlns:a="http://schemas.openxmlformats.org/drawingml/2006/main" xmlns:p="http://schemas.openxmlformats.org/presentationml/2006/main" xmlns:r="http://schemas.openxmlformats.org/officeDocument/2006/relationships">
+  <p:cSld>
+    <p:spTree>
+      <p:nvGrpSpPr>
+        <p:cNvPr id="1" name=""/>
+        <p:cNvGrpSpPr/>
+        <p:nvPr/>
+      </p:nvGrpSpPr>
+      <p:grpSpPr>
+        <a:xfrm>
+          <a:off x="0" y="0"/>
+          <a:ext cx="0" cy="0"/>
+          <a:chOff x="0" y="0"/>
+          <a:chExt cx="0" cy="0"/>
+        </a:xfrm>
+      </p:grpSpPr>
+      <p:sp>
+        <p:nvSpPr>
+          <p:cNvPr id="2" name="Slide Image Placeholder 1"/>
+          <p:cNvSpPr>
+            <a:spLocks noGrp="1"/>
+          </p:cNvSpPr>
+          <p:nvPr>
+            <p:ph type="sldImg" idx="2"/>
+          </p:nvPr>
+        </p:nvSpPr>
+        <p:spPr/>
+      </p:sp>
+      <p:sp>
+        <p:nvSpPr>
+          <p:cNvPr id="3" name="Notes Placeholder 2"/>
+          <p:cNvSpPr>
+            <a:spLocks noGrp="1"/>
+          </p:cNvSpPr>
+          <p:nvPr>
+            <p:ph type="body" idx="3" sz="quarter"/>
+          </p:nvPr>
+        </p:nvSpPr>
+        <p:spPr/>
+        <p:txBody>
+          <a:bodyPr/>
+          <a:lstStyle/>
+          <a:p>
+            <a:r>
+              <a:t>Merksatz-Einblendung (Abschluss). Sprache &amp; Etiketten</a:t>
+            </a:r>
+          </a:p>
+        </p:txBody>
+      </p:sp>
+      <p:sp>
+        <p:nvSpPr>
+          <p:cNvPr id="4" name="Slide Number Placeholder 3"/>
+          <p:cNvSpPr>
+            <a:spLocks noGrp="1"/>
+          </p:cNvSpPr>
+          <p:nvPr>
+            <p:ph type="sldNum" idx="5" sz="quarter"/>
+          </p:nvPr>
+        </p:nvSpPr>
+        <p:spPr/>
+      </p:sp>
+    </p:spTree>
+  </p:cSld>
+  <p:clrMapOvr>
+    <a:masterClrMapping/>
+  </p:clrMapOvr>
+</p:notes>
+</file>
+
 <file path=ppt/notesSlides/notesSlide6.xml><?xml version="1.0" encoding="utf-8"?>
 <p:notes xmlns:a="http://schemas.openxmlformats.org/drawingml/2006/main" xmlns:p="http://schemas.openxmlformats.org/presentationml/2006/main" xmlns:r="http://schemas.openxmlformats.org/officeDocument/2006/relationships">
   <p:cSld>
@@ -3989,6 +4442,706 @@
           <a:p>
             <a:r>
               <a:t>Merksatz-Einblendung (Abschluss). Stufe 03 · Selbstbeobachtung</a:t>
+            </a:r>
+          </a:p>
+        </p:txBody>
+      </p:sp>
+      <p:sp>
+        <p:nvSpPr>
+          <p:cNvPr id="4" name="Slide Number Placeholder 3"/>
+          <p:cNvSpPr>
+            <a:spLocks noGrp="1"/>
+          </p:cNvSpPr>
+          <p:nvPr>
+            <p:ph type="sldNum" idx="5" sz="quarter"/>
+          </p:nvPr>
+        </p:nvSpPr>
+        <p:spPr/>
+      </p:sp>
+    </p:spTree>
+  </p:cSld>
+  <p:clrMapOvr>
+    <a:masterClrMapping/>
+  </p:clrMapOvr>
+</p:notes>
+</file>
+
+<file path=ppt/notesSlides/notesSlide60.xml><?xml version="1.0" encoding="utf-8"?>
+<p:notes xmlns:a="http://schemas.openxmlformats.org/drawingml/2006/main" xmlns:p="http://schemas.openxmlformats.org/presentationml/2006/main" xmlns:r="http://schemas.openxmlformats.org/officeDocument/2006/relationships">
+  <p:cSld>
+    <p:spTree>
+      <p:nvGrpSpPr>
+        <p:cNvPr id="1" name=""/>
+        <p:cNvGrpSpPr/>
+        <p:nvPr/>
+      </p:nvGrpSpPr>
+      <p:grpSpPr>
+        <a:xfrm>
+          <a:off x="0" y="0"/>
+          <a:ext cx="0" cy="0"/>
+          <a:chOff x="0" y="0"/>
+          <a:chExt cx="0" cy="0"/>
+        </a:xfrm>
+      </p:grpSpPr>
+      <p:sp>
+        <p:nvSpPr>
+          <p:cNvPr id="2" name="Slide Image Placeholder 1"/>
+          <p:cNvSpPr>
+            <a:spLocks noGrp="1"/>
+          </p:cNvSpPr>
+          <p:nvPr>
+            <p:ph type="sldImg" idx="2"/>
+          </p:nvPr>
+        </p:nvSpPr>
+        <p:spPr/>
+      </p:sp>
+      <p:sp>
+        <p:nvSpPr>
+          <p:cNvPr id="3" name="Notes Placeholder 2"/>
+          <p:cNvSpPr>
+            <a:spLocks noGrp="1"/>
+          </p:cNvSpPr>
+          <p:nvPr>
+            <p:ph type="body" idx="3" sz="quarter"/>
+          </p:nvPr>
+        </p:nvSpPr>
+        <p:spPr/>
+        <p:txBody>
+          <a:bodyPr/>
+          <a:lstStyle/>
+          <a:p>
+            <a:r>
+              <a:t>Titel-Einblendung SV 4: Medien &amp; Aufmerksamkeit.</a:t>
+            </a:r>
+          </a:p>
+        </p:txBody>
+      </p:sp>
+      <p:sp>
+        <p:nvSpPr>
+          <p:cNvPr id="4" name="Slide Number Placeholder 3"/>
+          <p:cNvSpPr>
+            <a:spLocks noGrp="1"/>
+          </p:cNvSpPr>
+          <p:nvPr>
+            <p:ph type="sldNum" idx="5" sz="quarter"/>
+          </p:nvPr>
+        </p:nvSpPr>
+        <p:spPr/>
+      </p:sp>
+    </p:spTree>
+  </p:cSld>
+  <p:clrMapOvr>
+    <a:masterClrMapping/>
+  </p:clrMapOvr>
+</p:notes>
+</file>
+
+<file path=ppt/notesSlides/notesSlide61.xml><?xml version="1.0" encoding="utf-8"?>
+<p:notes xmlns:a="http://schemas.openxmlformats.org/drawingml/2006/main" xmlns:p="http://schemas.openxmlformats.org/presentationml/2006/main" xmlns:r="http://schemas.openxmlformats.org/officeDocument/2006/relationships">
+  <p:cSld>
+    <p:spTree>
+      <p:nvGrpSpPr>
+        <p:cNvPr id="1" name=""/>
+        <p:cNvGrpSpPr/>
+        <p:nvPr/>
+      </p:nvGrpSpPr>
+      <p:grpSpPr>
+        <a:xfrm>
+          <a:off x="0" y="0"/>
+          <a:ext cx="0" cy="0"/>
+          <a:chOff x="0" y="0"/>
+          <a:chExt cx="0" cy="0"/>
+        </a:xfrm>
+      </p:grpSpPr>
+      <p:sp>
+        <p:nvSpPr>
+          <p:cNvPr id="2" name="Slide Image Placeholder 1"/>
+          <p:cNvSpPr>
+            <a:spLocks noGrp="1"/>
+          </p:cNvSpPr>
+          <p:nvPr>
+            <p:ph type="sldImg" idx="2"/>
+          </p:nvPr>
+        </p:nvSpPr>
+        <p:spPr/>
+      </p:sp>
+      <p:sp>
+        <p:nvSpPr>
+          <p:cNvPr id="3" name="Notes Placeholder 2"/>
+          <p:cNvSpPr>
+            <a:spLocks noGrp="1"/>
+          </p:cNvSpPr>
+          <p:nvPr>
+            <p:ph type="body" idx="3" sz="quarter"/>
+          </p:nvPr>
+        </p:nvSpPr>
+        <p:spPr/>
+        <p:txBody>
+          <a:bodyPr/>
+          <a:lstStyle/>
+          <a:p>
+            <a:r>
+              <a:t>Merksatz-Einblendung (Abschluss). Medien &amp; Aufmerksamkeit</a:t>
+            </a:r>
+          </a:p>
+        </p:txBody>
+      </p:sp>
+      <p:sp>
+        <p:nvSpPr>
+          <p:cNvPr id="4" name="Slide Number Placeholder 3"/>
+          <p:cNvSpPr>
+            <a:spLocks noGrp="1"/>
+          </p:cNvSpPr>
+          <p:nvPr>
+            <p:ph type="sldNum" idx="5" sz="quarter"/>
+          </p:nvPr>
+        </p:nvSpPr>
+        <p:spPr/>
+      </p:sp>
+    </p:spTree>
+  </p:cSld>
+  <p:clrMapOvr>
+    <a:masterClrMapping/>
+  </p:clrMapOvr>
+</p:notes>
+</file>
+
+<file path=ppt/notesSlides/notesSlide62.xml><?xml version="1.0" encoding="utf-8"?>
+<p:notes xmlns:a="http://schemas.openxmlformats.org/drawingml/2006/main" xmlns:p="http://schemas.openxmlformats.org/presentationml/2006/main" xmlns:r="http://schemas.openxmlformats.org/officeDocument/2006/relationships">
+  <p:cSld>
+    <p:spTree>
+      <p:nvGrpSpPr>
+        <p:cNvPr id="1" name=""/>
+        <p:cNvGrpSpPr/>
+        <p:nvPr/>
+      </p:nvGrpSpPr>
+      <p:grpSpPr>
+        <a:xfrm>
+          <a:off x="0" y="0"/>
+          <a:ext cx="0" cy="0"/>
+          <a:chOff x="0" y="0"/>
+          <a:chExt cx="0" cy="0"/>
+        </a:xfrm>
+      </p:grpSpPr>
+      <p:sp>
+        <p:nvSpPr>
+          <p:cNvPr id="2" name="Slide Image Placeholder 1"/>
+          <p:cNvSpPr>
+            <a:spLocks noGrp="1"/>
+          </p:cNvSpPr>
+          <p:nvPr>
+            <p:ph type="sldImg" idx="2"/>
+          </p:nvPr>
+        </p:nvSpPr>
+        <p:spPr/>
+      </p:sp>
+      <p:sp>
+        <p:nvSpPr>
+          <p:cNvPr id="3" name="Notes Placeholder 2"/>
+          <p:cNvSpPr>
+            <a:spLocks noGrp="1"/>
+          </p:cNvSpPr>
+          <p:nvPr>
+            <p:ph type="body" idx="3" sz="quarter"/>
+          </p:nvPr>
+        </p:nvSpPr>
+        <p:spPr/>
+        <p:txBody>
+          <a:bodyPr/>
+          <a:lstStyle/>
+          <a:p>
+            <a:r>
+              <a:t>Titel-Einblendung SV 5: Algorithmen &amp; Filterblasen.</a:t>
+            </a:r>
+          </a:p>
+        </p:txBody>
+      </p:sp>
+      <p:sp>
+        <p:nvSpPr>
+          <p:cNvPr id="4" name="Slide Number Placeholder 3"/>
+          <p:cNvSpPr>
+            <a:spLocks noGrp="1"/>
+          </p:cNvSpPr>
+          <p:nvPr>
+            <p:ph type="sldNum" idx="5" sz="quarter"/>
+          </p:nvPr>
+        </p:nvSpPr>
+        <p:spPr/>
+      </p:sp>
+    </p:spTree>
+  </p:cSld>
+  <p:clrMapOvr>
+    <a:masterClrMapping/>
+  </p:clrMapOvr>
+</p:notes>
+</file>
+
+<file path=ppt/notesSlides/notesSlide63.xml><?xml version="1.0" encoding="utf-8"?>
+<p:notes xmlns:a="http://schemas.openxmlformats.org/drawingml/2006/main" xmlns:p="http://schemas.openxmlformats.org/presentationml/2006/main" xmlns:r="http://schemas.openxmlformats.org/officeDocument/2006/relationships">
+  <p:cSld>
+    <p:spTree>
+      <p:nvGrpSpPr>
+        <p:cNvPr id="1" name=""/>
+        <p:cNvGrpSpPr/>
+        <p:nvPr/>
+      </p:nvGrpSpPr>
+      <p:grpSpPr>
+        <a:xfrm>
+          <a:off x="0" y="0"/>
+          <a:ext cx="0" cy="0"/>
+          <a:chOff x="0" y="0"/>
+          <a:chExt cx="0" cy="0"/>
+        </a:xfrm>
+      </p:grpSpPr>
+      <p:sp>
+        <p:nvSpPr>
+          <p:cNvPr id="2" name="Slide Image Placeholder 1"/>
+          <p:cNvSpPr>
+            <a:spLocks noGrp="1"/>
+          </p:cNvSpPr>
+          <p:nvPr>
+            <p:ph type="sldImg" idx="2"/>
+          </p:nvPr>
+        </p:nvSpPr>
+        <p:spPr/>
+      </p:sp>
+      <p:sp>
+        <p:nvSpPr>
+          <p:cNvPr id="3" name="Notes Placeholder 2"/>
+          <p:cNvSpPr>
+            <a:spLocks noGrp="1"/>
+          </p:cNvSpPr>
+          <p:nvPr>
+            <p:ph type="body" idx="3" sz="quarter"/>
+          </p:nvPr>
+        </p:nvSpPr>
+        <p:spPr/>
+        <p:txBody>
+          <a:bodyPr/>
+          <a:lstStyle/>
+          <a:p>
+            <a:r>
+              <a:t>Merksatz-Einblendung (Abschluss). Algorithmen &amp; Filterblasen</a:t>
+            </a:r>
+          </a:p>
+        </p:txBody>
+      </p:sp>
+      <p:sp>
+        <p:nvSpPr>
+          <p:cNvPr id="4" name="Slide Number Placeholder 3"/>
+          <p:cNvSpPr>
+            <a:spLocks noGrp="1"/>
+          </p:cNvSpPr>
+          <p:nvPr>
+            <p:ph type="sldNum" idx="5" sz="quarter"/>
+          </p:nvPr>
+        </p:nvSpPr>
+        <p:spPr/>
+      </p:sp>
+    </p:spTree>
+  </p:cSld>
+  <p:clrMapOvr>
+    <a:masterClrMapping/>
+  </p:clrMapOvr>
+</p:notes>
+</file>
+
+<file path=ppt/notesSlides/notesSlide64.xml><?xml version="1.0" encoding="utf-8"?>
+<p:notes xmlns:a="http://schemas.openxmlformats.org/drawingml/2006/main" xmlns:p="http://schemas.openxmlformats.org/presentationml/2006/main" xmlns:r="http://schemas.openxmlformats.org/officeDocument/2006/relationships">
+  <p:cSld>
+    <p:spTree>
+      <p:nvGrpSpPr>
+        <p:cNvPr id="1" name=""/>
+        <p:cNvGrpSpPr/>
+        <p:nvPr/>
+      </p:nvGrpSpPr>
+      <p:grpSpPr>
+        <a:xfrm>
+          <a:off x="0" y="0"/>
+          <a:ext cx="0" cy="0"/>
+          <a:chOff x="0" y="0"/>
+          <a:chExt cx="0" cy="0"/>
+        </a:xfrm>
+      </p:grpSpPr>
+      <p:sp>
+        <p:nvSpPr>
+          <p:cNvPr id="2" name="Slide Image Placeholder 1"/>
+          <p:cNvSpPr>
+            <a:spLocks noGrp="1"/>
+          </p:cNvSpPr>
+          <p:nvPr>
+            <p:ph type="sldImg" idx="2"/>
+          </p:nvPr>
+        </p:nvSpPr>
+        <p:spPr/>
+      </p:sp>
+      <p:sp>
+        <p:nvSpPr>
+          <p:cNvPr id="3" name="Notes Placeholder 2"/>
+          <p:cNvSpPr>
+            <a:spLocks noGrp="1"/>
+          </p:cNvSpPr>
+          <p:nvPr>
+            <p:ph type="body" idx="3" sz="quarter"/>
+          </p:nvPr>
+        </p:nvSpPr>
+        <p:spPr/>
+        <p:txBody>
+          <a:bodyPr/>
+          <a:lstStyle/>
+          <a:p>
+            <a:r>
+              <a:t>Titel-Einblendung SV 6: Werbung &amp; künstlicher Mangel.</a:t>
+            </a:r>
+          </a:p>
+        </p:txBody>
+      </p:sp>
+      <p:sp>
+        <p:nvSpPr>
+          <p:cNvPr id="4" name="Slide Number Placeholder 3"/>
+          <p:cNvSpPr>
+            <a:spLocks noGrp="1"/>
+          </p:cNvSpPr>
+          <p:nvPr>
+            <p:ph type="sldNum" idx="5" sz="quarter"/>
+          </p:nvPr>
+        </p:nvSpPr>
+        <p:spPr/>
+      </p:sp>
+    </p:spTree>
+  </p:cSld>
+  <p:clrMapOvr>
+    <a:masterClrMapping/>
+  </p:clrMapOvr>
+</p:notes>
+</file>
+
+<file path=ppt/notesSlides/notesSlide65.xml><?xml version="1.0" encoding="utf-8"?>
+<p:notes xmlns:a="http://schemas.openxmlformats.org/drawingml/2006/main" xmlns:p="http://schemas.openxmlformats.org/presentationml/2006/main" xmlns:r="http://schemas.openxmlformats.org/officeDocument/2006/relationships">
+  <p:cSld>
+    <p:spTree>
+      <p:nvGrpSpPr>
+        <p:cNvPr id="1" name=""/>
+        <p:cNvGrpSpPr/>
+        <p:nvPr/>
+      </p:nvGrpSpPr>
+      <p:grpSpPr>
+        <a:xfrm>
+          <a:off x="0" y="0"/>
+          <a:ext cx="0" cy="0"/>
+          <a:chOff x="0" y="0"/>
+          <a:chExt cx="0" cy="0"/>
+        </a:xfrm>
+      </p:grpSpPr>
+      <p:sp>
+        <p:nvSpPr>
+          <p:cNvPr id="2" name="Slide Image Placeholder 1"/>
+          <p:cNvSpPr>
+            <a:spLocks noGrp="1"/>
+          </p:cNvSpPr>
+          <p:nvPr>
+            <p:ph type="sldImg" idx="2"/>
+          </p:nvPr>
+        </p:nvSpPr>
+        <p:spPr/>
+      </p:sp>
+      <p:sp>
+        <p:nvSpPr>
+          <p:cNvPr id="3" name="Notes Placeholder 2"/>
+          <p:cNvSpPr>
+            <a:spLocks noGrp="1"/>
+          </p:cNvSpPr>
+          <p:nvPr>
+            <p:ph type="body" idx="3" sz="quarter"/>
+          </p:nvPr>
+        </p:nvSpPr>
+        <p:spPr/>
+        <p:txBody>
+          <a:bodyPr/>
+          <a:lstStyle/>
+          <a:p>
+            <a:r>
+              <a:t>Merksatz-Einblendung (Abschluss). Werbung &amp; künstlicher Mangel</a:t>
+            </a:r>
+          </a:p>
+        </p:txBody>
+      </p:sp>
+      <p:sp>
+        <p:nvSpPr>
+          <p:cNvPr id="4" name="Slide Number Placeholder 3"/>
+          <p:cNvSpPr>
+            <a:spLocks noGrp="1"/>
+          </p:cNvSpPr>
+          <p:nvPr>
+            <p:ph type="sldNum" idx="5" sz="quarter"/>
+          </p:nvPr>
+        </p:nvSpPr>
+        <p:spPr/>
+      </p:sp>
+    </p:spTree>
+  </p:cSld>
+  <p:clrMapOvr>
+    <a:masterClrMapping/>
+  </p:clrMapOvr>
+</p:notes>
+</file>
+
+<file path=ppt/notesSlides/notesSlide66.xml><?xml version="1.0" encoding="utf-8"?>
+<p:notes xmlns:a="http://schemas.openxmlformats.org/drawingml/2006/main" xmlns:p="http://schemas.openxmlformats.org/presentationml/2006/main" xmlns:r="http://schemas.openxmlformats.org/officeDocument/2006/relationships">
+  <p:cSld>
+    <p:spTree>
+      <p:nvGrpSpPr>
+        <p:cNvPr id="1" name=""/>
+        <p:cNvGrpSpPr/>
+        <p:nvPr/>
+      </p:nvGrpSpPr>
+      <p:grpSpPr>
+        <a:xfrm>
+          <a:off x="0" y="0"/>
+          <a:ext cx="0" cy="0"/>
+          <a:chOff x="0" y="0"/>
+          <a:chExt cx="0" cy="0"/>
+        </a:xfrm>
+      </p:grpSpPr>
+      <p:sp>
+        <p:nvSpPr>
+          <p:cNvPr id="2" name="Slide Image Placeholder 1"/>
+          <p:cNvSpPr>
+            <a:spLocks noGrp="1"/>
+          </p:cNvSpPr>
+          <p:nvPr>
+            <p:ph type="sldImg" idx="2"/>
+          </p:nvPr>
+        </p:nvSpPr>
+        <p:spPr/>
+      </p:sp>
+      <p:sp>
+        <p:nvSpPr>
+          <p:cNvPr id="3" name="Notes Placeholder 2"/>
+          <p:cNvSpPr>
+            <a:spLocks noGrp="1"/>
+          </p:cNvSpPr>
+          <p:nvPr>
+            <p:ph type="body" idx="3" sz="quarter"/>
+          </p:nvPr>
+        </p:nvSpPr>
+        <p:spPr/>
+        <p:txBody>
+          <a:bodyPr/>
+          <a:lstStyle/>
+          <a:p>
+            <a:r>
+              <a:t>Titel-Einblendung SV 7: Gruppendruck &amp; Schweigespirale.</a:t>
+            </a:r>
+          </a:p>
+        </p:txBody>
+      </p:sp>
+      <p:sp>
+        <p:nvSpPr>
+          <p:cNvPr id="4" name="Slide Number Placeholder 3"/>
+          <p:cNvSpPr>
+            <a:spLocks noGrp="1"/>
+          </p:cNvSpPr>
+          <p:nvPr>
+            <p:ph type="sldNum" idx="5" sz="quarter"/>
+          </p:nvPr>
+        </p:nvSpPr>
+        <p:spPr/>
+      </p:sp>
+    </p:spTree>
+  </p:cSld>
+  <p:clrMapOvr>
+    <a:masterClrMapping/>
+  </p:clrMapOvr>
+</p:notes>
+</file>
+
+<file path=ppt/notesSlides/notesSlide67.xml><?xml version="1.0" encoding="utf-8"?>
+<p:notes xmlns:a="http://schemas.openxmlformats.org/drawingml/2006/main" xmlns:p="http://schemas.openxmlformats.org/presentationml/2006/main" xmlns:r="http://schemas.openxmlformats.org/officeDocument/2006/relationships">
+  <p:cSld>
+    <p:spTree>
+      <p:nvGrpSpPr>
+        <p:cNvPr id="1" name=""/>
+        <p:cNvGrpSpPr/>
+        <p:nvPr/>
+      </p:nvGrpSpPr>
+      <p:grpSpPr>
+        <a:xfrm>
+          <a:off x="0" y="0"/>
+          <a:ext cx="0" cy="0"/>
+          <a:chOff x="0" y="0"/>
+          <a:chExt cx="0" cy="0"/>
+        </a:xfrm>
+      </p:grpSpPr>
+      <p:sp>
+        <p:nvSpPr>
+          <p:cNvPr id="2" name="Slide Image Placeholder 1"/>
+          <p:cNvSpPr>
+            <a:spLocks noGrp="1"/>
+          </p:cNvSpPr>
+          <p:nvPr>
+            <p:ph type="sldImg" idx="2"/>
+          </p:nvPr>
+        </p:nvSpPr>
+        <p:spPr/>
+      </p:sp>
+      <p:sp>
+        <p:nvSpPr>
+          <p:cNvPr id="3" name="Notes Placeholder 2"/>
+          <p:cNvSpPr>
+            <a:spLocks noGrp="1"/>
+          </p:cNvSpPr>
+          <p:nvPr>
+            <p:ph type="body" idx="3" sz="quarter"/>
+          </p:nvPr>
+        </p:nvSpPr>
+        <p:spPr/>
+        <p:txBody>
+          <a:bodyPr/>
+          <a:lstStyle/>
+          <a:p>
+            <a:r>
+              <a:t>Merksatz-Einblendung (Abschluss). Gruppendruck &amp; Schweigespirale</a:t>
+            </a:r>
+          </a:p>
+        </p:txBody>
+      </p:sp>
+      <p:sp>
+        <p:nvSpPr>
+          <p:cNvPr id="4" name="Slide Number Placeholder 3"/>
+          <p:cNvSpPr>
+            <a:spLocks noGrp="1"/>
+          </p:cNvSpPr>
+          <p:nvPr>
+            <p:ph type="sldNum" idx="5" sz="quarter"/>
+          </p:nvPr>
+        </p:nvSpPr>
+        <p:spPr/>
+      </p:sp>
+    </p:spTree>
+  </p:cSld>
+  <p:clrMapOvr>
+    <a:masterClrMapping/>
+  </p:clrMapOvr>
+</p:notes>
+</file>
+
+<file path=ppt/notesSlides/notesSlide68.xml><?xml version="1.0" encoding="utf-8"?>
+<p:notes xmlns:a="http://schemas.openxmlformats.org/drawingml/2006/main" xmlns:p="http://schemas.openxmlformats.org/presentationml/2006/main" xmlns:r="http://schemas.openxmlformats.org/officeDocument/2006/relationships">
+  <p:cSld>
+    <p:spTree>
+      <p:nvGrpSpPr>
+        <p:cNvPr id="1" name=""/>
+        <p:cNvGrpSpPr/>
+        <p:nvPr/>
+      </p:nvGrpSpPr>
+      <p:grpSpPr>
+        <a:xfrm>
+          <a:off x="0" y="0"/>
+          <a:ext cx="0" cy="0"/>
+          <a:chOff x="0" y="0"/>
+          <a:chExt cx="0" cy="0"/>
+        </a:xfrm>
+      </p:grpSpPr>
+      <p:sp>
+        <p:nvSpPr>
+          <p:cNvPr id="2" name="Slide Image Placeholder 1"/>
+          <p:cNvSpPr>
+            <a:spLocks noGrp="1"/>
+          </p:cNvSpPr>
+          <p:nvPr>
+            <p:ph type="sldImg" idx="2"/>
+          </p:nvPr>
+        </p:nvSpPr>
+        <p:spPr/>
+      </p:sp>
+      <p:sp>
+        <p:nvSpPr>
+          <p:cNvPr id="3" name="Notes Placeholder 2"/>
+          <p:cNvSpPr>
+            <a:spLocks noGrp="1"/>
+          </p:cNvSpPr>
+          <p:nvPr>
+            <p:ph type="body" idx="3" sz="quarter"/>
+          </p:nvPr>
+        </p:nvSpPr>
+        <p:spPr/>
+        <p:txBody>
+          <a:bodyPr/>
+          <a:lstStyle/>
+          <a:p>
+            <a:r>
+              <a:t>Titel-Einblendung SV 8: Autorität &amp; Gehorsam.</a:t>
+            </a:r>
+          </a:p>
+        </p:txBody>
+      </p:sp>
+      <p:sp>
+        <p:nvSpPr>
+          <p:cNvPr id="4" name="Slide Number Placeholder 3"/>
+          <p:cNvSpPr>
+            <a:spLocks noGrp="1"/>
+          </p:cNvSpPr>
+          <p:nvPr>
+            <p:ph type="sldNum" idx="5" sz="quarter"/>
+          </p:nvPr>
+        </p:nvSpPr>
+        <p:spPr/>
+      </p:sp>
+    </p:spTree>
+  </p:cSld>
+  <p:clrMapOvr>
+    <a:masterClrMapping/>
+  </p:clrMapOvr>
+</p:notes>
+</file>
+
+<file path=ppt/notesSlides/notesSlide69.xml><?xml version="1.0" encoding="utf-8"?>
+<p:notes xmlns:a="http://schemas.openxmlformats.org/drawingml/2006/main" xmlns:p="http://schemas.openxmlformats.org/presentationml/2006/main" xmlns:r="http://schemas.openxmlformats.org/officeDocument/2006/relationships">
+  <p:cSld>
+    <p:spTree>
+      <p:nvGrpSpPr>
+        <p:cNvPr id="1" name=""/>
+        <p:cNvGrpSpPr/>
+        <p:nvPr/>
+      </p:nvGrpSpPr>
+      <p:grpSpPr>
+        <a:xfrm>
+          <a:off x="0" y="0"/>
+          <a:ext cx="0" cy="0"/>
+          <a:chOff x="0" y="0"/>
+          <a:chExt cx="0" cy="0"/>
+        </a:xfrm>
+      </p:grpSpPr>
+      <p:sp>
+        <p:nvSpPr>
+          <p:cNvPr id="2" name="Slide Image Placeholder 1"/>
+          <p:cNvSpPr>
+            <a:spLocks noGrp="1"/>
+          </p:cNvSpPr>
+          <p:nvPr>
+            <p:ph type="sldImg" idx="2"/>
+          </p:nvPr>
+        </p:nvSpPr>
+        <p:spPr/>
+      </p:sp>
+      <p:sp>
+        <p:nvSpPr>
+          <p:cNvPr id="3" name="Notes Placeholder 2"/>
+          <p:cNvSpPr>
+            <a:spLocks noGrp="1"/>
+          </p:cNvSpPr>
+          <p:nvPr>
+            <p:ph type="body" idx="3" sz="quarter"/>
+          </p:nvPr>
+        </p:nvSpPr>
+        <p:spPr/>
+        <p:txBody>
+          <a:bodyPr/>
+          <a:lstStyle/>
+          <a:p>
+            <a:r>
+              <a:t>Merksatz-Einblendung (Abschluss). Autorität &amp; Gehorsam</a:t>
             </a:r>
           </a:p>
         </p:txBody>
@@ -4083,6 +5236,706 @@
 </p:notes>
 </file>
 
+<file path=ppt/notesSlides/notesSlide70.xml><?xml version="1.0" encoding="utf-8"?>
+<p:notes xmlns:a="http://schemas.openxmlformats.org/drawingml/2006/main" xmlns:p="http://schemas.openxmlformats.org/presentationml/2006/main" xmlns:r="http://schemas.openxmlformats.org/officeDocument/2006/relationships">
+  <p:cSld>
+    <p:spTree>
+      <p:nvGrpSpPr>
+        <p:cNvPr id="1" name=""/>
+        <p:cNvGrpSpPr/>
+        <p:nvPr/>
+      </p:nvGrpSpPr>
+      <p:grpSpPr>
+        <a:xfrm>
+          <a:off x="0" y="0"/>
+          <a:ext cx="0" cy="0"/>
+          <a:chOff x="0" y="0"/>
+          <a:chExt cx="0" cy="0"/>
+        </a:xfrm>
+      </p:grpSpPr>
+      <p:sp>
+        <p:nvSpPr>
+          <p:cNvPr id="2" name="Slide Image Placeholder 1"/>
+          <p:cNvSpPr>
+            <a:spLocks noGrp="1"/>
+          </p:cNvSpPr>
+          <p:nvPr>
+            <p:ph type="sldImg" idx="2"/>
+          </p:nvPr>
+        </p:nvSpPr>
+        <p:spPr/>
+      </p:sp>
+      <p:sp>
+        <p:nvSpPr>
+          <p:cNvPr id="3" name="Notes Placeholder 2"/>
+          <p:cNvSpPr>
+            <a:spLocks noGrp="1"/>
+          </p:cNvSpPr>
+          <p:nvPr>
+            <p:ph type="body" idx="3" sz="quarter"/>
+          </p:nvPr>
+        </p:nvSpPr>
+        <p:spPr/>
+        <p:txBody>
+          <a:bodyPr/>
+          <a:lstStyle/>
+          <a:p>
+            <a:r>
+              <a:t>Titel-Einblendung SV 9: Angst als Steuerungsmittel.</a:t>
+            </a:r>
+          </a:p>
+        </p:txBody>
+      </p:sp>
+      <p:sp>
+        <p:nvSpPr>
+          <p:cNvPr id="4" name="Slide Number Placeholder 3"/>
+          <p:cNvSpPr>
+            <a:spLocks noGrp="1"/>
+          </p:cNvSpPr>
+          <p:nvPr>
+            <p:ph type="sldNum" idx="5" sz="quarter"/>
+          </p:nvPr>
+        </p:nvSpPr>
+        <p:spPr/>
+      </p:sp>
+    </p:spTree>
+  </p:cSld>
+  <p:clrMapOvr>
+    <a:masterClrMapping/>
+  </p:clrMapOvr>
+</p:notes>
+</file>
+
+<file path=ppt/notesSlides/notesSlide71.xml><?xml version="1.0" encoding="utf-8"?>
+<p:notes xmlns:a="http://schemas.openxmlformats.org/drawingml/2006/main" xmlns:p="http://schemas.openxmlformats.org/presentationml/2006/main" xmlns:r="http://schemas.openxmlformats.org/officeDocument/2006/relationships">
+  <p:cSld>
+    <p:spTree>
+      <p:nvGrpSpPr>
+        <p:cNvPr id="1" name=""/>
+        <p:cNvGrpSpPr/>
+        <p:nvPr/>
+      </p:nvGrpSpPr>
+      <p:grpSpPr>
+        <a:xfrm>
+          <a:off x="0" y="0"/>
+          <a:ext cx="0" cy="0"/>
+          <a:chOff x="0" y="0"/>
+          <a:chExt cx="0" cy="0"/>
+        </a:xfrm>
+      </p:grpSpPr>
+      <p:sp>
+        <p:nvSpPr>
+          <p:cNvPr id="2" name="Slide Image Placeholder 1"/>
+          <p:cNvSpPr>
+            <a:spLocks noGrp="1"/>
+          </p:cNvSpPr>
+          <p:nvPr>
+            <p:ph type="sldImg" idx="2"/>
+          </p:nvPr>
+        </p:nvSpPr>
+        <p:spPr/>
+      </p:sp>
+      <p:sp>
+        <p:nvSpPr>
+          <p:cNvPr id="3" name="Notes Placeholder 2"/>
+          <p:cNvSpPr>
+            <a:spLocks noGrp="1"/>
+          </p:cNvSpPr>
+          <p:nvPr>
+            <p:ph type="body" idx="3" sz="quarter"/>
+          </p:nvPr>
+        </p:nvSpPr>
+        <p:spPr/>
+        <p:txBody>
+          <a:bodyPr/>
+          <a:lstStyle/>
+          <a:p>
+            <a:r>
+              <a:t>Merksatz-Einblendung (Abschluss). Angst als Steuerungsmittel</a:t>
+            </a:r>
+          </a:p>
+        </p:txBody>
+      </p:sp>
+      <p:sp>
+        <p:nvSpPr>
+          <p:cNvPr id="4" name="Slide Number Placeholder 3"/>
+          <p:cNvSpPr>
+            <a:spLocks noGrp="1"/>
+          </p:cNvSpPr>
+          <p:nvPr>
+            <p:ph type="sldNum" idx="5" sz="quarter"/>
+          </p:nvPr>
+        </p:nvSpPr>
+        <p:spPr/>
+      </p:sp>
+    </p:spTree>
+  </p:cSld>
+  <p:clrMapOvr>
+    <a:masterClrMapping/>
+  </p:clrMapOvr>
+</p:notes>
+</file>
+
+<file path=ppt/notesSlides/notesSlide72.xml><?xml version="1.0" encoding="utf-8"?>
+<p:notes xmlns:a="http://schemas.openxmlformats.org/drawingml/2006/main" xmlns:p="http://schemas.openxmlformats.org/presentationml/2006/main" xmlns:r="http://schemas.openxmlformats.org/officeDocument/2006/relationships">
+  <p:cSld>
+    <p:spTree>
+      <p:nvGrpSpPr>
+        <p:cNvPr id="1" name=""/>
+        <p:cNvGrpSpPr/>
+        <p:nvPr/>
+      </p:nvGrpSpPr>
+      <p:grpSpPr>
+        <a:xfrm>
+          <a:off x="0" y="0"/>
+          <a:ext cx="0" cy="0"/>
+          <a:chOff x="0" y="0"/>
+          <a:chExt cx="0" cy="0"/>
+        </a:xfrm>
+      </p:grpSpPr>
+      <p:sp>
+        <p:nvSpPr>
+          <p:cNvPr id="2" name="Slide Image Placeholder 1"/>
+          <p:cNvSpPr>
+            <a:spLocks noGrp="1"/>
+          </p:cNvSpPr>
+          <p:nvPr>
+            <p:ph type="sldImg" idx="2"/>
+          </p:nvPr>
+        </p:nvSpPr>
+        <p:spPr/>
+      </p:sp>
+      <p:sp>
+        <p:nvSpPr>
+          <p:cNvPr id="3" name="Notes Placeholder 2"/>
+          <p:cNvSpPr>
+            <a:spLocks noGrp="1"/>
+          </p:cNvSpPr>
+          <p:nvPr>
+            <p:ph type="body" idx="3" sz="quarter"/>
+          </p:nvPr>
+        </p:nvSpPr>
+        <p:spPr/>
+        <p:txBody>
+          <a:bodyPr/>
+          <a:lstStyle/>
+          <a:p>
+            <a:r>
+              <a:t>Titel-Einblendung SV 10: Wiederholung wird zur Wahrheit.</a:t>
+            </a:r>
+          </a:p>
+        </p:txBody>
+      </p:sp>
+      <p:sp>
+        <p:nvSpPr>
+          <p:cNvPr id="4" name="Slide Number Placeholder 3"/>
+          <p:cNvSpPr>
+            <a:spLocks noGrp="1"/>
+          </p:cNvSpPr>
+          <p:nvPr>
+            <p:ph type="sldNum" idx="5" sz="quarter"/>
+          </p:nvPr>
+        </p:nvSpPr>
+        <p:spPr/>
+      </p:sp>
+    </p:spTree>
+  </p:cSld>
+  <p:clrMapOvr>
+    <a:masterClrMapping/>
+  </p:clrMapOvr>
+</p:notes>
+</file>
+
+<file path=ppt/notesSlides/notesSlide73.xml><?xml version="1.0" encoding="utf-8"?>
+<p:notes xmlns:a="http://schemas.openxmlformats.org/drawingml/2006/main" xmlns:p="http://schemas.openxmlformats.org/presentationml/2006/main" xmlns:r="http://schemas.openxmlformats.org/officeDocument/2006/relationships">
+  <p:cSld>
+    <p:spTree>
+      <p:nvGrpSpPr>
+        <p:cNvPr id="1" name=""/>
+        <p:cNvGrpSpPr/>
+        <p:nvPr/>
+      </p:nvGrpSpPr>
+      <p:grpSpPr>
+        <a:xfrm>
+          <a:off x="0" y="0"/>
+          <a:ext cx="0" cy="0"/>
+          <a:chOff x="0" y="0"/>
+          <a:chExt cx="0" cy="0"/>
+        </a:xfrm>
+      </p:grpSpPr>
+      <p:sp>
+        <p:nvSpPr>
+          <p:cNvPr id="2" name="Slide Image Placeholder 1"/>
+          <p:cNvSpPr>
+            <a:spLocks noGrp="1"/>
+          </p:cNvSpPr>
+          <p:nvPr>
+            <p:ph type="sldImg" idx="2"/>
+          </p:nvPr>
+        </p:nvSpPr>
+        <p:spPr/>
+      </p:sp>
+      <p:sp>
+        <p:nvSpPr>
+          <p:cNvPr id="3" name="Notes Placeholder 2"/>
+          <p:cNvSpPr>
+            <a:spLocks noGrp="1"/>
+          </p:cNvSpPr>
+          <p:nvPr>
+            <p:ph type="body" idx="3" sz="quarter"/>
+          </p:nvPr>
+        </p:nvSpPr>
+        <p:spPr/>
+        <p:txBody>
+          <a:bodyPr/>
+          <a:lstStyle/>
+          <a:p>
+            <a:r>
+              <a:t>Merksatz-Einblendung (Abschluss). Wiederholung wird zur Wahrheit</a:t>
+            </a:r>
+          </a:p>
+        </p:txBody>
+      </p:sp>
+      <p:sp>
+        <p:nvSpPr>
+          <p:cNvPr id="4" name="Slide Number Placeholder 3"/>
+          <p:cNvSpPr>
+            <a:spLocks noGrp="1"/>
+          </p:cNvSpPr>
+          <p:nvPr>
+            <p:ph type="sldNum" idx="5" sz="quarter"/>
+          </p:nvPr>
+        </p:nvSpPr>
+        <p:spPr/>
+      </p:sp>
+    </p:spTree>
+  </p:cSld>
+  <p:clrMapOvr>
+    <a:masterClrMapping/>
+  </p:clrMapOvr>
+</p:notes>
+</file>
+
+<file path=ppt/notesSlides/notesSlide74.xml><?xml version="1.0" encoding="utf-8"?>
+<p:notes xmlns:a="http://schemas.openxmlformats.org/drawingml/2006/main" xmlns:p="http://schemas.openxmlformats.org/presentationml/2006/main" xmlns:r="http://schemas.openxmlformats.org/officeDocument/2006/relationships">
+  <p:cSld>
+    <p:spTree>
+      <p:nvGrpSpPr>
+        <p:cNvPr id="1" name=""/>
+        <p:cNvGrpSpPr/>
+        <p:nvPr/>
+      </p:nvGrpSpPr>
+      <p:grpSpPr>
+        <a:xfrm>
+          <a:off x="0" y="0"/>
+          <a:ext cx="0" cy="0"/>
+          <a:chOff x="0" y="0"/>
+          <a:chExt cx="0" cy="0"/>
+        </a:xfrm>
+      </p:grpSpPr>
+      <p:sp>
+        <p:nvSpPr>
+          <p:cNvPr id="2" name="Slide Image Placeholder 1"/>
+          <p:cNvSpPr>
+            <a:spLocks noGrp="1"/>
+          </p:cNvSpPr>
+          <p:nvPr>
+            <p:ph type="sldImg" idx="2"/>
+          </p:nvPr>
+        </p:nvSpPr>
+        <p:spPr/>
+      </p:sp>
+      <p:sp>
+        <p:nvSpPr>
+          <p:cNvPr id="3" name="Notes Placeholder 2"/>
+          <p:cNvSpPr>
+            <a:spLocks noGrp="1"/>
+          </p:cNvSpPr>
+          <p:nvPr>
+            <p:ph type="body" idx="3" sz="quarter"/>
+          </p:nvPr>
+        </p:nvSpPr>
+        <p:spPr/>
+        <p:txBody>
+          <a:bodyPr/>
+          <a:lstStyle/>
+          <a:p>
+            <a:r>
+              <a:t>Titel-Einblendung SV 11: Ablenkung &amp; Überflutung.</a:t>
+            </a:r>
+          </a:p>
+        </p:txBody>
+      </p:sp>
+      <p:sp>
+        <p:nvSpPr>
+          <p:cNvPr id="4" name="Slide Number Placeholder 3"/>
+          <p:cNvSpPr>
+            <a:spLocks noGrp="1"/>
+          </p:cNvSpPr>
+          <p:nvPr>
+            <p:ph type="sldNum" idx="5" sz="quarter"/>
+          </p:nvPr>
+        </p:nvSpPr>
+        <p:spPr/>
+      </p:sp>
+    </p:spTree>
+  </p:cSld>
+  <p:clrMapOvr>
+    <a:masterClrMapping/>
+  </p:clrMapOvr>
+</p:notes>
+</file>
+
+<file path=ppt/notesSlides/notesSlide75.xml><?xml version="1.0" encoding="utf-8"?>
+<p:notes xmlns:a="http://schemas.openxmlformats.org/drawingml/2006/main" xmlns:p="http://schemas.openxmlformats.org/presentationml/2006/main" xmlns:r="http://schemas.openxmlformats.org/officeDocument/2006/relationships">
+  <p:cSld>
+    <p:spTree>
+      <p:nvGrpSpPr>
+        <p:cNvPr id="1" name=""/>
+        <p:cNvGrpSpPr/>
+        <p:nvPr/>
+      </p:nvGrpSpPr>
+      <p:grpSpPr>
+        <a:xfrm>
+          <a:off x="0" y="0"/>
+          <a:ext cx="0" cy="0"/>
+          <a:chOff x="0" y="0"/>
+          <a:chExt cx="0" cy="0"/>
+        </a:xfrm>
+      </p:grpSpPr>
+      <p:sp>
+        <p:nvSpPr>
+          <p:cNvPr id="2" name="Slide Image Placeholder 1"/>
+          <p:cNvSpPr>
+            <a:spLocks noGrp="1"/>
+          </p:cNvSpPr>
+          <p:nvPr>
+            <p:ph type="sldImg" idx="2"/>
+          </p:nvPr>
+        </p:nvSpPr>
+        <p:spPr/>
+      </p:sp>
+      <p:sp>
+        <p:nvSpPr>
+          <p:cNvPr id="3" name="Notes Placeholder 2"/>
+          <p:cNvSpPr>
+            <a:spLocks noGrp="1"/>
+          </p:cNvSpPr>
+          <p:nvPr>
+            <p:ph type="body" idx="3" sz="quarter"/>
+          </p:nvPr>
+        </p:nvSpPr>
+        <p:spPr/>
+        <p:txBody>
+          <a:bodyPr/>
+          <a:lstStyle/>
+          <a:p>
+            <a:r>
+              <a:t>Merksatz-Einblendung (Abschluss). Ablenkung &amp; Überflutung</a:t>
+            </a:r>
+          </a:p>
+        </p:txBody>
+      </p:sp>
+      <p:sp>
+        <p:nvSpPr>
+          <p:cNvPr id="4" name="Slide Number Placeholder 3"/>
+          <p:cNvSpPr>
+            <a:spLocks noGrp="1"/>
+          </p:cNvSpPr>
+          <p:nvPr>
+            <p:ph type="sldNum" idx="5" sz="quarter"/>
+          </p:nvPr>
+        </p:nvSpPr>
+        <p:spPr/>
+      </p:sp>
+    </p:spTree>
+  </p:cSld>
+  <p:clrMapOvr>
+    <a:masterClrMapping/>
+  </p:clrMapOvr>
+</p:notes>
+</file>
+
+<file path=ppt/notesSlides/notesSlide76.xml><?xml version="1.0" encoding="utf-8"?>
+<p:notes xmlns:a="http://schemas.openxmlformats.org/drawingml/2006/main" xmlns:p="http://schemas.openxmlformats.org/presentationml/2006/main" xmlns:r="http://schemas.openxmlformats.org/officeDocument/2006/relationships">
+  <p:cSld>
+    <p:spTree>
+      <p:nvGrpSpPr>
+        <p:cNvPr id="1" name=""/>
+        <p:cNvGrpSpPr/>
+        <p:nvPr/>
+      </p:nvGrpSpPr>
+      <p:grpSpPr>
+        <a:xfrm>
+          <a:off x="0" y="0"/>
+          <a:ext cx="0" cy="0"/>
+          <a:chOff x="0" y="0"/>
+          <a:chExt cx="0" cy="0"/>
+        </a:xfrm>
+      </p:grpSpPr>
+      <p:sp>
+        <p:nvSpPr>
+          <p:cNvPr id="2" name="Slide Image Placeholder 1"/>
+          <p:cNvSpPr>
+            <a:spLocks noGrp="1"/>
+          </p:cNvSpPr>
+          <p:nvPr>
+            <p:ph type="sldImg" idx="2"/>
+          </p:nvPr>
+        </p:nvSpPr>
+        <p:spPr/>
+      </p:sp>
+      <p:sp>
+        <p:nvSpPr>
+          <p:cNvPr id="3" name="Notes Placeholder 2"/>
+          <p:cNvSpPr>
+            <a:spLocks noGrp="1"/>
+          </p:cNvSpPr>
+          <p:nvPr>
+            <p:ph type="body" idx="3" sz="quarter"/>
+          </p:nvPr>
+        </p:nvSpPr>
+        <p:spPr/>
+        <p:txBody>
+          <a:bodyPr/>
+          <a:lstStyle/>
+          <a:p>
+            <a:r>
+              <a:t>Titel-Einblendung SV 12: Kognitive Dissonanz.</a:t>
+            </a:r>
+          </a:p>
+        </p:txBody>
+      </p:sp>
+      <p:sp>
+        <p:nvSpPr>
+          <p:cNvPr id="4" name="Slide Number Placeholder 3"/>
+          <p:cNvSpPr>
+            <a:spLocks noGrp="1"/>
+          </p:cNvSpPr>
+          <p:nvPr>
+            <p:ph type="sldNum" idx="5" sz="quarter"/>
+          </p:nvPr>
+        </p:nvSpPr>
+        <p:spPr/>
+      </p:sp>
+    </p:spTree>
+  </p:cSld>
+  <p:clrMapOvr>
+    <a:masterClrMapping/>
+  </p:clrMapOvr>
+</p:notes>
+</file>
+
+<file path=ppt/notesSlides/notesSlide77.xml><?xml version="1.0" encoding="utf-8"?>
+<p:notes xmlns:a="http://schemas.openxmlformats.org/drawingml/2006/main" xmlns:p="http://schemas.openxmlformats.org/presentationml/2006/main" xmlns:r="http://schemas.openxmlformats.org/officeDocument/2006/relationships">
+  <p:cSld>
+    <p:spTree>
+      <p:nvGrpSpPr>
+        <p:cNvPr id="1" name=""/>
+        <p:cNvGrpSpPr/>
+        <p:nvPr/>
+      </p:nvGrpSpPr>
+      <p:grpSpPr>
+        <a:xfrm>
+          <a:off x="0" y="0"/>
+          <a:ext cx="0" cy="0"/>
+          <a:chOff x="0" y="0"/>
+          <a:chExt cx="0" cy="0"/>
+        </a:xfrm>
+      </p:grpSpPr>
+      <p:sp>
+        <p:nvSpPr>
+          <p:cNvPr id="2" name="Slide Image Placeholder 1"/>
+          <p:cNvSpPr>
+            <a:spLocks noGrp="1"/>
+          </p:cNvSpPr>
+          <p:nvPr>
+            <p:ph type="sldImg" idx="2"/>
+          </p:nvPr>
+        </p:nvSpPr>
+        <p:spPr/>
+      </p:sp>
+      <p:sp>
+        <p:nvSpPr>
+          <p:cNvPr id="3" name="Notes Placeholder 2"/>
+          <p:cNvSpPr>
+            <a:spLocks noGrp="1"/>
+          </p:cNvSpPr>
+          <p:nvPr>
+            <p:ph type="body" idx="3" sz="quarter"/>
+          </p:nvPr>
+        </p:nvSpPr>
+        <p:spPr/>
+        <p:txBody>
+          <a:bodyPr/>
+          <a:lstStyle/>
+          <a:p>
+            <a:r>
+              <a:t>Merksatz-Einblendung (Abschluss). Kognitive Dissonanz</a:t>
+            </a:r>
+          </a:p>
+        </p:txBody>
+      </p:sp>
+      <p:sp>
+        <p:nvSpPr>
+          <p:cNvPr id="4" name="Slide Number Placeholder 3"/>
+          <p:cNvSpPr>
+            <a:spLocks noGrp="1"/>
+          </p:cNvSpPr>
+          <p:nvPr>
+            <p:ph type="sldNum" idx="5" sz="quarter"/>
+          </p:nvPr>
+        </p:nvSpPr>
+        <p:spPr/>
+      </p:sp>
+    </p:spTree>
+  </p:cSld>
+  <p:clrMapOvr>
+    <a:masterClrMapping/>
+  </p:clrMapOvr>
+</p:notes>
+</file>
+
+<file path=ppt/notesSlides/notesSlide78.xml><?xml version="1.0" encoding="utf-8"?>
+<p:notes xmlns:a="http://schemas.openxmlformats.org/drawingml/2006/main" xmlns:p="http://schemas.openxmlformats.org/presentationml/2006/main" xmlns:r="http://schemas.openxmlformats.org/officeDocument/2006/relationships">
+  <p:cSld>
+    <p:spTree>
+      <p:nvGrpSpPr>
+        <p:cNvPr id="1" name=""/>
+        <p:cNvGrpSpPr/>
+        <p:nvPr/>
+      </p:nvGrpSpPr>
+      <p:grpSpPr>
+        <a:xfrm>
+          <a:off x="0" y="0"/>
+          <a:ext cx="0" cy="0"/>
+          <a:chOff x="0" y="0"/>
+          <a:chExt cx="0" cy="0"/>
+        </a:xfrm>
+      </p:grpSpPr>
+      <p:sp>
+        <p:nvSpPr>
+          <p:cNvPr id="2" name="Slide Image Placeholder 1"/>
+          <p:cNvSpPr>
+            <a:spLocks noGrp="1"/>
+          </p:cNvSpPr>
+          <p:nvPr>
+            <p:ph type="sldImg" idx="2"/>
+          </p:nvPr>
+        </p:nvSpPr>
+        <p:spPr/>
+      </p:sp>
+      <p:sp>
+        <p:nvSpPr>
+          <p:cNvPr id="3" name="Notes Placeholder 2"/>
+          <p:cNvSpPr>
+            <a:spLocks noGrp="1"/>
+          </p:cNvSpPr>
+          <p:nvPr>
+            <p:ph type="body" idx="3" sz="quarter"/>
+          </p:nvPr>
+        </p:nvSpPr>
+        <p:spPr/>
+        <p:txBody>
+          <a:bodyPr/>
+          <a:lstStyle/>
+          <a:p>
+            <a:r>
+              <a:t>Titel-Einblendung SV 13: Normalisierung.</a:t>
+            </a:r>
+          </a:p>
+        </p:txBody>
+      </p:sp>
+      <p:sp>
+        <p:nvSpPr>
+          <p:cNvPr id="4" name="Slide Number Placeholder 3"/>
+          <p:cNvSpPr>
+            <a:spLocks noGrp="1"/>
+          </p:cNvSpPr>
+          <p:nvPr>
+            <p:ph type="sldNum" idx="5" sz="quarter"/>
+          </p:nvPr>
+        </p:nvSpPr>
+        <p:spPr/>
+      </p:sp>
+    </p:spTree>
+  </p:cSld>
+  <p:clrMapOvr>
+    <a:masterClrMapping/>
+  </p:clrMapOvr>
+</p:notes>
+</file>
+
+<file path=ppt/notesSlides/notesSlide79.xml><?xml version="1.0" encoding="utf-8"?>
+<p:notes xmlns:a="http://schemas.openxmlformats.org/drawingml/2006/main" xmlns:p="http://schemas.openxmlformats.org/presentationml/2006/main" xmlns:r="http://schemas.openxmlformats.org/officeDocument/2006/relationships">
+  <p:cSld>
+    <p:spTree>
+      <p:nvGrpSpPr>
+        <p:cNvPr id="1" name=""/>
+        <p:cNvGrpSpPr/>
+        <p:nvPr/>
+      </p:nvGrpSpPr>
+      <p:grpSpPr>
+        <a:xfrm>
+          <a:off x="0" y="0"/>
+          <a:ext cx="0" cy="0"/>
+          <a:chOff x="0" y="0"/>
+          <a:chExt cx="0" cy="0"/>
+        </a:xfrm>
+      </p:grpSpPr>
+      <p:sp>
+        <p:nvSpPr>
+          <p:cNvPr id="2" name="Slide Image Placeholder 1"/>
+          <p:cNvSpPr>
+            <a:spLocks noGrp="1"/>
+          </p:cNvSpPr>
+          <p:nvPr>
+            <p:ph type="sldImg" idx="2"/>
+          </p:nvPr>
+        </p:nvSpPr>
+        <p:spPr/>
+      </p:sp>
+      <p:sp>
+        <p:nvSpPr>
+          <p:cNvPr id="3" name="Notes Placeholder 2"/>
+          <p:cNvSpPr>
+            <a:spLocks noGrp="1"/>
+          </p:cNvSpPr>
+          <p:nvPr>
+            <p:ph type="body" idx="3" sz="quarter"/>
+          </p:nvPr>
+        </p:nvSpPr>
+        <p:spPr/>
+        <p:txBody>
+          <a:bodyPr/>
+          <a:lstStyle/>
+          <a:p>
+            <a:r>
+              <a:t>Merksatz-Einblendung (Abschluss). Normalisierung</a:t>
+            </a:r>
+          </a:p>
+        </p:txBody>
+      </p:sp>
+      <p:sp>
+        <p:nvSpPr>
+          <p:cNvPr id="4" name="Slide Number Placeholder 3"/>
+          <p:cNvSpPr>
+            <a:spLocks noGrp="1"/>
+          </p:cNvSpPr>
+          <p:nvPr>
+            <p:ph type="sldNum" idx="5" sz="quarter"/>
+          </p:nvPr>
+        </p:nvSpPr>
+        <p:spPr/>
+      </p:sp>
+    </p:spTree>
+  </p:cSld>
+  <p:clrMapOvr>
+    <a:masterClrMapping/>
+  </p:clrMapOvr>
+</p:notes>
+</file>
+
 <file path=ppt/notesSlides/notesSlide8.xml><?xml version="1.0" encoding="utf-8"?>
 <p:notes xmlns:a="http://schemas.openxmlformats.org/drawingml/2006/main" xmlns:p="http://schemas.openxmlformats.org/presentationml/2006/main" xmlns:r="http://schemas.openxmlformats.org/officeDocument/2006/relationships">
   <p:cSld>
@@ -4129,6 +5982,426 @@
           <a:p>
             <a:r>
               <a:t>Merksatz-Einblendung (Abschluss). Stufe 04 · Emotionale Reifung</a:t>
+            </a:r>
+          </a:p>
+        </p:txBody>
+      </p:sp>
+      <p:sp>
+        <p:nvSpPr>
+          <p:cNvPr id="4" name="Slide Number Placeholder 3"/>
+          <p:cNvSpPr>
+            <a:spLocks noGrp="1"/>
+          </p:cNvSpPr>
+          <p:nvPr>
+            <p:ph type="sldNum" idx="5" sz="quarter"/>
+          </p:nvPr>
+        </p:nvSpPr>
+        <p:spPr/>
+      </p:sp>
+    </p:spTree>
+  </p:cSld>
+  <p:clrMapOvr>
+    <a:masterClrMapping/>
+  </p:clrMapOvr>
+</p:notes>
+</file>
+
+<file path=ppt/notesSlides/notesSlide80.xml><?xml version="1.0" encoding="utf-8"?>
+<p:notes xmlns:a="http://schemas.openxmlformats.org/drawingml/2006/main" xmlns:p="http://schemas.openxmlformats.org/presentationml/2006/main" xmlns:r="http://schemas.openxmlformats.org/officeDocument/2006/relationships">
+  <p:cSld>
+    <p:spTree>
+      <p:nvGrpSpPr>
+        <p:cNvPr id="1" name=""/>
+        <p:cNvGrpSpPr/>
+        <p:nvPr/>
+      </p:nvGrpSpPr>
+      <p:grpSpPr>
+        <a:xfrm>
+          <a:off x="0" y="0"/>
+          <a:ext cx="0" cy="0"/>
+          <a:chOff x="0" y="0"/>
+          <a:chExt cx="0" cy="0"/>
+        </a:xfrm>
+      </p:grpSpPr>
+      <p:sp>
+        <p:nvSpPr>
+          <p:cNvPr id="2" name="Slide Image Placeholder 1"/>
+          <p:cNvSpPr>
+            <a:spLocks noGrp="1"/>
+          </p:cNvSpPr>
+          <p:nvPr>
+            <p:ph type="sldImg" idx="2"/>
+          </p:nvPr>
+        </p:nvSpPr>
+        <p:spPr/>
+      </p:sp>
+      <p:sp>
+        <p:nvSpPr>
+          <p:cNvPr id="3" name="Notes Placeholder 2"/>
+          <p:cNvSpPr>
+            <a:spLocks noGrp="1"/>
+          </p:cNvSpPr>
+          <p:nvPr>
+            <p:ph type="body" idx="3" sz="quarter"/>
+          </p:nvPr>
+        </p:nvSpPr>
+        <p:spPr/>
+        <p:txBody>
+          <a:bodyPr/>
+          <a:lstStyle/>
+          <a:p>
+            <a:r>
+              <a:t>Titel-Einblendung SV 14: Bilder statt Argumente.</a:t>
+            </a:r>
+          </a:p>
+        </p:txBody>
+      </p:sp>
+      <p:sp>
+        <p:nvSpPr>
+          <p:cNvPr id="4" name="Slide Number Placeholder 3"/>
+          <p:cNvSpPr>
+            <a:spLocks noGrp="1"/>
+          </p:cNvSpPr>
+          <p:nvPr>
+            <p:ph type="sldNum" idx="5" sz="quarter"/>
+          </p:nvPr>
+        </p:nvSpPr>
+        <p:spPr/>
+      </p:sp>
+    </p:spTree>
+  </p:cSld>
+  <p:clrMapOvr>
+    <a:masterClrMapping/>
+  </p:clrMapOvr>
+</p:notes>
+</file>
+
+<file path=ppt/notesSlides/notesSlide81.xml><?xml version="1.0" encoding="utf-8"?>
+<p:notes xmlns:a="http://schemas.openxmlformats.org/drawingml/2006/main" xmlns:p="http://schemas.openxmlformats.org/presentationml/2006/main" xmlns:r="http://schemas.openxmlformats.org/officeDocument/2006/relationships">
+  <p:cSld>
+    <p:spTree>
+      <p:nvGrpSpPr>
+        <p:cNvPr id="1" name=""/>
+        <p:cNvGrpSpPr/>
+        <p:nvPr/>
+      </p:nvGrpSpPr>
+      <p:grpSpPr>
+        <a:xfrm>
+          <a:off x="0" y="0"/>
+          <a:ext cx="0" cy="0"/>
+          <a:chOff x="0" y="0"/>
+          <a:chExt cx="0" cy="0"/>
+        </a:xfrm>
+      </p:grpSpPr>
+      <p:sp>
+        <p:nvSpPr>
+          <p:cNvPr id="2" name="Slide Image Placeholder 1"/>
+          <p:cNvSpPr>
+            <a:spLocks noGrp="1"/>
+          </p:cNvSpPr>
+          <p:nvPr>
+            <p:ph type="sldImg" idx="2"/>
+          </p:nvPr>
+        </p:nvSpPr>
+        <p:spPr/>
+      </p:sp>
+      <p:sp>
+        <p:nvSpPr>
+          <p:cNvPr id="3" name="Notes Placeholder 2"/>
+          <p:cNvSpPr>
+            <a:spLocks noGrp="1"/>
+          </p:cNvSpPr>
+          <p:nvPr>
+            <p:ph type="body" idx="3" sz="quarter"/>
+          </p:nvPr>
+        </p:nvSpPr>
+        <p:spPr/>
+        <p:txBody>
+          <a:bodyPr/>
+          <a:lstStyle/>
+          <a:p>
+            <a:r>
+              <a:t>Merksatz-Einblendung (Abschluss). Bilder statt Argumente</a:t>
+            </a:r>
+          </a:p>
+        </p:txBody>
+      </p:sp>
+      <p:sp>
+        <p:nvSpPr>
+          <p:cNvPr id="4" name="Slide Number Placeholder 3"/>
+          <p:cNvSpPr>
+            <a:spLocks noGrp="1"/>
+          </p:cNvSpPr>
+          <p:nvPr>
+            <p:ph type="sldNum" idx="5" sz="quarter"/>
+          </p:nvPr>
+        </p:nvSpPr>
+        <p:spPr/>
+      </p:sp>
+    </p:spTree>
+  </p:cSld>
+  <p:clrMapOvr>
+    <a:masterClrMapping/>
+  </p:clrMapOvr>
+</p:notes>
+</file>
+
+<file path=ppt/notesSlides/notesSlide82.xml><?xml version="1.0" encoding="utf-8"?>
+<p:notes xmlns:a="http://schemas.openxmlformats.org/drawingml/2006/main" xmlns:p="http://schemas.openxmlformats.org/presentationml/2006/main" xmlns:r="http://schemas.openxmlformats.org/officeDocument/2006/relationships">
+  <p:cSld>
+    <p:spTree>
+      <p:nvGrpSpPr>
+        <p:cNvPr id="1" name=""/>
+        <p:cNvGrpSpPr/>
+        <p:nvPr/>
+      </p:nvGrpSpPr>
+      <p:grpSpPr>
+        <a:xfrm>
+          <a:off x="0" y="0"/>
+          <a:ext cx="0" cy="0"/>
+          <a:chOff x="0" y="0"/>
+          <a:chExt cx="0" cy="0"/>
+        </a:xfrm>
+      </p:grpSpPr>
+      <p:sp>
+        <p:nvSpPr>
+          <p:cNvPr id="2" name="Slide Image Placeholder 1"/>
+          <p:cNvSpPr>
+            <a:spLocks noGrp="1"/>
+          </p:cNvSpPr>
+          <p:nvPr>
+            <p:ph type="sldImg" idx="2"/>
+          </p:nvPr>
+        </p:nvSpPr>
+        <p:spPr/>
+      </p:sp>
+      <p:sp>
+        <p:nvSpPr>
+          <p:cNvPr id="3" name="Notes Placeholder 2"/>
+          <p:cNvSpPr>
+            <a:spLocks noGrp="1"/>
+          </p:cNvSpPr>
+          <p:nvPr>
+            <p:ph type="body" idx="3" sz="quarter"/>
+          </p:nvPr>
+        </p:nvSpPr>
+        <p:spPr/>
+        <p:txBody>
+          <a:bodyPr/>
+          <a:lstStyle/>
+          <a:p>
+            <a:r>
+              <a:t>Titel-Einblendung SV 15: Identität &amp; Meinung.</a:t>
+            </a:r>
+          </a:p>
+        </p:txBody>
+      </p:sp>
+      <p:sp>
+        <p:nvSpPr>
+          <p:cNvPr id="4" name="Slide Number Placeholder 3"/>
+          <p:cNvSpPr>
+            <a:spLocks noGrp="1"/>
+          </p:cNvSpPr>
+          <p:nvPr>
+            <p:ph type="sldNum" idx="5" sz="quarter"/>
+          </p:nvPr>
+        </p:nvSpPr>
+        <p:spPr/>
+      </p:sp>
+    </p:spTree>
+  </p:cSld>
+  <p:clrMapOvr>
+    <a:masterClrMapping/>
+  </p:clrMapOvr>
+</p:notes>
+</file>
+
+<file path=ppt/notesSlides/notesSlide83.xml><?xml version="1.0" encoding="utf-8"?>
+<p:notes xmlns:a="http://schemas.openxmlformats.org/drawingml/2006/main" xmlns:p="http://schemas.openxmlformats.org/presentationml/2006/main" xmlns:r="http://schemas.openxmlformats.org/officeDocument/2006/relationships">
+  <p:cSld>
+    <p:spTree>
+      <p:nvGrpSpPr>
+        <p:cNvPr id="1" name=""/>
+        <p:cNvGrpSpPr/>
+        <p:nvPr/>
+      </p:nvGrpSpPr>
+      <p:grpSpPr>
+        <a:xfrm>
+          <a:off x="0" y="0"/>
+          <a:ext cx="0" cy="0"/>
+          <a:chOff x="0" y="0"/>
+          <a:chExt cx="0" cy="0"/>
+        </a:xfrm>
+      </p:grpSpPr>
+      <p:sp>
+        <p:nvSpPr>
+          <p:cNvPr id="2" name="Slide Image Placeholder 1"/>
+          <p:cNvSpPr>
+            <a:spLocks noGrp="1"/>
+          </p:cNvSpPr>
+          <p:nvPr>
+            <p:ph type="sldImg" idx="2"/>
+          </p:nvPr>
+        </p:nvSpPr>
+        <p:spPr/>
+      </p:sp>
+      <p:sp>
+        <p:nvSpPr>
+          <p:cNvPr id="3" name="Notes Placeholder 2"/>
+          <p:cNvSpPr>
+            <a:spLocks noGrp="1"/>
+          </p:cNvSpPr>
+          <p:nvPr>
+            <p:ph type="body" idx="3" sz="quarter"/>
+          </p:nvPr>
+        </p:nvSpPr>
+        <p:spPr/>
+        <p:txBody>
+          <a:bodyPr/>
+          <a:lstStyle/>
+          <a:p>
+            <a:r>
+              <a:t>Merksatz-Einblendung (Abschluss). Identität &amp; Meinung</a:t>
+            </a:r>
+          </a:p>
+        </p:txBody>
+      </p:sp>
+      <p:sp>
+        <p:nvSpPr>
+          <p:cNvPr id="4" name="Slide Number Placeholder 3"/>
+          <p:cNvSpPr>
+            <a:spLocks noGrp="1"/>
+          </p:cNvSpPr>
+          <p:nvPr>
+            <p:ph type="sldNum" idx="5" sz="quarter"/>
+          </p:nvPr>
+        </p:nvSpPr>
+        <p:spPr/>
+      </p:sp>
+    </p:spTree>
+  </p:cSld>
+  <p:clrMapOvr>
+    <a:masterClrMapping/>
+  </p:clrMapOvr>
+</p:notes>
+</file>
+
+<file path=ppt/notesSlides/notesSlide84.xml><?xml version="1.0" encoding="utf-8"?>
+<p:notes xmlns:a="http://schemas.openxmlformats.org/drawingml/2006/main" xmlns:p="http://schemas.openxmlformats.org/presentationml/2006/main" xmlns:r="http://schemas.openxmlformats.org/officeDocument/2006/relationships">
+  <p:cSld>
+    <p:spTree>
+      <p:nvGrpSpPr>
+        <p:cNvPr id="1" name=""/>
+        <p:cNvGrpSpPr/>
+        <p:nvPr/>
+      </p:nvGrpSpPr>
+      <p:grpSpPr>
+        <a:xfrm>
+          <a:off x="0" y="0"/>
+          <a:ext cx="0" cy="0"/>
+          <a:chOff x="0" y="0"/>
+          <a:chExt cx="0" cy="0"/>
+        </a:xfrm>
+      </p:grpSpPr>
+      <p:sp>
+        <p:nvSpPr>
+          <p:cNvPr id="2" name="Slide Image Placeholder 1"/>
+          <p:cNvSpPr>
+            <a:spLocks noGrp="1"/>
+          </p:cNvSpPr>
+          <p:nvPr>
+            <p:ph type="sldImg" idx="2"/>
+          </p:nvPr>
+        </p:nvSpPr>
+        <p:spPr/>
+      </p:sp>
+      <p:sp>
+        <p:nvSpPr>
+          <p:cNvPr id="3" name="Notes Placeholder 2"/>
+          <p:cNvSpPr>
+            <a:spLocks noGrp="1"/>
+          </p:cNvSpPr>
+          <p:nvPr>
+            <p:ph type="body" idx="3" sz="quarter"/>
+          </p:nvPr>
+        </p:nvSpPr>
+        <p:spPr/>
+        <p:txBody>
+          <a:bodyPr/>
+          <a:lstStyle/>
+          <a:p>
+            <a:r>
+              <a:t>Titel-Einblendung SV 16: Reizüberflutung &amp; Alarmbereitschaft.</a:t>
+            </a:r>
+          </a:p>
+        </p:txBody>
+      </p:sp>
+      <p:sp>
+        <p:nvSpPr>
+          <p:cNvPr id="4" name="Slide Number Placeholder 3"/>
+          <p:cNvSpPr>
+            <a:spLocks noGrp="1"/>
+          </p:cNvSpPr>
+          <p:nvPr>
+            <p:ph type="sldNum" idx="5" sz="quarter"/>
+          </p:nvPr>
+        </p:nvSpPr>
+        <p:spPr/>
+      </p:sp>
+    </p:spTree>
+  </p:cSld>
+  <p:clrMapOvr>
+    <a:masterClrMapping/>
+  </p:clrMapOvr>
+</p:notes>
+</file>
+
+<file path=ppt/notesSlides/notesSlide85.xml><?xml version="1.0" encoding="utf-8"?>
+<p:notes xmlns:a="http://schemas.openxmlformats.org/drawingml/2006/main" xmlns:p="http://schemas.openxmlformats.org/presentationml/2006/main" xmlns:r="http://schemas.openxmlformats.org/officeDocument/2006/relationships">
+  <p:cSld>
+    <p:spTree>
+      <p:nvGrpSpPr>
+        <p:cNvPr id="1" name=""/>
+        <p:cNvGrpSpPr/>
+        <p:nvPr/>
+      </p:nvGrpSpPr>
+      <p:grpSpPr>
+        <a:xfrm>
+          <a:off x="0" y="0"/>
+          <a:ext cx="0" cy="0"/>
+          <a:chOff x="0" y="0"/>
+          <a:chExt cx="0" cy="0"/>
+        </a:xfrm>
+      </p:grpSpPr>
+      <p:sp>
+        <p:nvSpPr>
+          <p:cNvPr id="2" name="Slide Image Placeholder 1"/>
+          <p:cNvSpPr>
+            <a:spLocks noGrp="1"/>
+          </p:cNvSpPr>
+          <p:nvPr>
+            <p:ph type="sldImg" idx="2"/>
+          </p:nvPr>
+        </p:nvSpPr>
+        <p:spPr/>
+      </p:sp>
+      <p:sp>
+        <p:nvSpPr>
+          <p:cNvPr id="3" name="Notes Placeholder 2"/>
+          <p:cNvSpPr>
+            <a:spLocks noGrp="1"/>
+          </p:cNvSpPr>
+          <p:nvPr>
+            <p:ph type="body" idx="3" sz="quarter"/>
+          </p:nvPr>
+        </p:nvSpPr>
+        <p:spPr/>
+        <p:txBody>
+          <a:bodyPr/>
+          <a:lstStyle/>
+          <a:p>
+            <a:r>
+              <a:t>Merksatz-Einblendung (Abschluss). Reizüberflutung &amp; Alarmbereitschaft</a:t>
             </a:r>
           </a:p>
         </p:txBody>
@@ -12806,7 +15079,7 @@
         <p:spPr>
           <a:xfrm>
             <a:off x="868680" y="2286000"/>
-            <a:ext cx="9144000" cy="365760"/>
+            <a:ext cx="10454335" cy="365760"/>
           </a:xfrm>
           <a:prstGeom prst="rect">
             <a:avLst/>
@@ -13165,7 +15438,7 @@
         <p:spPr>
           <a:xfrm>
             <a:off x="868680" y="2286000"/>
-            <a:ext cx="9144000" cy="365760"/>
+            <a:ext cx="10454335" cy="365760"/>
           </a:xfrm>
           <a:prstGeom prst="rect">
             <a:avLst/>
@@ -13524,7 +15797,7 @@
         <p:spPr>
           <a:xfrm>
             <a:off x="868680" y="2286000"/>
-            <a:ext cx="9144000" cy="365760"/>
+            <a:ext cx="10454335" cy="365760"/>
           </a:xfrm>
           <a:prstGeom prst="rect">
             <a:avLst/>
@@ -13883,7 +16156,7 @@
         <p:spPr>
           <a:xfrm>
             <a:off x="868680" y="2286000"/>
-            <a:ext cx="9144000" cy="365760"/>
+            <a:ext cx="10454335" cy="365760"/>
           </a:xfrm>
           <a:prstGeom prst="rect">
             <a:avLst/>
@@ -14412,7 +16685,7 @@
         <p:spPr>
           <a:xfrm>
             <a:off x="868680" y="2286000"/>
-            <a:ext cx="9144000" cy="365760"/>
+            <a:ext cx="10454335" cy="365760"/>
           </a:xfrm>
           <a:prstGeom prst="rect">
             <a:avLst/>
@@ -14771,7 +17044,7 @@
         <p:spPr>
           <a:xfrm>
             <a:off x="868680" y="2286000"/>
-            <a:ext cx="9144000" cy="365760"/>
+            <a:ext cx="10454335" cy="365760"/>
           </a:xfrm>
           <a:prstGeom prst="rect">
             <a:avLst/>
@@ -15130,7 +17403,7 @@
         <p:spPr>
           <a:xfrm>
             <a:off x="868680" y="2286000"/>
-            <a:ext cx="9144000" cy="365760"/>
+            <a:ext cx="10454335" cy="365760"/>
           </a:xfrm>
           <a:prstGeom prst="rect">
             <a:avLst/>
@@ -15489,7 +17762,7 @@
         <p:spPr>
           <a:xfrm>
             <a:off x="868680" y="2286000"/>
-            <a:ext cx="9144000" cy="365760"/>
+            <a:ext cx="10454335" cy="365760"/>
           </a:xfrm>
           <a:prstGeom prst="rect">
             <a:avLst/>
@@ -15848,7 +18121,7 @@
         <p:spPr>
           <a:xfrm>
             <a:off x="868680" y="2286000"/>
-            <a:ext cx="9144000" cy="365760"/>
+            <a:ext cx="10454335" cy="365760"/>
           </a:xfrm>
           <a:prstGeom prst="rect">
             <a:avLst/>
@@ -16498,7 +18771,7 @@
         <p:spPr>
           <a:xfrm>
             <a:off x="868680" y="2286000"/>
-            <a:ext cx="9144000" cy="365760"/>
+            <a:ext cx="10454335" cy="365760"/>
           </a:xfrm>
           <a:prstGeom prst="rect">
             <a:avLst/>
@@ -16857,7 +19130,7 @@
         <p:spPr>
           <a:xfrm>
             <a:off x="868680" y="2286000"/>
-            <a:ext cx="9144000" cy="365760"/>
+            <a:ext cx="10454335" cy="365760"/>
           </a:xfrm>
           <a:prstGeom prst="rect">
             <a:avLst/>
@@ -17216,7 +19489,7 @@
         <p:spPr>
           <a:xfrm>
             <a:off x="868680" y="2286000"/>
-            <a:ext cx="9144000" cy="365760"/>
+            <a:ext cx="10454335" cy="365760"/>
           </a:xfrm>
           <a:prstGeom prst="rect">
             <a:avLst/>
@@ -17575,7 +19848,7 @@
         <p:spPr>
           <a:xfrm>
             <a:off x="868680" y="2286000"/>
-            <a:ext cx="9144000" cy="365760"/>
+            <a:ext cx="10454335" cy="365760"/>
           </a:xfrm>
           <a:prstGeom prst="rect">
             <a:avLst/>
@@ -17907,6 +20180,384 @@
 </p:sld>
 </file>
 
+<file path=ppt/slides/slide58.xml><?xml version="1.0" encoding="utf-8"?>
+<p:sld xmlns:a="http://schemas.openxmlformats.org/drawingml/2006/main" xmlns:p="http://schemas.openxmlformats.org/presentationml/2006/main" xmlns:r="http://schemas.openxmlformats.org/officeDocument/2006/relationships">
+  <p:cSld>
+    <p:bg>
+      <p:bgPr>
+        <a:solidFill>
+          <a:srgbClr val="F6F4EE"/>
+        </a:solidFill>
+        <a:effectLst/>
+      </p:bgPr>
+    </p:bg>
+    <p:spTree>
+      <p:nvGrpSpPr>
+        <p:cNvPr id="1" name=""/>
+        <p:cNvGrpSpPr/>
+        <p:nvPr/>
+      </p:nvGrpSpPr>
+      <p:grpSpPr/>
+      <p:sp>
+        <p:nvSpPr>
+          <p:cNvPr id="2" name="Rounded Rectangle 1"/>
+          <p:cNvSpPr/>
+          <p:nvPr/>
+        </p:nvSpPr>
+        <p:spPr>
+          <a:xfrm>
+            <a:off x="868680" y="2377440"/>
+            <a:ext cx="82296" cy="2103120"/>
+          </a:xfrm>
+          <a:prstGeom prst="roundRect">
+            <a:avLst>
+              <a:gd name="adj" fmla="val 50000"/>
+            </a:avLst>
+          </a:prstGeom>
+          <a:gradFill>
+            <a:gsLst>
+              <a:gs pos="0">
+                <a:srgbClr val="E8C15F"/>
+              </a:gs>
+              <a:gs pos="100000">
+                <a:srgbClr val="7E6410"/>
+              </a:gs>
+            </a:gsLst>
+            <a:lin ang="5400000" scaled="1"/>
+          </a:gradFill>
+          <a:ln>
+            <a:noFill/>
+          </a:ln>
+          <a:effectLst/>
+        </p:spPr>
+        <p:style>
+          <a:lnRef idx="1">
+            <a:schemeClr val="accent1"/>
+          </a:lnRef>
+          <a:fillRef idx="3">
+            <a:schemeClr val="accent1"/>
+          </a:fillRef>
+          <a:effectRef idx="2">
+            <a:schemeClr val="accent1"/>
+          </a:effectRef>
+          <a:fontRef idx="minor">
+            <a:schemeClr val="lt1"/>
+          </a:fontRef>
+        </p:style>
+        <p:txBody>
+          <a:bodyPr rtlCol="0" anchor="ctr"/>
+          <a:lstStyle/>
+          <a:p>
+            <a:pPr algn="ctr"/>
+          </a:p>
+        </p:txBody>
+      </p:sp>
+      <p:sp>
+        <p:nvSpPr>
+          <p:cNvPr id="3" name="TextBox 2"/>
+          <p:cNvSpPr txBox="1"/>
+          <p:nvPr/>
+        </p:nvSpPr>
+        <p:spPr>
+          <a:xfrm>
+            <a:off x="1280160" y="2560320"/>
+            <a:ext cx="7315200" cy="365760"/>
+          </a:xfrm>
+          <a:prstGeom prst="rect">
+            <a:avLst/>
+          </a:prstGeom>
+          <a:noFill/>
+        </p:spPr>
+        <p:txBody>
+          <a:bodyPr wrap="square" anchor="t" lIns="0" rIns="0" tIns="0" bIns="0">
+            <a:noAutofit/>
+          </a:bodyPr>
+          <a:lstStyle/>
+          <a:p>
+            <a:pPr algn="l"/>
+            <a:r>
+              <a:rPr sz="1250" b="1" i="0" spc="260">
+                <a:solidFill>
+                  <a:srgbClr val="7E6410"/>
+                </a:solidFill>
+                <a:latin typeface="Inter"/>
+              </a:rPr>
+              <a:t>GEDANKENFREIHEIT</a:t>
+            </a:r>
+          </a:p>
+        </p:txBody>
+      </p:sp>
+      <p:sp>
+        <p:nvSpPr>
+          <p:cNvPr id="4" name="TextBox 3"/>
+          <p:cNvSpPr txBox="1"/>
+          <p:nvPr/>
+        </p:nvSpPr>
+        <p:spPr>
+          <a:xfrm>
+            <a:off x="1280160" y="2926080"/>
+            <a:ext cx="9494215" cy="1463040"/>
+          </a:xfrm>
+          <a:prstGeom prst="rect">
+            <a:avLst/>
+          </a:prstGeom>
+          <a:noFill/>
+        </p:spPr>
+        <p:txBody>
+          <a:bodyPr wrap="square" anchor="t" lIns="0" rIns="0" tIns="0" bIns="0">
+            <a:noAutofit/>
+          </a:bodyPr>
+          <a:lstStyle/>
+          <a:p>
+            <a:pPr>
+              <a:lnSpc>
+                <a:spcPct val="103000"/>
+              </a:lnSpc>
+            </a:pPr>
+            <a:r>
+              <a:rPr sz="4400" b="1" i="0">
+                <a:solidFill>
+                  <a:srgbClr val="16231F"/>
+                </a:solidFill>
+                <a:latin typeface="Fraunces"/>
+              </a:rPr>
+              <a:t>Mentale Selbstverteidigung</a:t>
+            </a:r>
+          </a:p>
+        </p:txBody>
+      </p:sp>
+      <p:sp>
+        <p:nvSpPr>
+          <p:cNvPr id="5" name="TextBox 4"/>
+          <p:cNvSpPr txBox="1"/>
+          <p:nvPr/>
+        </p:nvSpPr>
+        <p:spPr>
+          <a:xfrm>
+            <a:off x="0" y="6355080"/>
+            <a:ext cx="12191695" cy="274320"/>
+          </a:xfrm>
+          <a:prstGeom prst="rect">
+            <a:avLst/>
+          </a:prstGeom>
+          <a:noFill/>
+        </p:spPr>
+        <p:txBody>
+          <a:bodyPr wrap="square" anchor="ctr" lIns="0" rIns="0" tIns="0" bIns="0">
+            <a:noAutofit/>
+          </a:bodyPr>
+          <a:lstStyle/>
+          <a:p>
+            <a:pPr algn="ctr"/>
+            <a:r>
+              <a:rPr sz="800" b="0" i="0" spc="260">
+                <a:solidFill>
+                  <a:srgbClr val="626B67"/>
+                </a:solidFill>
+                <a:latin typeface="Fraunces"/>
+              </a:rPr>
+              <a:t>WERDE MEISTER DEINER GEDANKEN</a:t>
+            </a:r>
+          </a:p>
+        </p:txBody>
+      </p:sp>
+    </p:spTree>
+  </p:cSld>
+  <p:clrMapOvr>
+    <a:masterClrMapping/>
+  </p:clrMapOvr>
+</p:sld>
+</file>
+
+<file path=ppt/slides/slide59.xml><?xml version="1.0" encoding="utf-8"?>
+<p:sld xmlns:a="http://schemas.openxmlformats.org/drawingml/2006/main" xmlns:p="http://schemas.openxmlformats.org/presentationml/2006/main" xmlns:r="http://schemas.openxmlformats.org/officeDocument/2006/relationships">
+  <p:cSld>
+    <p:bg>
+      <p:bgPr>
+        <a:solidFill>
+          <a:srgbClr val="F6F4EE"/>
+        </a:solidFill>
+        <a:effectLst/>
+      </p:bgPr>
+    </p:bg>
+    <p:spTree>
+      <p:nvGrpSpPr>
+        <p:cNvPr id="1" name=""/>
+        <p:cNvGrpSpPr/>
+        <p:nvPr/>
+      </p:nvGrpSpPr>
+      <p:grpSpPr/>
+      <p:sp>
+        <p:nvSpPr>
+          <p:cNvPr id="2" name="TextBox 1"/>
+          <p:cNvSpPr txBox="1"/>
+          <p:nvPr/>
+        </p:nvSpPr>
+        <p:spPr>
+          <a:xfrm>
+            <a:off x="868680" y="2286000"/>
+            <a:ext cx="10454335" cy="365760"/>
+          </a:xfrm>
+          <a:prstGeom prst="rect">
+            <a:avLst/>
+          </a:prstGeom>
+          <a:noFill/>
+        </p:spPr>
+        <p:txBody>
+          <a:bodyPr wrap="square" anchor="t" lIns="0" rIns="0" tIns="0" bIns="0">
+            <a:noAutofit/>
+          </a:bodyPr>
+          <a:lstStyle/>
+          <a:p>
+            <a:pPr algn="l"/>
+            <a:r>
+              <a:rPr sz="1250" b="1" i="0" spc="260">
+                <a:solidFill>
+                  <a:srgbClr val="7E6410"/>
+                </a:solidFill>
+                <a:latin typeface="Inter"/>
+              </a:rPr>
+              <a:t>MENTALE SELBSTVERTEIDIGUNG · 01</a:t>
+            </a:r>
+          </a:p>
+        </p:txBody>
+      </p:sp>
+      <p:sp>
+        <p:nvSpPr>
+          <p:cNvPr id="3" name="TextBox 2"/>
+          <p:cNvSpPr txBox="1"/>
+          <p:nvPr/>
+        </p:nvSpPr>
+        <p:spPr>
+          <a:xfrm>
+            <a:off x="868680" y="2743200"/>
+            <a:ext cx="10454335" cy="1828800"/>
+          </a:xfrm>
+          <a:prstGeom prst="rect">
+            <a:avLst/>
+          </a:prstGeom>
+          <a:noFill/>
+        </p:spPr>
+        <p:txBody>
+          <a:bodyPr wrap="square" anchor="t" lIns="0" rIns="0" tIns="0" bIns="0">
+            <a:noAutofit/>
+          </a:bodyPr>
+          <a:lstStyle/>
+          <a:p>
+            <a:pPr>
+              <a:lnSpc>
+                <a:spcPct val="102000"/>
+              </a:lnSpc>
+            </a:pPr>
+            <a:r>
+              <a:rPr sz="4200" b="1" i="0">
+                <a:solidFill>
+                  <a:srgbClr val="16231F"/>
+                </a:solidFill>
+                <a:latin typeface="Fraunces"/>
+              </a:rPr>
+              <a:t>Propaganda &amp; Konditionierung</a:t>
+            </a:r>
+          </a:p>
+        </p:txBody>
+      </p:sp>
+      <p:sp>
+        <p:nvSpPr>
+          <p:cNvPr id="4" name="Rounded Rectangle 3"/>
+          <p:cNvSpPr/>
+          <p:nvPr/>
+        </p:nvSpPr>
+        <p:spPr>
+          <a:xfrm>
+            <a:off x="886968" y="4526280"/>
+            <a:ext cx="2377440" cy="54864"/>
+          </a:xfrm>
+          <a:prstGeom prst="roundRect">
+            <a:avLst>
+              <a:gd name="adj" fmla="val 50000"/>
+            </a:avLst>
+          </a:prstGeom>
+          <a:gradFill>
+            <a:gsLst>
+              <a:gs pos="0">
+                <a:srgbClr val="E8C15F"/>
+              </a:gs>
+              <a:gs pos="100000">
+                <a:srgbClr val="7E6410"/>
+              </a:gs>
+            </a:gsLst>
+            <a:lin ang="0" scaled="1"/>
+          </a:gradFill>
+          <a:ln>
+            <a:noFill/>
+          </a:ln>
+          <a:effectLst/>
+        </p:spPr>
+        <p:style>
+          <a:lnRef idx="1">
+            <a:schemeClr val="accent1"/>
+          </a:lnRef>
+          <a:fillRef idx="3">
+            <a:schemeClr val="accent1"/>
+          </a:fillRef>
+          <a:effectRef idx="2">
+            <a:schemeClr val="accent1"/>
+          </a:effectRef>
+          <a:fontRef idx="minor">
+            <a:schemeClr val="lt1"/>
+          </a:fontRef>
+        </p:style>
+        <p:txBody>
+          <a:bodyPr rtlCol="0" anchor="ctr"/>
+          <a:lstStyle/>
+          <a:p>
+            <a:pPr algn="ctr"/>
+          </a:p>
+        </p:txBody>
+      </p:sp>
+      <p:sp>
+        <p:nvSpPr>
+          <p:cNvPr id="5" name="TextBox 4"/>
+          <p:cNvSpPr txBox="1"/>
+          <p:nvPr/>
+        </p:nvSpPr>
+        <p:spPr>
+          <a:xfrm>
+            <a:off x="0" y="6355080"/>
+            <a:ext cx="12191695" cy="274320"/>
+          </a:xfrm>
+          <a:prstGeom prst="rect">
+            <a:avLst/>
+          </a:prstGeom>
+          <a:noFill/>
+        </p:spPr>
+        <p:txBody>
+          <a:bodyPr wrap="square" anchor="ctr" lIns="0" rIns="0" tIns="0" bIns="0">
+            <a:noAutofit/>
+          </a:bodyPr>
+          <a:lstStyle/>
+          <a:p>
+            <a:pPr algn="ctr"/>
+            <a:r>
+              <a:rPr sz="800" b="0" i="0" spc="260">
+                <a:solidFill>
+                  <a:srgbClr val="626B67"/>
+                </a:solidFill>
+                <a:latin typeface="Fraunces"/>
+              </a:rPr>
+              <a:t>WERDE MEISTER DEINER GEDANKEN</a:t>
+            </a:r>
+          </a:p>
+        </p:txBody>
+      </p:sp>
+    </p:spTree>
+  </p:cSld>
+  <p:clrMapOvr>
+    <a:masterClrMapping/>
+  </p:clrMapOvr>
+</p:sld>
+</file>
+
 <file path=ppt/slides/slide6.xml><?xml version="1.0" encoding="utf-8"?>
 <p:sld xmlns:a="http://schemas.openxmlformats.org/drawingml/2006/main" xmlns:p="http://schemas.openxmlformats.org/presentationml/2006/main" xmlns:r="http://schemas.openxmlformats.org/officeDocument/2006/relationships">
   <p:cSld>
@@ -18065,6 +20716,1801 @@
                 <a:latin typeface="Inter"/>
               </a:rPr>
               <a:t>STUFE 02 · ERWACHEN</a:t>
+            </a:r>
+          </a:p>
+        </p:txBody>
+      </p:sp>
+    </p:spTree>
+  </p:cSld>
+  <p:clrMapOvr>
+    <a:masterClrMapping/>
+  </p:clrMapOvr>
+</p:sld>
+</file>
+
+<file path=ppt/slides/slide60.xml><?xml version="1.0" encoding="utf-8"?>
+<p:sld xmlns:a="http://schemas.openxmlformats.org/drawingml/2006/main" xmlns:p="http://schemas.openxmlformats.org/presentationml/2006/main" xmlns:r="http://schemas.openxmlformats.org/officeDocument/2006/relationships">
+  <p:cSld>
+    <p:bg>
+      <p:bgPr>
+        <a:solidFill>
+          <a:srgbClr val="F6F4EE"/>
+        </a:solidFill>
+        <a:effectLst/>
+      </p:bgPr>
+    </p:bg>
+    <p:spTree>
+      <p:nvGrpSpPr>
+        <p:cNvPr id="1" name=""/>
+        <p:cNvGrpSpPr/>
+        <p:nvPr/>
+      </p:nvGrpSpPr>
+      <p:grpSpPr/>
+      <p:sp>
+        <p:nvSpPr>
+          <p:cNvPr id="2" name="TextBox 1"/>
+          <p:cNvSpPr txBox="1"/>
+          <p:nvPr/>
+        </p:nvSpPr>
+        <p:spPr>
+          <a:xfrm>
+            <a:off x="0" y="1234440"/>
+            <a:ext cx="12191695" cy="365760"/>
+          </a:xfrm>
+          <a:prstGeom prst="rect">
+            <a:avLst/>
+          </a:prstGeom>
+          <a:noFill/>
+        </p:spPr>
+        <p:txBody>
+          <a:bodyPr wrap="square" anchor="t" lIns="0" rIns="0" tIns="0" bIns="0">
+            <a:noAutofit/>
+          </a:bodyPr>
+          <a:lstStyle/>
+          <a:p>
+            <a:pPr algn="ctr"/>
+            <a:r>
+              <a:rPr sz="1250" b="1" i="0" spc="260">
+                <a:solidFill>
+                  <a:srgbClr val="7E6410"/>
+                </a:solidFill>
+                <a:latin typeface="Inter"/>
+              </a:rPr>
+              <a:t>MERKSATZ · THEMA 01</a:t>
+            </a:r>
+          </a:p>
+        </p:txBody>
+      </p:sp>
+      <p:sp>
+        <p:nvSpPr>
+          <p:cNvPr id="3" name="TextBox 2"/>
+          <p:cNvSpPr txBox="1"/>
+          <p:nvPr/>
+        </p:nvSpPr>
+        <p:spPr>
+          <a:xfrm>
+            <a:off x="0" y="1508760"/>
+            <a:ext cx="12191695" cy="914400"/>
+          </a:xfrm>
+          <a:prstGeom prst="rect">
+            <a:avLst/>
+          </a:prstGeom>
+          <a:noFill/>
+        </p:spPr>
+        <p:txBody>
+          <a:bodyPr wrap="square" anchor="t" lIns="0" rIns="0" tIns="0" bIns="0">
+            <a:noAutofit/>
+          </a:bodyPr>
+          <a:lstStyle/>
+          <a:p>
+            <a:pPr algn="ctr"/>
+            <a:r>
+              <a:rPr sz="7000" b="1" i="0">
+                <a:solidFill>
+                  <a:srgbClr val="D9A93A"/>
+                </a:solidFill>
+                <a:latin typeface="Fraunces"/>
+              </a:rPr>
+              <a:t>“</a:t>
+            </a:r>
+          </a:p>
+        </p:txBody>
+      </p:sp>
+      <p:sp>
+        <p:nvSpPr>
+          <p:cNvPr id="4" name="TextBox 3"/>
+          <p:cNvSpPr txBox="1"/>
+          <p:nvPr/>
+        </p:nvSpPr>
+        <p:spPr>
+          <a:xfrm>
+            <a:off x="1463040" y="2514600"/>
+            <a:ext cx="9265615" cy="2743200"/>
+          </a:xfrm>
+          <a:prstGeom prst="rect">
+            <a:avLst/>
+          </a:prstGeom>
+          <a:noFill/>
+        </p:spPr>
+        <p:txBody>
+          <a:bodyPr wrap="square" anchor="ctr" lIns="0" rIns="0" tIns="0" bIns="0">
+            <a:noAutofit/>
+          </a:bodyPr>
+          <a:lstStyle/>
+          <a:p>
+            <a:pPr algn="ctr">
+              <a:lnSpc>
+                <a:spcPct val="116000"/>
+              </a:lnSpc>
+            </a:pPr>
+            <a:r>
+              <a:rPr sz="3300" b="0" i="0">
+                <a:solidFill>
+                  <a:srgbClr val="16231F"/>
+                </a:solidFill>
+                <a:latin typeface="Fraunces"/>
+              </a:rPr>
+              <a:t>Der Schutz ist eine einzige Frage: Woher habe ich das eigentlich – geprüft, oder nur oft gehört? Beeinflussung wirkt über Wiederholung, Emotion und Vereinfachung – nicht über Beweise. Wer das bemerkt, gewinnt Abstand.</a:t>
+            </a:r>
+          </a:p>
+        </p:txBody>
+      </p:sp>
+      <p:sp>
+        <p:nvSpPr>
+          <p:cNvPr id="5" name="TextBox 4"/>
+          <p:cNvSpPr txBox="1"/>
+          <p:nvPr/>
+        </p:nvSpPr>
+        <p:spPr>
+          <a:xfrm>
+            <a:off x="0" y="5806440"/>
+            <a:ext cx="12191695" cy="365760"/>
+          </a:xfrm>
+          <a:prstGeom prst="rect">
+            <a:avLst/>
+          </a:prstGeom>
+          <a:noFill/>
+        </p:spPr>
+        <p:txBody>
+          <a:bodyPr wrap="square" anchor="ctr" lIns="0" rIns="0" tIns="0" bIns="0">
+            <a:noAutofit/>
+          </a:bodyPr>
+          <a:lstStyle/>
+          <a:p>
+            <a:pPr algn="ctr"/>
+            <a:r>
+              <a:rPr sz="1100" b="1" i="0" spc="240">
+                <a:solidFill>
+                  <a:srgbClr val="7E6410"/>
+                </a:solidFill>
+                <a:latin typeface="Inter"/>
+              </a:rPr>
+              <a:t>PROPAGANDA &amp; KONDITIONIERUNG</a:t>
+            </a:r>
+          </a:p>
+        </p:txBody>
+      </p:sp>
+    </p:spTree>
+  </p:cSld>
+  <p:clrMapOvr>
+    <a:masterClrMapping/>
+  </p:clrMapOvr>
+</p:sld>
+</file>
+
+<file path=ppt/slides/slide61.xml><?xml version="1.0" encoding="utf-8"?>
+<p:sld xmlns:a="http://schemas.openxmlformats.org/drawingml/2006/main" xmlns:p="http://schemas.openxmlformats.org/presentationml/2006/main" xmlns:r="http://schemas.openxmlformats.org/officeDocument/2006/relationships">
+  <p:cSld>
+    <p:bg>
+      <p:bgPr>
+        <a:solidFill>
+          <a:srgbClr val="F6F4EE"/>
+        </a:solidFill>
+        <a:effectLst/>
+      </p:bgPr>
+    </p:bg>
+    <p:spTree>
+      <p:nvGrpSpPr>
+        <p:cNvPr id="1" name=""/>
+        <p:cNvGrpSpPr/>
+        <p:nvPr/>
+      </p:nvGrpSpPr>
+      <p:grpSpPr/>
+      <p:sp>
+        <p:nvSpPr>
+          <p:cNvPr id="2" name="TextBox 1"/>
+          <p:cNvSpPr txBox="1"/>
+          <p:nvPr/>
+        </p:nvSpPr>
+        <p:spPr>
+          <a:xfrm>
+            <a:off x="868680" y="2286000"/>
+            <a:ext cx="10454335" cy="365760"/>
+          </a:xfrm>
+          <a:prstGeom prst="rect">
+            <a:avLst/>
+          </a:prstGeom>
+          <a:noFill/>
+        </p:spPr>
+        <p:txBody>
+          <a:bodyPr wrap="square" anchor="t" lIns="0" rIns="0" tIns="0" bIns="0">
+            <a:noAutofit/>
+          </a:bodyPr>
+          <a:lstStyle/>
+          <a:p>
+            <a:pPr algn="l"/>
+            <a:r>
+              <a:rPr sz="1250" b="1" i="0" spc="260">
+                <a:solidFill>
+                  <a:srgbClr val="7E6410"/>
+                </a:solidFill>
+                <a:latin typeface="Inter"/>
+              </a:rPr>
+              <a:t>MENTALE SELBSTVERTEIDIGUNG · 02</a:t>
+            </a:r>
+          </a:p>
+        </p:txBody>
+      </p:sp>
+      <p:sp>
+        <p:nvSpPr>
+          <p:cNvPr id="3" name="TextBox 2"/>
+          <p:cNvSpPr txBox="1"/>
+          <p:nvPr/>
+        </p:nvSpPr>
+        <p:spPr>
+          <a:xfrm>
+            <a:off x="868680" y="2743200"/>
+            <a:ext cx="10454335" cy="1828800"/>
+          </a:xfrm>
+          <a:prstGeom prst="rect">
+            <a:avLst/>
+          </a:prstGeom>
+          <a:noFill/>
+        </p:spPr>
+        <p:txBody>
+          <a:bodyPr wrap="square" anchor="t" lIns="0" rIns="0" tIns="0" bIns="0">
+            <a:noAutofit/>
+          </a:bodyPr>
+          <a:lstStyle/>
+          <a:p>
+            <a:pPr>
+              <a:lnSpc>
+                <a:spcPct val="102000"/>
+              </a:lnSpc>
+            </a:pPr>
+            <a:r>
+              <a:rPr sz="4200" b="1" i="0">
+                <a:solidFill>
+                  <a:srgbClr val="16231F"/>
+                </a:solidFill>
+                <a:latin typeface="Fraunces"/>
+              </a:rPr>
+              <a:t>Framing</a:t>
+            </a:r>
+          </a:p>
+        </p:txBody>
+      </p:sp>
+      <p:sp>
+        <p:nvSpPr>
+          <p:cNvPr id="4" name="Rounded Rectangle 3"/>
+          <p:cNvSpPr/>
+          <p:nvPr/>
+        </p:nvSpPr>
+        <p:spPr>
+          <a:xfrm>
+            <a:off x="886968" y="4526280"/>
+            <a:ext cx="2377440" cy="54864"/>
+          </a:xfrm>
+          <a:prstGeom prst="roundRect">
+            <a:avLst>
+              <a:gd name="adj" fmla="val 50000"/>
+            </a:avLst>
+          </a:prstGeom>
+          <a:gradFill>
+            <a:gsLst>
+              <a:gs pos="0">
+                <a:srgbClr val="E8C15F"/>
+              </a:gs>
+              <a:gs pos="100000">
+                <a:srgbClr val="7E6410"/>
+              </a:gs>
+            </a:gsLst>
+            <a:lin ang="0" scaled="1"/>
+          </a:gradFill>
+          <a:ln>
+            <a:noFill/>
+          </a:ln>
+          <a:effectLst/>
+        </p:spPr>
+        <p:style>
+          <a:lnRef idx="1">
+            <a:schemeClr val="accent1"/>
+          </a:lnRef>
+          <a:fillRef idx="3">
+            <a:schemeClr val="accent1"/>
+          </a:fillRef>
+          <a:effectRef idx="2">
+            <a:schemeClr val="accent1"/>
+          </a:effectRef>
+          <a:fontRef idx="minor">
+            <a:schemeClr val="lt1"/>
+          </a:fontRef>
+        </p:style>
+        <p:txBody>
+          <a:bodyPr rtlCol="0" anchor="ctr"/>
+          <a:lstStyle/>
+          <a:p>
+            <a:pPr algn="ctr"/>
+          </a:p>
+        </p:txBody>
+      </p:sp>
+      <p:sp>
+        <p:nvSpPr>
+          <p:cNvPr id="5" name="TextBox 4"/>
+          <p:cNvSpPr txBox="1"/>
+          <p:nvPr/>
+        </p:nvSpPr>
+        <p:spPr>
+          <a:xfrm>
+            <a:off x="0" y="6355080"/>
+            <a:ext cx="12191695" cy="274320"/>
+          </a:xfrm>
+          <a:prstGeom prst="rect">
+            <a:avLst/>
+          </a:prstGeom>
+          <a:noFill/>
+        </p:spPr>
+        <p:txBody>
+          <a:bodyPr wrap="square" anchor="ctr" lIns="0" rIns="0" tIns="0" bIns="0">
+            <a:noAutofit/>
+          </a:bodyPr>
+          <a:lstStyle/>
+          <a:p>
+            <a:pPr algn="ctr"/>
+            <a:r>
+              <a:rPr sz="800" b="0" i="0" spc="260">
+                <a:solidFill>
+                  <a:srgbClr val="626B67"/>
+                </a:solidFill>
+                <a:latin typeface="Fraunces"/>
+              </a:rPr>
+              <a:t>WERDE MEISTER DEINER GEDANKEN</a:t>
+            </a:r>
+          </a:p>
+        </p:txBody>
+      </p:sp>
+    </p:spTree>
+  </p:cSld>
+  <p:clrMapOvr>
+    <a:masterClrMapping/>
+  </p:clrMapOvr>
+</p:sld>
+</file>
+
+<file path=ppt/slides/slide62.xml><?xml version="1.0" encoding="utf-8"?>
+<p:sld xmlns:a="http://schemas.openxmlformats.org/drawingml/2006/main" xmlns:p="http://schemas.openxmlformats.org/presentationml/2006/main" xmlns:r="http://schemas.openxmlformats.org/officeDocument/2006/relationships">
+  <p:cSld>
+    <p:bg>
+      <p:bgPr>
+        <a:solidFill>
+          <a:srgbClr val="F6F4EE"/>
+        </a:solidFill>
+        <a:effectLst/>
+      </p:bgPr>
+    </p:bg>
+    <p:spTree>
+      <p:nvGrpSpPr>
+        <p:cNvPr id="1" name=""/>
+        <p:cNvGrpSpPr/>
+        <p:nvPr/>
+      </p:nvGrpSpPr>
+      <p:grpSpPr/>
+      <p:sp>
+        <p:nvSpPr>
+          <p:cNvPr id="2" name="TextBox 1"/>
+          <p:cNvSpPr txBox="1"/>
+          <p:nvPr/>
+        </p:nvSpPr>
+        <p:spPr>
+          <a:xfrm>
+            <a:off x="0" y="1234440"/>
+            <a:ext cx="12191695" cy="365760"/>
+          </a:xfrm>
+          <a:prstGeom prst="rect">
+            <a:avLst/>
+          </a:prstGeom>
+          <a:noFill/>
+        </p:spPr>
+        <p:txBody>
+          <a:bodyPr wrap="square" anchor="t" lIns="0" rIns="0" tIns="0" bIns="0">
+            <a:noAutofit/>
+          </a:bodyPr>
+          <a:lstStyle/>
+          <a:p>
+            <a:pPr algn="ctr"/>
+            <a:r>
+              <a:rPr sz="1250" b="1" i="0" spc="260">
+                <a:solidFill>
+                  <a:srgbClr val="7E6410"/>
+                </a:solidFill>
+                <a:latin typeface="Inter"/>
+              </a:rPr>
+              <a:t>MERKSATZ · THEMA 02</a:t>
+            </a:r>
+          </a:p>
+        </p:txBody>
+      </p:sp>
+      <p:sp>
+        <p:nvSpPr>
+          <p:cNvPr id="3" name="TextBox 2"/>
+          <p:cNvSpPr txBox="1"/>
+          <p:nvPr/>
+        </p:nvSpPr>
+        <p:spPr>
+          <a:xfrm>
+            <a:off x="0" y="1508760"/>
+            <a:ext cx="12191695" cy="914400"/>
+          </a:xfrm>
+          <a:prstGeom prst="rect">
+            <a:avLst/>
+          </a:prstGeom>
+          <a:noFill/>
+        </p:spPr>
+        <p:txBody>
+          <a:bodyPr wrap="square" anchor="t" lIns="0" rIns="0" tIns="0" bIns="0">
+            <a:noAutofit/>
+          </a:bodyPr>
+          <a:lstStyle/>
+          <a:p>
+            <a:pPr algn="ctr"/>
+            <a:r>
+              <a:rPr sz="7000" b="1" i="0">
+                <a:solidFill>
+                  <a:srgbClr val="D9A93A"/>
+                </a:solidFill>
+                <a:latin typeface="Fraunces"/>
+              </a:rPr>
+              <a:t>“</a:t>
+            </a:r>
+          </a:p>
+        </p:txBody>
+      </p:sp>
+      <p:sp>
+        <p:nvSpPr>
+          <p:cNvPr id="4" name="TextBox 3"/>
+          <p:cNvSpPr txBox="1"/>
+          <p:nvPr/>
+        </p:nvSpPr>
+        <p:spPr>
+          <a:xfrm>
+            <a:off x="1463040" y="2514600"/>
+            <a:ext cx="9265615" cy="2743200"/>
+          </a:xfrm>
+          <a:prstGeom prst="rect">
+            <a:avLst/>
+          </a:prstGeom>
+          <a:noFill/>
+        </p:spPr>
+        <p:txBody>
+          <a:bodyPr wrap="square" anchor="ctr" lIns="0" rIns="0" tIns="0" bIns="0">
+            <a:noAutofit/>
+          </a:bodyPr>
+          <a:lstStyle/>
+          <a:p>
+            <a:pPr algn="ctr">
+              <a:lnSpc>
+                <a:spcPct val="116000"/>
+              </a:lnSpc>
+            </a:pPr>
+            <a:r>
+              <a:rPr sz="3300" b="0" i="0">
+                <a:solidFill>
+                  <a:srgbClr val="16231F"/>
+                </a:solidFill>
+                <a:latin typeface="Fraunces"/>
+              </a:rPr>
+              <a:t>Framing heißt nicht, dass alles gelogen ist. Jede Kommunikation braucht einen Rahmen. Problematisch wird es, wo ein Rahmen als einzige Wahrheit auftritt und jede andere Sicht abwertet. Gedankenfreiheit beginnt damit, den Rahmen zu erkennen, bevor du die Bewertung darin übernimmst.</a:t>
+            </a:r>
+          </a:p>
+        </p:txBody>
+      </p:sp>
+      <p:sp>
+        <p:nvSpPr>
+          <p:cNvPr id="5" name="TextBox 4"/>
+          <p:cNvSpPr txBox="1"/>
+          <p:nvPr/>
+        </p:nvSpPr>
+        <p:spPr>
+          <a:xfrm>
+            <a:off x="0" y="5806440"/>
+            <a:ext cx="12191695" cy="365760"/>
+          </a:xfrm>
+          <a:prstGeom prst="rect">
+            <a:avLst/>
+          </a:prstGeom>
+          <a:noFill/>
+        </p:spPr>
+        <p:txBody>
+          <a:bodyPr wrap="square" anchor="ctr" lIns="0" rIns="0" tIns="0" bIns="0">
+            <a:noAutofit/>
+          </a:bodyPr>
+          <a:lstStyle/>
+          <a:p>
+            <a:pPr algn="ctr"/>
+            <a:r>
+              <a:rPr sz="1100" b="1" i="0" spc="240">
+                <a:solidFill>
+                  <a:srgbClr val="7E6410"/>
+                </a:solidFill>
+                <a:latin typeface="Inter"/>
+              </a:rPr>
+              <a:t>FRAMING</a:t>
+            </a:r>
+          </a:p>
+        </p:txBody>
+      </p:sp>
+    </p:spTree>
+  </p:cSld>
+  <p:clrMapOvr>
+    <a:masterClrMapping/>
+  </p:clrMapOvr>
+</p:sld>
+</file>
+
+<file path=ppt/slides/slide63.xml><?xml version="1.0" encoding="utf-8"?>
+<p:sld xmlns:a="http://schemas.openxmlformats.org/drawingml/2006/main" xmlns:p="http://schemas.openxmlformats.org/presentationml/2006/main" xmlns:r="http://schemas.openxmlformats.org/officeDocument/2006/relationships">
+  <p:cSld>
+    <p:bg>
+      <p:bgPr>
+        <a:solidFill>
+          <a:srgbClr val="F6F4EE"/>
+        </a:solidFill>
+        <a:effectLst/>
+      </p:bgPr>
+    </p:bg>
+    <p:spTree>
+      <p:nvGrpSpPr>
+        <p:cNvPr id="1" name=""/>
+        <p:cNvGrpSpPr/>
+        <p:nvPr/>
+      </p:nvGrpSpPr>
+      <p:grpSpPr/>
+      <p:sp>
+        <p:nvSpPr>
+          <p:cNvPr id="2" name="TextBox 1"/>
+          <p:cNvSpPr txBox="1"/>
+          <p:nvPr/>
+        </p:nvSpPr>
+        <p:spPr>
+          <a:xfrm>
+            <a:off x="868680" y="2286000"/>
+            <a:ext cx="10454335" cy="365760"/>
+          </a:xfrm>
+          <a:prstGeom prst="rect">
+            <a:avLst/>
+          </a:prstGeom>
+          <a:noFill/>
+        </p:spPr>
+        <p:txBody>
+          <a:bodyPr wrap="square" anchor="t" lIns="0" rIns="0" tIns="0" bIns="0">
+            <a:noAutofit/>
+          </a:bodyPr>
+          <a:lstStyle/>
+          <a:p>
+            <a:pPr algn="l"/>
+            <a:r>
+              <a:rPr sz="1250" b="1" i="0" spc="260">
+                <a:solidFill>
+                  <a:srgbClr val="7E6410"/>
+                </a:solidFill>
+                <a:latin typeface="Inter"/>
+              </a:rPr>
+              <a:t>MENTALE SELBSTVERTEIDIGUNG · 03</a:t>
+            </a:r>
+          </a:p>
+        </p:txBody>
+      </p:sp>
+      <p:sp>
+        <p:nvSpPr>
+          <p:cNvPr id="3" name="TextBox 2"/>
+          <p:cNvSpPr txBox="1"/>
+          <p:nvPr/>
+        </p:nvSpPr>
+        <p:spPr>
+          <a:xfrm>
+            <a:off x="868680" y="2743200"/>
+            <a:ext cx="10454335" cy="1828800"/>
+          </a:xfrm>
+          <a:prstGeom prst="rect">
+            <a:avLst/>
+          </a:prstGeom>
+          <a:noFill/>
+        </p:spPr>
+        <p:txBody>
+          <a:bodyPr wrap="square" anchor="t" lIns="0" rIns="0" tIns="0" bIns="0">
+            <a:noAutofit/>
+          </a:bodyPr>
+          <a:lstStyle/>
+          <a:p>
+            <a:pPr>
+              <a:lnSpc>
+                <a:spcPct val="102000"/>
+              </a:lnSpc>
+            </a:pPr>
+            <a:r>
+              <a:rPr sz="4200" b="1" i="0">
+                <a:solidFill>
+                  <a:srgbClr val="16231F"/>
+                </a:solidFill>
+                <a:latin typeface="Fraunces"/>
+              </a:rPr>
+              <a:t>Sprache &amp; Etiketten</a:t>
+            </a:r>
+          </a:p>
+        </p:txBody>
+      </p:sp>
+      <p:sp>
+        <p:nvSpPr>
+          <p:cNvPr id="4" name="Rounded Rectangle 3"/>
+          <p:cNvSpPr/>
+          <p:nvPr/>
+        </p:nvSpPr>
+        <p:spPr>
+          <a:xfrm>
+            <a:off x="886968" y="4526280"/>
+            <a:ext cx="2377440" cy="54864"/>
+          </a:xfrm>
+          <a:prstGeom prst="roundRect">
+            <a:avLst>
+              <a:gd name="adj" fmla="val 50000"/>
+            </a:avLst>
+          </a:prstGeom>
+          <a:gradFill>
+            <a:gsLst>
+              <a:gs pos="0">
+                <a:srgbClr val="E8C15F"/>
+              </a:gs>
+              <a:gs pos="100000">
+                <a:srgbClr val="7E6410"/>
+              </a:gs>
+            </a:gsLst>
+            <a:lin ang="0" scaled="1"/>
+          </a:gradFill>
+          <a:ln>
+            <a:noFill/>
+          </a:ln>
+          <a:effectLst/>
+        </p:spPr>
+        <p:style>
+          <a:lnRef idx="1">
+            <a:schemeClr val="accent1"/>
+          </a:lnRef>
+          <a:fillRef idx="3">
+            <a:schemeClr val="accent1"/>
+          </a:fillRef>
+          <a:effectRef idx="2">
+            <a:schemeClr val="accent1"/>
+          </a:effectRef>
+          <a:fontRef idx="minor">
+            <a:schemeClr val="lt1"/>
+          </a:fontRef>
+        </p:style>
+        <p:txBody>
+          <a:bodyPr rtlCol="0" anchor="ctr"/>
+          <a:lstStyle/>
+          <a:p>
+            <a:pPr algn="ctr"/>
+          </a:p>
+        </p:txBody>
+      </p:sp>
+      <p:sp>
+        <p:nvSpPr>
+          <p:cNvPr id="5" name="TextBox 4"/>
+          <p:cNvSpPr txBox="1"/>
+          <p:nvPr/>
+        </p:nvSpPr>
+        <p:spPr>
+          <a:xfrm>
+            <a:off x="0" y="6355080"/>
+            <a:ext cx="12191695" cy="274320"/>
+          </a:xfrm>
+          <a:prstGeom prst="rect">
+            <a:avLst/>
+          </a:prstGeom>
+          <a:noFill/>
+        </p:spPr>
+        <p:txBody>
+          <a:bodyPr wrap="square" anchor="ctr" lIns="0" rIns="0" tIns="0" bIns="0">
+            <a:noAutofit/>
+          </a:bodyPr>
+          <a:lstStyle/>
+          <a:p>
+            <a:pPr algn="ctr"/>
+            <a:r>
+              <a:rPr sz="800" b="0" i="0" spc="260">
+                <a:solidFill>
+                  <a:srgbClr val="626B67"/>
+                </a:solidFill>
+                <a:latin typeface="Fraunces"/>
+              </a:rPr>
+              <a:t>WERDE MEISTER DEINER GEDANKEN</a:t>
+            </a:r>
+          </a:p>
+        </p:txBody>
+      </p:sp>
+    </p:spTree>
+  </p:cSld>
+  <p:clrMapOvr>
+    <a:masterClrMapping/>
+  </p:clrMapOvr>
+</p:sld>
+</file>
+
+<file path=ppt/slides/slide64.xml><?xml version="1.0" encoding="utf-8"?>
+<p:sld xmlns:a="http://schemas.openxmlformats.org/drawingml/2006/main" xmlns:p="http://schemas.openxmlformats.org/presentationml/2006/main" xmlns:r="http://schemas.openxmlformats.org/officeDocument/2006/relationships">
+  <p:cSld>
+    <p:bg>
+      <p:bgPr>
+        <a:solidFill>
+          <a:srgbClr val="F6F4EE"/>
+        </a:solidFill>
+        <a:effectLst/>
+      </p:bgPr>
+    </p:bg>
+    <p:spTree>
+      <p:nvGrpSpPr>
+        <p:cNvPr id="1" name=""/>
+        <p:cNvGrpSpPr/>
+        <p:nvPr/>
+      </p:nvGrpSpPr>
+      <p:grpSpPr/>
+      <p:sp>
+        <p:nvSpPr>
+          <p:cNvPr id="2" name="TextBox 1"/>
+          <p:cNvSpPr txBox="1"/>
+          <p:nvPr/>
+        </p:nvSpPr>
+        <p:spPr>
+          <a:xfrm>
+            <a:off x="0" y="1234440"/>
+            <a:ext cx="12191695" cy="365760"/>
+          </a:xfrm>
+          <a:prstGeom prst="rect">
+            <a:avLst/>
+          </a:prstGeom>
+          <a:noFill/>
+        </p:spPr>
+        <p:txBody>
+          <a:bodyPr wrap="square" anchor="t" lIns="0" rIns="0" tIns="0" bIns="0">
+            <a:noAutofit/>
+          </a:bodyPr>
+          <a:lstStyle/>
+          <a:p>
+            <a:pPr algn="ctr"/>
+            <a:r>
+              <a:rPr sz="1250" b="1" i="0" spc="260">
+                <a:solidFill>
+                  <a:srgbClr val="7E6410"/>
+                </a:solidFill>
+                <a:latin typeface="Inter"/>
+              </a:rPr>
+              <a:t>MERKSATZ · THEMA 03</a:t>
+            </a:r>
+          </a:p>
+        </p:txBody>
+      </p:sp>
+      <p:sp>
+        <p:nvSpPr>
+          <p:cNvPr id="3" name="TextBox 2"/>
+          <p:cNvSpPr txBox="1"/>
+          <p:nvPr/>
+        </p:nvSpPr>
+        <p:spPr>
+          <a:xfrm>
+            <a:off x="0" y="1508760"/>
+            <a:ext cx="12191695" cy="914400"/>
+          </a:xfrm>
+          <a:prstGeom prst="rect">
+            <a:avLst/>
+          </a:prstGeom>
+          <a:noFill/>
+        </p:spPr>
+        <p:txBody>
+          <a:bodyPr wrap="square" anchor="t" lIns="0" rIns="0" tIns="0" bIns="0">
+            <a:noAutofit/>
+          </a:bodyPr>
+          <a:lstStyle/>
+          <a:p>
+            <a:pPr algn="ctr"/>
+            <a:r>
+              <a:rPr sz="7000" b="1" i="0">
+                <a:solidFill>
+                  <a:srgbClr val="D9A93A"/>
+                </a:solidFill>
+                <a:latin typeface="Fraunces"/>
+              </a:rPr>
+              <a:t>“</a:t>
+            </a:r>
+          </a:p>
+        </p:txBody>
+      </p:sp>
+      <p:sp>
+        <p:nvSpPr>
+          <p:cNvPr id="4" name="TextBox 3"/>
+          <p:cNvSpPr txBox="1"/>
+          <p:nvPr/>
+        </p:nvSpPr>
+        <p:spPr>
+          <a:xfrm>
+            <a:off x="1463040" y="2514600"/>
+            <a:ext cx="9265615" cy="2743200"/>
+          </a:xfrm>
+          <a:prstGeom prst="rect">
+            <a:avLst/>
+          </a:prstGeom>
+          <a:noFill/>
+        </p:spPr>
+        <p:txBody>
+          <a:bodyPr wrap="square" anchor="ctr" lIns="0" rIns="0" tIns="0" bIns="0">
+            <a:noAutofit/>
+          </a:bodyPr>
+          <a:lstStyle/>
+          <a:p>
+            <a:pPr algn="ctr">
+              <a:lnSpc>
+                <a:spcPct val="116000"/>
+              </a:lnSpc>
+            </a:pPr>
+            <a:r>
+              <a:rPr sz="3300" b="0" i="0">
+                <a:solidFill>
+                  <a:srgbClr val="16231F"/>
+                </a:solidFill>
+                <a:latin typeface="Fraunces"/>
+              </a:rPr>
+              <a:t>Das Gegenmittel: Zieh das Etikett ab. Beschreib nur die Handlung und schau, ob die Aussage dann noch überzeugt. Ein Etikett ist eine Bewertung ohne Begründung.</a:t>
+            </a:r>
+          </a:p>
+        </p:txBody>
+      </p:sp>
+      <p:sp>
+        <p:nvSpPr>
+          <p:cNvPr id="5" name="TextBox 4"/>
+          <p:cNvSpPr txBox="1"/>
+          <p:nvPr/>
+        </p:nvSpPr>
+        <p:spPr>
+          <a:xfrm>
+            <a:off x="0" y="5806440"/>
+            <a:ext cx="12191695" cy="365760"/>
+          </a:xfrm>
+          <a:prstGeom prst="rect">
+            <a:avLst/>
+          </a:prstGeom>
+          <a:noFill/>
+        </p:spPr>
+        <p:txBody>
+          <a:bodyPr wrap="square" anchor="ctr" lIns="0" rIns="0" tIns="0" bIns="0">
+            <a:noAutofit/>
+          </a:bodyPr>
+          <a:lstStyle/>
+          <a:p>
+            <a:pPr algn="ctr"/>
+            <a:r>
+              <a:rPr sz="1100" b="1" i="0" spc="240">
+                <a:solidFill>
+                  <a:srgbClr val="7E6410"/>
+                </a:solidFill>
+                <a:latin typeface="Inter"/>
+              </a:rPr>
+              <a:t>SPRACHE &amp; ETIKETTEN</a:t>
+            </a:r>
+          </a:p>
+        </p:txBody>
+      </p:sp>
+    </p:spTree>
+  </p:cSld>
+  <p:clrMapOvr>
+    <a:masterClrMapping/>
+  </p:clrMapOvr>
+</p:sld>
+</file>
+
+<file path=ppt/slides/slide65.xml><?xml version="1.0" encoding="utf-8"?>
+<p:sld xmlns:a="http://schemas.openxmlformats.org/drawingml/2006/main" xmlns:p="http://schemas.openxmlformats.org/presentationml/2006/main" xmlns:r="http://schemas.openxmlformats.org/officeDocument/2006/relationships">
+  <p:cSld>
+    <p:bg>
+      <p:bgPr>
+        <a:solidFill>
+          <a:srgbClr val="F6F4EE"/>
+        </a:solidFill>
+        <a:effectLst/>
+      </p:bgPr>
+    </p:bg>
+    <p:spTree>
+      <p:nvGrpSpPr>
+        <p:cNvPr id="1" name=""/>
+        <p:cNvGrpSpPr/>
+        <p:nvPr/>
+      </p:nvGrpSpPr>
+      <p:grpSpPr/>
+      <p:sp>
+        <p:nvSpPr>
+          <p:cNvPr id="2" name="TextBox 1"/>
+          <p:cNvSpPr txBox="1"/>
+          <p:nvPr/>
+        </p:nvSpPr>
+        <p:spPr>
+          <a:xfrm>
+            <a:off x="868680" y="2286000"/>
+            <a:ext cx="10454335" cy="365760"/>
+          </a:xfrm>
+          <a:prstGeom prst="rect">
+            <a:avLst/>
+          </a:prstGeom>
+          <a:noFill/>
+        </p:spPr>
+        <p:txBody>
+          <a:bodyPr wrap="square" anchor="t" lIns="0" rIns="0" tIns="0" bIns="0">
+            <a:noAutofit/>
+          </a:bodyPr>
+          <a:lstStyle/>
+          <a:p>
+            <a:pPr algn="l"/>
+            <a:r>
+              <a:rPr sz="1250" b="1" i="0" spc="260">
+                <a:solidFill>
+                  <a:srgbClr val="7E6410"/>
+                </a:solidFill>
+                <a:latin typeface="Inter"/>
+              </a:rPr>
+              <a:t>MENTALE SELBSTVERTEIDIGUNG · 04</a:t>
+            </a:r>
+          </a:p>
+        </p:txBody>
+      </p:sp>
+      <p:sp>
+        <p:nvSpPr>
+          <p:cNvPr id="3" name="TextBox 2"/>
+          <p:cNvSpPr txBox="1"/>
+          <p:nvPr/>
+        </p:nvSpPr>
+        <p:spPr>
+          <a:xfrm>
+            <a:off x="868680" y="2743200"/>
+            <a:ext cx="10454335" cy="1828800"/>
+          </a:xfrm>
+          <a:prstGeom prst="rect">
+            <a:avLst/>
+          </a:prstGeom>
+          <a:noFill/>
+        </p:spPr>
+        <p:txBody>
+          <a:bodyPr wrap="square" anchor="t" lIns="0" rIns="0" tIns="0" bIns="0">
+            <a:noAutofit/>
+          </a:bodyPr>
+          <a:lstStyle/>
+          <a:p>
+            <a:pPr>
+              <a:lnSpc>
+                <a:spcPct val="102000"/>
+              </a:lnSpc>
+            </a:pPr>
+            <a:r>
+              <a:rPr sz="4200" b="1" i="0">
+                <a:solidFill>
+                  <a:srgbClr val="16231F"/>
+                </a:solidFill>
+                <a:latin typeface="Fraunces"/>
+              </a:rPr>
+              <a:t>Medien &amp; Aufmerksamkeit</a:t>
+            </a:r>
+          </a:p>
+        </p:txBody>
+      </p:sp>
+      <p:sp>
+        <p:nvSpPr>
+          <p:cNvPr id="4" name="Rounded Rectangle 3"/>
+          <p:cNvSpPr/>
+          <p:nvPr/>
+        </p:nvSpPr>
+        <p:spPr>
+          <a:xfrm>
+            <a:off x="886968" y="4526280"/>
+            <a:ext cx="2377440" cy="54864"/>
+          </a:xfrm>
+          <a:prstGeom prst="roundRect">
+            <a:avLst>
+              <a:gd name="adj" fmla="val 50000"/>
+            </a:avLst>
+          </a:prstGeom>
+          <a:gradFill>
+            <a:gsLst>
+              <a:gs pos="0">
+                <a:srgbClr val="E8C15F"/>
+              </a:gs>
+              <a:gs pos="100000">
+                <a:srgbClr val="7E6410"/>
+              </a:gs>
+            </a:gsLst>
+            <a:lin ang="0" scaled="1"/>
+          </a:gradFill>
+          <a:ln>
+            <a:noFill/>
+          </a:ln>
+          <a:effectLst/>
+        </p:spPr>
+        <p:style>
+          <a:lnRef idx="1">
+            <a:schemeClr val="accent1"/>
+          </a:lnRef>
+          <a:fillRef idx="3">
+            <a:schemeClr val="accent1"/>
+          </a:fillRef>
+          <a:effectRef idx="2">
+            <a:schemeClr val="accent1"/>
+          </a:effectRef>
+          <a:fontRef idx="minor">
+            <a:schemeClr val="lt1"/>
+          </a:fontRef>
+        </p:style>
+        <p:txBody>
+          <a:bodyPr rtlCol="0" anchor="ctr"/>
+          <a:lstStyle/>
+          <a:p>
+            <a:pPr algn="ctr"/>
+          </a:p>
+        </p:txBody>
+      </p:sp>
+      <p:sp>
+        <p:nvSpPr>
+          <p:cNvPr id="5" name="TextBox 4"/>
+          <p:cNvSpPr txBox="1"/>
+          <p:nvPr/>
+        </p:nvSpPr>
+        <p:spPr>
+          <a:xfrm>
+            <a:off x="0" y="6355080"/>
+            <a:ext cx="12191695" cy="274320"/>
+          </a:xfrm>
+          <a:prstGeom prst="rect">
+            <a:avLst/>
+          </a:prstGeom>
+          <a:noFill/>
+        </p:spPr>
+        <p:txBody>
+          <a:bodyPr wrap="square" anchor="ctr" lIns="0" rIns="0" tIns="0" bIns="0">
+            <a:noAutofit/>
+          </a:bodyPr>
+          <a:lstStyle/>
+          <a:p>
+            <a:pPr algn="ctr"/>
+            <a:r>
+              <a:rPr sz="800" b="0" i="0" spc="260">
+                <a:solidFill>
+                  <a:srgbClr val="626B67"/>
+                </a:solidFill>
+                <a:latin typeface="Fraunces"/>
+              </a:rPr>
+              <a:t>WERDE MEISTER DEINER GEDANKEN</a:t>
+            </a:r>
+          </a:p>
+        </p:txBody>
+      </p:sp>
+    </p:spTree>
+  </p:cSld>
+  <p:clrMapOvr>
+    <a:masterClrMapping/>
+  </p:clrMapOvr>
+</p:sld>
+</file>
+
+<file path=ppt/slides/slide66.xml><?xml version="1.0" encoding="utf-8"?>
+<p:sld xmlns:a="http://schemas.openxmlformats.org/drawingml/2006/main" xmlns:p="http://schemas.openxmlformats.org/presentationml/2006/main" xmlns:r="http://schemas.openxmlformats.org/officeDocument/2006/relationships">
+  <p:cSld>
+    <p:bg>
+      <p:bgPr>
+        <a:solidFill>
+          <a:srgbClr val="F6F4EE"/>
+        </a:solidFill>
+        <a:effectLst/>
+      </p:bgPr>
+    </p:bg>
+    <p:spTree>
+      <p:nvGrpSpPr>
+        <p:cNvPr id="1" name=""/>
+        <p:cNvGrpSpPr/>
+        <p:nvPr/>
+      </p:nvGrpSpPr>
+      <p:grpSpPr/>
+      <p:sp>
+        <p:nvSpPr>
+          <p:cNvPr id="2" name="TextBox 1"/>
+          <p:cNvSpPr txBox="1"/>
+          <p:nvPr/>
+        </p:nvSpPr>
+        <p:spPr>
+          <a:xfrm>
+            <a:off x="0" y="1234440"/>
+            <a:ext cx="12191695" cy="365760"/>
+          </a:xfrm>
+          <a:prstGeom prst="rect">
+            <a:avLst/>
+          </a:prstGeom>
+          <a:noFill/>
+        </p:spPr>
+        <p:txBody>
+          <a:bodyPr wrap="square" anchor="t" lIns="0" rIns="0" tIns="0" bIns="0">
+            <a:noAutofit/>
+          </a:bodyPr>
+          <a:lstStyle/>
+          <a:p>
+            <a:pPr algn="ctr"/>
+            <a:r>
+              <a:rPr sz="1250" b="1" i="0" spc="260">
+                <a:solidFill>
+                  <a:srgbClr val="7E6410"/>
+                </a:solidFill>
+                <a:latin typeface="Inter"/>
+              </a:rPr>
+              <a:t>MERKSATZ · THEMA 04</a:t>
+            </a:r>
+          </a:p>
+        </p:txBody>
+      </p:sp>
+      <p:sp>
+        <p:nvSpPr>
+          <p:cNvPr id="3" name="TextBox 2"/>
+          <p:cNvSpPr txBox="1"/>
+          <p:nvPr/>
+        </p:nvSpPr>
+        <p:spPr>
+          <a:xfrm>
+            <a:off x="0" y="1508760"/>
+            <a:ext cx="12191695" cy="914400"/>
+          </a:xfrm>
+          <a:prstGeom prst="rect">
+            <a:avLst/>
+          </a:prstGeom>
+          <a:noFill/>
+        </p:spPr>
+        <p:txBody>
+          <a:bodyPr wrap="square" anchor="t" lIns="0" rIns="0" tIns="0" bIns="0">
+            <a:noAutofit/>
+          </a:bodyPr>
+          <a:lstStyle/>
+          <a:p>
+            <a:pPr algn="ctr"/>
+            <a:r>
+              <a:rPr sz="7000" b="1" i="0">
+                <a:solidFill>
+                  <a:srgbClr val="D9A93A"/>
+                </a:solidFill>
+                <a:latin typeface="Fraunces"/>
+              </a:rPr>
+              <a:t>“</a:t>
+            </a:r>
+          </a:p>
+        </p:txBody>
+      </p:sp>
+      <p:sp>
+        <p:nvSpPr>
+          <p:cNvPr id="4" name="TextBox 3"/>
+          <p:cNvSpPr txBox="1"/>
+          <p:nvPr/>
+        </p:nvSpPr>
+        <p:spPr>
+          <a:xfrm>
+            <a:off x="1463040" y="2514600"/>
+            <a:ext cx="9265615" cy="2743200"/>
+          </a:xfrm>
+          <a:prstGeom prst="rect">
+            <a:avLst/>
+          </a:prstGeom>
+          <a:noFill/>
+        </p:spPr>
+        <p:txBody>
+          <a:bodyPr wrap="square" anchor="ctr" lIns="0" rIns="0" tIns="0" bIns="0">
+            <a:noAutofit/>
+          </a:bodyPr>
+          <a:lstStyle/>
+          <a:p>
+            <a:pPr algn="ctr">
+              <a:lnSpc>
+                <a:spcPct val="116000"/>
+              </a:lnSpc>
+            </a:pPr>
+            <a:r>
+              <a:rPr sz="3300" b="0" i="0">
+                <a:solidFill>
+                  <a:srgbClr val="16231F"/>
+                </a:solidFill>
+                <a:latin typeface="Fraunces"/>
+              </a:rPr>
+              <a:t>Der Test ist einfach: Werde ich hier klüger und ruhiger – oder nur aufgeregter? Wer die Themen setzt, lenkt dein Denken. Nicht durch die Antwort, sondern durch die Frage, die überhaupt gestellt wird.</a:t>
+            </a:r>
+          </a:p>
+        </p:txBody>
+      </p:sp>
+      <p:sp>
+        <p:nvSpPr>
+          <p:cNvPr id="5" name="TextBox 4"/>
+          <p:cNvSpPr txBox="1"/>
+          <p:nvPr/>
+        </p:nvSpPr>
+        <p:spPr>
+          <a:xfrm>
+            <a:off x="0" y="5806440"/>
+            <a:ext cx="12191695" cy="365760"/>
+          </a:xfrm>
+          <a:prstGeom prst="rect">
+            <a:avLst/>
+          </a:prstGeom>
+          <a:noFill/>
+        </p:spPr>
+        <p:txBody>
+          <a:bodyPr wrap="square" anchor="ctr" lIns="0" rIns="0" tIns="0" bIns="0">
+            <a:noAutofit/>
+          </a:bodyPr>
+          <a:lstStyle/>
+          <a:p>
+            <a:pPr algn="ctr"/>
+            <a:r>
+              <a:rPr sz="1100" b="1" i="0" spc="240">
+                <a:solidFill>
+                  <a:srgbClr val="7E6410"/>
+                </a:solidFill>
+                <a:latin typeface="Inter"/>
+              </a:rPr>
+              <a:t>MEDIEN &amp; AUFMERKSAMKEIT</a:t>
+            </a:r>
+          </a:p>
+        </p:txBody>
+      </p:sp>
+    </p:spTree>
+  </p:cSld>
+  <p:clrMapOvr>
+    <a:masterClrMapping/>
+  </p:clrMapOvr>
+</p:sld>
+</file>
+
+<file path=ppt/slides/slide67.xml><?xml version="1.0" encoding="utf-8"?>
+<p:sld xmlns:a="http://schemas.openxmlformats.org/drawingml/2006/main" xmlns:p="http://schemas.openxmlformats.org/presentationml/2006/main" xmlns:r="http://schemas.openxmlformats.org/officeDocument/2006/relationships">
+  <p:cSld>
+    <p:bg>
+      <p:bgPr>
+        <a:solidFill>
+          <a:srgbClr val="F6F4EE"/>
+        </a:solidFill>
+        <a:effectLst/>
+      </p:bgPr>
+    </p:bg>
+    <p:spTree>
+      <p:nvGrpSpPr>
+        <p:cNvPr id="1" name=""/>
+        <p:cNvGrpSpPr/>
+        <p:nvPr/>
+      </p:nvGrpSpPr>
+      <p:grpSpPr/>
+      <p:sp>
+        <p:nvSpPr>
+          <p:cNvPr id="2" name="TextBox 1"/>
+          <p:cNvSpPr txBox="1"/>
+          <p:nvPr/>
+        </p:nvSpPr>
+        <p:spPr>
+          <a:xfrm>
+            <a:off x="868680" y="2286000"/>
+            <a:ext cx="10454335" cy="365760"/>
+          </a:xfrm>
+          <a:prstGeom prst="rect">
+            <a:avLst/>
+          </a:prstGeom>
+          <a:noFill/>
+        </p:spPr>
+        <p:txBody>
+          <a:bodyPr wrap="square" anchor="t" lIns="0" rIns="0" tIns="0" bIns="0">
+            <a:noAutofit/>
+          </a:bodyPr>
+          <a:lstStyle/>
+          <a:p>
+            <a:pPr algn="l"/>
+            <a:r>
+              <a:rPr sz="1250" b="1" i="0" spc="260">
+                <a:solidFill>
+                  <a:srgbClr val="7E6410"/>
+                </a:solidFill>
+                <a:latin typeface="Inter"/>
+              </a:rPr>
+              <a:t>MENTALE SELBSTVERTEIDIGUNG · 05</a:t>
+            </a:r>
+          </a:p>
+        </p:txBody>
+      </p:sp>
+      <p:sp>
+        <p:nvSpPr>
+          <p:cNvPr id="3" name="TextBox 2"/>
+          <p:cNvSpPr txBox="1"/>
+          <p:nvPr/>
+        </p:nvSpPr>
+        <p:spPr>
+          <a:xfrm>
+            <a:off x="868680" y="2743200"/>
+            <a:ext cx="10454335" cy="1828800"/>
+          </a:xfrm>
+          <a:prstGeom prst="rect">
+            <a:avLst/>
+          </a:prstGeom>
+          <a:noFill/>
+        </p:spPr>
+        <p:txBody>
+          <a:bodyPr wrap="square" anchor="t" lIns="0" rIns="0" tIns="0" bIns="0">
+            <a:noAutofit/>
+          </a:bodyPr>
+          <a:lstStyle/>
+          <a:p>
+            <a:pPr>
+              <a:lnSpc>
+                <a:spcPct val="102000"/>
+              </a:lnSpc>
+            </a:pPr>
+            <a:r>
+              <a:rPr sz="4200" b="1" i="0">
+                <a:solidFill>
+                  <a:srgbClr val="16231F"/>
+                </a:solidFill>
+                <a:latin typeface="Fraunces"/>
+              </a:rPr>
+              <a:t>Algorithmen &amp; Filterblasen</a:t>
+            </a:r>
+          </a:p>
+        </p:txBody>
+      </p:sp>
+      <p:sp>
+        <p:nvSpPr>
+          <p:cNvPr id="4" name="Rounded Rectangle 3"/>
+          <p:cNvSpPr/>
+          <p:nvPr/>
+        </p:nvSpPr>
+        <p:spPr>
+          <a:xfrm>
+            <a:off x="886968" y="4526280"/>
+            <a:ext cx="2377440" cy="54864"/>
+          </a:xfrm>
+          <a:prstGeom prst="roundRect">
+            <a:avLst>
+              <a:gd name="adj" fmla="val 50000"/>
+            </a:avLst>
+          </a:prstGeom>
+          <a:gradFill>
+            <a:gsLst>
+              <a:gs pos="0">
+                <a:srgbClr val="E8C15F"/>
+              </a:gs>
+              <a:gs pos="100000">
+                <a:srgbClr val="7E6410"/>
+              </a:gs>
+            </a:gsLst>
+            <a:lin ang="0" scaled="1"/>
+          </a:gradFill>
+          <a:ln>
+            <a:noFill/>
+          </a:ln>
+          <a:effectLst/>
+        </p:spPr>
+        <p:style>
+          <a:lnRef idx="1">
+            <a:schemeClr val="accent1"/>
+          </a:lnRef>
+          <a:fillRef idx="3">
+            <a:schemeClr val="accent1"/>
+          </a:fillRef>
+          <a:effectRef idx="2">
+            <a:schemeClr val="accent1"/>
+          </a:effectRef>
+          <a:fontRef idx="minor">
+            <a:schemeClr val="lt1"/>
+          </a:fontRef>
+        </p:style>
+        <p:txBody>
+          <a:bodyPr rtlCol="0" anchor="ctr"/>
+          <a:lstStyle/>
+          <a:p>
+            <a:pPr algn="ctr"/>
+          </a:p>
+        </p:txBody>
+      </p:sp>
+      <p:sp>
+        <p:nvSpPr>
+          <p:cNvPr id="5" name="TextBox 4"/>
+          <p:cNvSpPr txBox="1"/>
+          <p:nvPr/>
+        </p:nvSpPr>
+        <p:spPr>
+          <a:xfrm>
+            <a:off x="0" y="6355080"/>
+            <a:ext cx="12191695" cy="274320"/>
+          </a:xfrm>
+          <a:prstGeom prst="rect">
+            <a:avLst/>
+          </a:prstGeom>
+          <a:noFill/>
+        </p:spPr>
+        <p:txBody>
+          <a:bodyPr wrap="square" anchor="ctr" lIns="0" rIns="0" tIns="0" bIns="0">
+            <a:noAutofit/>
+          </a:bodyPr>
+          <a:lstStyle/>
+          <a:p>
+            <a:pPr algn="ctr"/>
+            <a:r>
+              <a:rPr sz="800" b="0" i="0" spc="260">
+                <a:solidFill>
+                  <a:srgbClr val="626B67"/>
+                </a:solidFill>
+                <a:latin typeface="Fraunces"/>
+              </a:rPr>
+              <a:t>WERDE MEISTER DEINER GEDANKEN</a:t>
+            </a:r>
+          </a:p>
+        </p:txBody>
+      </p:sp>
+    </p:spTree>
+  </p:cSld>
+  <p:clrMapOvr>
+    <a:masterClrMapping/>
+  </p:clrMapOvr>
+</p:sld>
+</file>
+
+<file path=ppt/slides/slide68.xml><?xml version="1.0" encoding="utf-8"?>
+<p:sld xmlns:a="http://schemas.openxmlformats.org/drawingml/2006/main" xmlns:p="http://schemas.openxmlformats.org/presentationml/2006/main" xmlns:r="http://schemas.openxmlformats.org/officeDocument/2006/relationships">
+  <p:cSld>
+    <p:bg>
+      <p:bgPr>
+        <a:solidFill>
+          <a:srgbClr val="F6F4EE"/>
+        </a:solidFill>
+        <a:effectLst/>
+      </p:bgPr>
+    </p:bg>
+    <p:spTree>
+      <p:nvGrpSpPr>
+        <p:cNvPr id="1" name=""/>
+        <p:cNvGrpSpPr/>
+        <p:nvPr/>
+      </p:nvGrpSpPr>
+      <p:grpSpPr/>
+      <p:sp>
+        <p:nvSpPr>
+          <p:cNvPr id="2" name="TextBox 1"/>
+          <p:cNvSpPr txBox="1"/>
+          <p:nvPr/>
+        </p:nvSpPr>
+        <p:spPr>
+          <a:xfrm>
+            <a:off x="0" y="1234440"/>
+            <a:ext cx="12191695" cy="365760"/>
+          </a:xfrm>
+          <a:prstGeom prst="rect">
+            <a:avLst/>
+          </a:prstGeom>
+          <a:noFill/>
+        </p:spPr>
+        <p:txBody>
+          <a:bodyPr wrap="square" anchor="t" lIns="0" rIns="0" tIns="0" bIns="0">
+            <a:noAutofit/>
+          </a:bodyPr>
+          <a:lstStyle/>
+          <a:p>
+            <a:pPr algn="ctr"/>
+            <a:r>
+              <a:rPr sz="1250" b="1" i="0" spc="260">
+                <a:solidFill>
+                  <a:srgbClr val="7E6410"/>
+                </a:solidFill>
+                <a:latin typeface="Inter"/>
+              </a:rPr>
+              <a:t>MERKSATZ · THEMA 05</a:t>
+            </a:r>
+          </a:p>
+        </p:txBody>
+      </p:sp>
+      <p:sp>
+        <p:nvSpPr>
+          <p:cNvPr id="3" name="TextBox 2"/>
+          <p:cNvSpPr txBox="1"/>
+          <p:nvPr/>
+        </p:nvSpPr>
+        <p:spPr>
+          <a:xfrm>
+            <a:off x="0" y="1508760"/>
+            <a:ext cx="12191695" cy="914400"/>
+          </a:xfrm>
+          <a:prstGeom prst="rect">
+            <a:avLst/>
+          </a:prstGeom>
+          <a:noFill/>
+        </p:spPr>
+        <p:txBody>
+          <a:bodyPr wrap="square" anchor="t" lIns="0" rIns="0" tIns="0" bIns="0">
+            <a:noAutofit/>
+          </a:bodyPr>
+          <a:lstStyle/>
+          <a:p>
+            <a:pPr algn="ctr"/>
+            <a:r>
+              <a:rPr sz="7000" b="1" i="0">
+                <a:solidFill>
+                  <a:srgbClr val="D9A93A"/>
+                </a:solidFill>
+                <a:latin typeface="Fraunces"/>
+              </a:rPr>
+              <a:t>“</a:t>
+            </a:r>
+          </a:p>
+        </p:txBody>
+      </p:sp>
+      <p:sp>
+        <p:nvSpPr>
+          <p:cNvPr id="4" name="TextBox 3"/>
+          <p:cNvSpPr txBox="1"/>
+          <p:nvPr/>
+        </p:nvSpPr>
+        <p:spPr>
+          <a:xfrm>
+            <a:off x="1463040" y="2514600"/>
+            <a:ext cx="9265615" cy="2743200"/>
+          </a:xfrm>
+          <a:prstGeom prst="rect">
+            <a:avLst/>
+          </a:prstGeom>
+          <a:noFill/>
+        </p:spPr>
+        <p:txBody>
+          <a:bodyPr wrap="square" anchor="ctr" lIns="0" rIns="0" tIns="0" bIns="0">
+            <a:noAutofit/>
+          </a:bodyPr>
+          <a:lstStyle/>
+          <a:p>
+            <a:pPr algn="ctr">
+              <a:lnSpc>
+                <a:spcPct val="116000"/>
+              </a:lnSpc>
+            </a:pPr>
+            <a:r>
+              <a:rPr sz="3300" b="0" i="0">
+                <a:solidFill>
+                  <a:srgbClr val="16231F"/>
+                </a:solidFill>
+                <a:latin typeface="Fraunces"/>
+              </a:rPr>
+              <a:t>Der Schutz: Folge bewusst Stimmen, die anders denken. Klick nicht auf alles, was dich empört. Dein Feed ist ein Spiegel deines Verhaltens, kein Fenster zur Welt.</a:t>
+            </a:r>
+          </a:p>
+        </p:txBody>
+      </p:sp>
+      <p:sp>
+        <p:nvSpPr>
+          <p:cNvPr id="5" name="TextBox 4"/>
+          <p:cNvSpPr txBox="1"/>
+          <p:nvPr/>
+        </p:nvSpPr>
+        <p:spPr>
+          <a:xfrm>
+            <a:off x="0" y="5806440"/>
+            <a:ext cx="12191695" cy="365760"/>
+          </a:xfrm>
+          <a:prstGeom prst="rect">
+            <a:avLst/>
+          </a:prstGeom>
+          <a:noFill/>
+        </p:spPr>
+        <p:txBody>
+          <a:bodyPr wrap="square" anchor="ctr" lIns="0" rIns="0" tIns="0" bIns="0">
+            <a:noAutofit/>
+          </a:bodyPr>
+          <a:lstStyle/>
+          <a:p>
+            <a:pPr algn="ctr"/>
+            <a:r>
+              <a:rPr sz="1100" b="1" i="0" spc="240">
+                <a:solidFill>
+                  <a:srgbClr val="7E6410"/>
+                </a:solidFill>
+                <a:latin typeface="Inter"/>
+              </a:rPr>
+              <a:t>ALGORITHMEN &amp; FILTERBLASEN</a:t>
+            </a:r>
+          </a:p>
+        </p:txBody>
+      </p:sp>
+    </p:spTree>
+  </p:cSld>
+  <p:clrMapOvr>
+    <a:masterClrMapping/>
+  </p:clrMapOvr>
+</p:sld>
+</file>
+
+<file path=ppt/slides/slide69.xml><?xml version="1.0" encoding="utf-8"?>
+<p:sld xmlns:a="http://schemas.openxmlformats.org/drawingml/2006/main" xmlns:p="http://schemas.openxmlformats.org/presentationml/2006/main" xmlns:r="http://schemas.openxmlformats.org/officeDocument/2006/relationships">
+  <p:cSld>
+    <p:bg>
+      <p:bgPr>
+        <a:solidFill>
+          <a:srgbClr val="F6F4EE"/>
+        </a:solidFill>
+        <a:effectLst/>
+      </p:bgPr>
+    </p:bg>
+    <p:spTree>
+      <p:nvGrpSpPr>
+        <p:cNvPr id="1" name=""/>
+        <p:cNvGrpSpPr/>
+        <p:nvPr/>
+      </p:nvGrpSpPr>
+      <p:grpSpPr/>
+      <p:sp>
+        <p:nvSpPr>
+          <p:cNvPr id="2" name="TextBox 1"/>
+          <p:cNvSpPr txBox="1"/>
+          <p:nvPr/>
+        </p:nvSpPr>
+        <p:spPr>
+          <a:xfrm>
+            <a:off x="868680" y="2286000"/>
+            <a:ext cx="10454335" cy="365760"/>
+          </a:xfrm>
+          <a:prstGeom prst="rect">
+            <a:avLst/>
+          </a:prstGeom>
+          <a:noFill/>
+        </p:spPr>
+        <p:txBody>
+          <a:bodyPr wrap="square" anchor="t" lIns="0" rIns="0" tIns="0" bIns="0">
+            <a:noAutofit/>
+          </a:bodyPr>
+          <a:lstStyle/>
+          <a:p>
+            <a:pPr algn="l"/>
+            <a:r>
+              <a:rPr sz="1250" b="1" i="0" spc="260">
+                <a:solidFill>
+                  <a:srgbClr val="7E6410"/>
+                </a:solidFill>
+                <a:latin typeface="Inter"/>
+              </a:rPr>
+              <a:t>MENTALE SELBSTVERTEIDIGUNG · 06</a:t>
+            </a:r>
+          </a:p>
+        </p:txBody>
+      </p:sp>
+      <p:sp>
+        <p:nvSpPr>
+          <p:cNvPr id="3" name="TextBox 2"/>
+          <p:cNvSpPr txBox="1"/>
+          <p:nvPr/>
+        </p:nvSpPr>
+        <p:spPr>
+          <a:xfrm>
+            <a:off x="868680" y="2743200"/>
+            <a:ext cx="10454335" cy="1828800"/>
+          </a:xfrm>
+          <a:prstGeom prst="rect">
+            <a:avLst/>
+          </a:prstGeom>
+          <a:noFill/>
+        </p:spPr>
+        <p:txBody>
+          <a:bodyPr wrap="square" anchor="t" lIns="0" rIns="0" tIns="0" bIns="0">
+            <a:noAutofit/>
+          </a:bodyPr>
+          <a:lstStyle/>
+          <a:p>
+            <a:pPr>
+              <a:lnSpc>
+                <a:spcPct val="102000"/>
+              </a:lnSpc>
+            </a:pPr>
+            <a:r>
+              <a:rPr sz="4200" b="1" i="0">
+                <a:solidFill>
+                  <a:srgbClr val="16231F"/>
+                </a:solidFill>
+                <a:latin typeface="Fraunces"/>
+              </a:rPr>
+              <a:t>Werbung &amp; künstlicher Mangel</a:t>
+            </a:r>
+          </a:p>
+        </p:txBody>
+      </p:sp>
+      <p:sp>
+        <p:nvSpPr>
+          <p:cNvPr id="4" name="Rounded Rectangle 3"/>
+          <p:cNvSpPr/>
+          <p:nvPr/>
+        </p:nvSpPr>
+        <p:spPr>
+          <a:xfrm>
+            <a:off x="886968" y="4526280"/>
+            <a:ext cx="2377440" cy="54864"/>
+          </a:xfrm>
+          <a:prstGeom prst="roundRect">
+            <a:avLst>
+              <a:gd name="adj" fmla="val 50000"/>
+            </a:avLst>
+          </a:prstGeom>
+          <a:gradFill>
+            <a:gsLst>
+              <a:gs pos="0">
+                <a:srgbClr val="E8C15F"/>
+              </a:gs>
+              <a:gs pos="100000">
+                <a:srgbClr val="7E6410"/>
+              </a:gs>
+            </a:gsLst>
+            <a:lin ang="0" scaled="1"/>
+          </a:gradFill>
+          <a:ln>
+            <a:noFill/>
+          </a:ln>
+          <a:effectLst/>
+        </p:spPr>
+        <p:style>
+          <a:lnRef idx="1">
+            <a:schemeClr val="accent1"/>
+          </a:lnRef>
+          <a:fillRef idx="3">
+            <a:schemeClr val="accent1"/>
+          </a:fillRef>
+          <a:effectRef idx="2">
+            <a:schemeClr val="accent1"/>
+          </a:effectRef>
+          <a:fontRef idx="minor">
+            <a:schemeClr val="lt1"/>
+          </a:fontRef>
+        </p:style>
+        <p:txBody>
+          <a:bodyPr rtlCol="0" anchor="ctr"/>
+          <a:lstStyle/>
+          <a:p>
+            <a:pPr algn="ctr"/>
+          </a:p>
+        </p:txBody>
+      </p:sp>
+      <p:sp>
+        <p:nvSpPr>
+          <p:cNvPr id="5" name="TextBox 4"/>
+          <p:cNvSpPr txBox="1"/>
+          <p:nvPr/>
+        </p:nvSpPr>
+        <p:spPr>
+          <a:xfrm>
+            <a:off x="0" y="6355080"/>
+            <a:ext cx="12191695" cy="274320"/>
+          </a:xfrm>
+          <a:prstGeom prst="rect">
+            <a:avLst/>
+          </a:prstGeom>
+          <a:noFill/>
+        </p:spPr>
+        <p:txBody>
+          <a:bodyPr wrap="square" anchor="ctr" lIns="0" rIns="0" tIns="0" bIns="0">
+            <a:noAutofit/>
+          </a:bodyPr>
+          <a:lstStyle/>
+          <a:p>
+            <a:pPr algn="ctr"/>
+            <a:r>
+              <a:rPr sz="800" b="0" i="0" spc="260">
+                <a:solidFill>
+                  <a:srgbClr val="626B67"/>
+                </a:solidFill>
+                <a:latin typeface="Fraunces"/>
+              </a:rPr>
+              <a:t>WERDE MEISTER DEINER GEDANKEN</a:t>
             </a:r>
           </a:p>
         </p:txBody>
@@ -18368,6 +22814,1801 @@
 </p:sld>
 </file>
 
+<file path=ppt/slides/slide70.xml><?xml version="1.0" encoding="utf-8"?>
+<p:sld xmlns:a="http://schemas.openxmlformats.org/drawingml/2006/main" xmlns:p="http://schemas.openxmlformats.org/presentationml/2006/main" xmlns:r="http://schemas.openxmlformats.org/officeDocument/2006/relationships">
+  <p:cSld>
+    <p:bg>
+      <p:bgPr>
+        <a:solidFill>
+          <a:srgbClr val="F6F4EE"/>
+        </a:solidFill>
+        <a:effectLst/>
+      </p:bgPr>
+    </p:bg>
+    <p:spTree>
+      <p:nvGrpSpPr>
+        <p:cNvPr id="1" name=""/>
+        <p:cNvGrpSpPr/>
+        <p:nvPr/>
+      </p:nvGrpSpPr>
+      <p:grpSpPr/>
+      <p:sp>
+        <p:nvSpPr>
+          <p:cNvPr id="2" name="TextBox 1"/>
+          <p:cNvSpPr txBox="1"/>
+          <p:nvPr/>
+        </p:nvSpPr>
+        <p:spPr>
+          <a:xfrm>
+            <a:off x="0" y="1234440"/>
+            <a:ext cx="12191695" cy="365760"/>
+          </a:xfrm>
+          <a:prstGeom prst="rect">
+            <a:avLst/>
+          </a:prstGeom>
+          <a:noFill/>
+        </p:spPr>
+        <p:txBody>
+          <a:bodyPr wrap="square" anchor="t" lIns="0" rIns="0" tIns="0" bIns="0">
+            <a:noAutofit/>
+          </a:bodyPr>
+          <a:lstStyle/>
+          <a:p>
+            <a:pPr algn="ctr"/>
+            <a:r>
+              <a:rPr sz="1250" b="1" i="0" spc="260">
+                <a:solidFill>
+                  <a:srgbClr val="7E6410"/>
+                </a:solidFill>
+                <a:latin typeface="Inter"/>
+              </a:rPr>
+              <a:t>MERKSATZ · THEMA 06</a:t>
+            </a:r>
+          </a:p>
+        </p:txBody>
+      </p:sp>
+      <p:sp>
+        <p:nvSpPr>
+          <p:cNvPr id="3" name="TextBox 2"/>
+          <p:cNvSpPr txBox="1"/>
+          <p:nvPr/>
+        </p:nvSpPr>
+        <p:spPr>
+          <a:xfrm>
+            <a:off x="0" y="1508760"/>
+            <a:ext cx="12191695" cy="914400"/>
+          </a:xfrm>
+          <a:prstGeom prst="rect">
+            <a:avLst/>
+          </a:prstGeom>
+          <a:noFill/>
+        </p:spPr>
+        <p:txBody>
+          <a:bodyPr wrap="square" anchor="t" lIns="0" rIns="0" tIns="0" bIns="0">
+            <a:noAutofit/>
+          </a:bodyPr>
+          <a:lstStyle/>
+          <a:p>
+            <a:pPr algn="ctr"/>
+            <a:r>
+              <a:rPr sz="7000" b="1" i="0">
+                <a:solidFill>
+                  <a:srgbClr val="D9A93A"/>
+                </a:solidFill>
+                <a:latin typeface="Fraunces"/>
+              </a:rPr>
+              <a:t>“</a:t>
+            </a:r>
+          </a:p>
+        </p:txBody>
+      </p:sp>
+      <p:sp>
+        <p:nvSpPr>
+          <p:cNvPr id="4" name="TextBox 3"/>
+          <p:cNvSpPr txBox="1"/>
+          <p:nvPr/>
+        </p:nvSpPr>
+        <p:spPr>
+          <a:xfrm>
+            <a:off x="1463040" y="2514600"/>
+            <a:ext cx="9265615" cy="2743200"/>
+          </a:xfrm>
+          <a:prstGeom prst="rect">
+            <a:avLst/>
+          </a:prstGeom>
+          <a:noFill/>
+        </p:spPr>
+        <p:txBody>
+          <a:bodyPr wrap="square" anchor="ctr" lIns="0" rIns="0" tIns="0" bIns="0">
+            <a:noAutofit/>
+          </a:bodyPr>
+          <a:lstStyle/>
+          <a:p>
+            <a:pPr algn="ctr">
+              <a:lnSpc>
+                <a:spcPct val="116000"/>
+              </a:lnSpc>
+            </a:pPr>
+            <a:r>
+              <a:rPr sz="3300" b="0" i="0">
+                <a:solidFill>
+                  <a:srgbClr val="16231F"/>
+                </a:solidFill>
+                <a:latin typeface="Fraunces"/>
+              </a:rPr>
+              <a:t>Der Ausweg ist nicht Verzicht, sondern eine Pause zwischen Impuls und Kauf. Wollte ich das schon vorher – oder erst seit der Werbung? Vieles kaufst du nicht aus Bedarf, sondern weil dir vorher das Gefühl gegeben wurde, dass dir etwas fehlt.</a:t>
+            </a:r>
+          </a:p>
+        </p:txBody>
+      </p:sp>
+      <p:sp>
+        <p:nvSpPr>
+          <p:cNvPr id="5" name="TextBox 4"/>
+          <p:cNvSpPr txBox="1"/>
+          <p:nvPr/>
+        </p:nvSpPr>
+        <p:spPr>
+          <a:xfrm>
+            <a:off x="0" y="5806440"/>
+            <a:ext cx="12191695" cy="365760"/>
+          </a:xfrm>
+          <a:prstGeom prst="rect">
+            <a:avLst/>
+          </a:prstGeom>
+          <a:noFill/>
+        </p:spPr>
+        <p:txBody>
+          <a:bodyPr wrap="square" anchor="ctr" lIns="0" rIns="0" tIns="0" bIns="0">
+            <a:noAutofit/>
+          </a:bodyPr>
+          <a:lstStyle/>
+          <a:p>
+            <a:pPr algn="ctr"/>
+            <a:r>
+              <a:rPr sz="1100" b="1" i="0" spc="240">
+                <a:solidFill>
+                  <a:srgbClr val="7E6410"/>
+                </a:solidFill>
+                <a:latin typeface="Inter"/>
+              </a:rPr>
+              <a:t>WERBUNG &amp; KÜNSTLICHER MANGEL</a:t>
+            </a:r>
+          </a:p>
+        </p:txBody>
+      </p:sp>
+    </p:spTree>
+  </p:cSld>
+  <p:clrMapOvr>
+    <a:masterClrMapping/>
+  </p:clrMapOvr>
+</p:sld>
+</file>
+
+<file path=ppt/slides/slide71.xml><?xml version="1.0" encoding="utf-8"?>
+<p:sld xmlns:a="http://schemas.openxmlformats.org/drawingml/2006/main" xmlns:p="http://schemas.openxmlformats.org/presentationml/2006/main" xmlns:r="http://schemas.openxmlformats.org/officeDocument/2006/relationships">
+  <p:cSld>
+    <p:bg>
+      <p:bgPr>
+        <a:solidFill>
+          <a:srgbClr val="F6F4EE"/>
+        </a:solidFill>
+        <a:effectLst/>
+      </p:bgPr>
+    </p:bg>
+    <p:spTree>
+      <p:nvGrpSpPr>
+        <p:cNvPr id="1" name=""/>
+        <p:cNvGrpSpPr/>
+        <p:nvPr/>
+      </p:nvGrpSpPr>
+      <p:grpSpPr/>
+      <p:sp>
+        <p:nvSpPr>
+          <p:cNvPr id="2" name="TextBox 1"/>
+          <p:cNvSpPr txBox="1"/>
+          <p:nvPr/>
+        </p:nvSpPr>
+        <p:spPr>
+          <a:xfrm>
+            <a:off x="868680" y="2286000"/>
+            <a:ext cx="10454335" cy="365760"/>
+          </a:xfrm>
+          <a:prstGeom prst="rect">
+            <a:avLst/>
+          </a:prstGeom>
+          <a:noFill/>
+        </p:spPr>
+        <p:txBody>
+          <a:bodyPr wrap="square" anchor="t" lIns="0" rIns="0" tIns="0" bIns="0">
+            <a:noAutofit/>
+          </a:bodyPr>
+          <a:lstStyle/>
+          <a:p>
+            <a:pPr algn="l"/>
+            <a:r>
+              <a:rPr sz="1250" b="1" i="0" spc="260">
+                <a:solidFill>
+                  <a:srgbClr val="7E6410"/>
+                </a:solidFill>
+                <a:latin typeface="Inter"/>
+              </a:rPr>
+              <a:t>MENTALE SELBSTVERTEIDIGUNG · 07</a:t>
+            </a:r>
+          </a:p>
+        </p:txBody>
+      </p:sp>
+      <p:sp>
+        <p:nvSpPr>
+          <p:cNvPr id="3" name="TextBox 2"/>
+          <p:cNvSpPr txBox="1"/>
+          <p:nvPr/>
+        </p:nvSpPr>
+        <p:spPr>
+          <a:xfrm>
+            <a:off x="868680" y="2743200"/>
+            <a:ext cx="10454335" cy="1828800"/>
+          </a:xfrm>
+          <a:prstGeom prst="rect">
+            <a:avLst/>
+          </a:prstGeom>
+          <a:noFill/>
+        </p:spPr>
+        <p:txBody>
+          <a:bodyPr wrap="square" anchor="t" lIns="0" rIns="0" tIns="0" bIns="0">
+            <a:noAutofit/>
+          </a:bodyPr>
+          <a:lstStyle/>
+          <a:p>
+            <a:pPr>
+              <a:lnSpc>
+                <a:spcPct val="102000"/>
+              </a:lnSpc>
+            </a:pPr>
+            <a:r>
+              <a:rPr sz="4200" b="1" i="0">
+                <a:solidFill>
+                  <a:srgbClr val="16231F"/>
+                </a:solidFill>
+                <a:latin typeface="Fraunces"/>
+              </a:rPr>
+              <a:t>Gruppendruck &amp; Schweigespirale</a:t>
+            </a:r>
+          </a:p>
+        </p:txBody>
+      </p:sp>
+      <p:sp>
+        <p:nvSpPr>
+          <p:cNvPr id="4" name="Rounded Rectangle 3"/>
+          <p:cNvSpPr/>
+          <p:nvPr/>
+        </p:nvSpPr>
+        <p:spPr>
+          <a:xfrm>
+            <a:off x="886968" y="4526280"/>
+            <a:ext cx="2377440" cy="54864"/>
+          </a:xfrm>
+          <a:prstGeom prst="roundRect">
+            <a:avLst>
+              <a:gd name="adj" fmla="val 50000"/>
+            </a:avLst>
+          </a:prstGeom>
+          <a:gradFill>
+            <a:gsLst>
+              <a:gs pos="0">
+                <a:srgbClr val="E8C15F"/>
+              </a:gs>
+              <a:gs pos="100000">
+                <a:srgbClr val="7E6410"/>
+              </a:gs>
+            </a:gsLst>
+            <a:lin ang="0" scaled="1"/>
+          </a:gradFill>
+          <a:ln>
+            <a:noFill/>
+          </a:ln>
+          <a:effectLst/>
+        </p:spPr>
+        <p:style>
+          <a:lnRef idx="1">
+            <a:schemeClr val="accent1"/>
+          </a:lnRef>
+          <a:fillRef idx="3">
+            <a:schemeClr val="accent1"/>
+          </a:fillRef>
+          <a:effectRef idx="2">
+            <a:schemeClr val="accent1"/>
+          </a:effectRef>
+          <a:fontRef idx="minor">
+            <a:schemeClr val="lt1"/>
+          </a:fontRef>
+        </p:style>
+        <p:txBody>
+          <a:bodyPr rtlCol="0" anchor="ctr"/>
+          <a:lstStyle/>
+          <a:p>
+            <a:pPr algn="ctr"/>
+          </a:p>
+        </p:txBody>
+      </p:sp>
+      <p:sp>
+        <p:nvSpPr>
+          <p:cNvPr id="5" name="TextBox 4"/>
+          <p:cNvSpPr txBox="1"/>
+          <p:nvPr/>
+        </p:nvSpPr>
+        <p:spPr>
+          <a:xfrm>
+            <a:off x="0" y="6355080"/>
+            <a:ext cx="12191695" cy="274320"/>
+          </a:xfrm>
+          <a:prstGeom prst="rect">
+            <a:avLst/>
+          </a:prstGeom>
+          <a:noFill/>
+        </p:spPr>
+        <p:txBody>
+          <a:bodyPr wrap="square" anchor="ctr" lIns="0" rIns="0" tIns="0" bIns="0">
+            <a:noAutofit/>
+          </a:bodyPr>
+          <a:lstStyle/>
+          <a:p>
+            <a:pPr algn="ctr"/>
+            <a:r>
+              <a:rPr sz="800" b="0" i="0" spc="260">
+                <a:solidFill>
+                  <a:srgbClr val="626B67"/>
+                </a:solidFill>
+                <a:latin typeface="Fraunces"/>
+              </a:rPr>
+              <a:t>WERDE MEISTER DEINER GEDANKEN</a:t>
+            </a:r>
+          </a:p>
+        </p:txBody>
+      </p:sp>
+    </p:spTree>
+  </p:cSld>
+  <p:clrMapOvr>
+    <a:masterClrMapping/>
+  </p:clrMapOvr>
+</p:sld>
+</file>
+
+<file path=ppt/slides/slide72.xml><?xml version="1.0" encoding="utf-8"?>
+<p:sld xmlns:a="http://schemas.openxmlformats.org/drawingml/2006/main" xmlns:p="http://schemas.openxmlformats.org/presentationml/2006/main" xmlns:r="http://schemas.openxmlformats.org/officeDocument/2006/relationships">
+  <p:cSld>
+    <p:bg>
+      <p:bgPr>
+        <a:solidFill>
+          <a:srgbClr val="F6F4EE"/>
+        </a:solidFill>
+        <a:effectLst/>
+      </p:bgPr>
+    </p:bg>
+    <p:spTree>
+      <p:nvGrpSpPr>
+        <p:cNvPr id="1" name=""/>
+        <p:cNvGrpSpPr/>
+        <p:nvPr/>
+      </p:nvGrpSpPr>
+      <p:grpSpPr/>
+      <p:sp>
+        <p:nvSpPr>
+          <p:cNvPr id="2" name="TextBox 1"/>
+          <p:cNvSpPr txBox="1"/>
+          <p:nvPr/>
+        </p:nvSpPr>
+        <p:spPr>
+          <a:xfrm>
+            <a:off x="0" y="1234440"/>
+            <a:ext cx="12191695" cy="365760"/>
+          </a:xfrm>
+          <a:prstGeom prst="rect">
+            <a:avLst/>
+          </a:prstGeom>
+          <a:noFill/>
+        </p:spPr>
+        <p:txBody>
+          <a:bodyPr wrap="square" anchor="t" lIns="0" rIns="0" tIns="0" bIns="0">
+            <a:noAutofit/>
+          </a:bodyPr>
+          <a:lstStyle/>
+          <a:p>
+            <a:pPr algn="ctr"/>
+            <a:r>
+              <a:rPr sz="1250" b="1" i="0" spc="260">
+                <a:solidFill>
+                  <a:srgbClr val="7E6410"/>
+                </a:solidFill>
+                <a:latin typeface="Inter"/>
+              </a:rPr>
+              <a:t>MERKSATZ · THEMA 07</a:t>
+            </a:r>
+          </a:p>
+        </p:txBody>
+      </p:sp>
+      <p:sp>
+        <p:nvSpPr>
+          <p:cNvPr id="3" name="TextBox 2"/>
+          <p:cNvSpPr txBox="1"/>
+          <p:nvPr/>
+        </p:nvSpPr>
+        <p:spPr>
+          <a:xfrm>
+            <a:off x="0" y="1508760"/>
+            <a:ext cx="12191695" cy="914400"/>
+          </a:xfrm>
+          <a:prstGeom prst="rect">
+            <a:avLst/>
+          </a:prstGeom>
+          <a:noFill/>
+        </p:spPr>
+        <p:txBody>
+          <a:bodyPr wrap="square" anchor="t" lIns="0" rIns="0" tIns="0" bIns="0">
+            <a:noAutofit/>
+          </a:bodyPr>
+          <a:lstStyle/>
+          <a:p>
+            <a:pPr algn="ctr"/>
+            <a:r>
+              <a:rPr sz="7000" b="1" i="0">
+                <a:solidFill>
+                  <a:srgbClr val="D9A93A"/>
+                </a:solidFill>
+                <a:latin typeface="Fraunces"/>
+              </a:rPr>
+              <a:t>“</a:t>
+            </a:r>
+          </a:p>
+        </p:txBody>
+      </p:sp>
+      <p:sp>
+        <p:nvSpPr>
+          <p:cNvPr id="4" name="TextBox 3"/>
+          <p:cNvSpPr txBox="1"/>
+          <p:nvPr/>
+        </p:nvSpPr>
+        <p:spPr>
+          <a:xfrm>
+            <a:off x="1463040" y="2514600"/>
+            <a:ext cx="9265615" cy="2743200"/>
+          </a:xfrm>
+          <a:prstGeom prst="rect">
+            <a:avLst/>
+          </a:prstGeom>
+          <a:noFill/>
+        </p:spPr>
+        <p:txBody>
+          <a:bodyPr wrap="square" anchor="ctr" lIns="0" rIns="0" tIns="0" bIns="0">
+            <a:noAutofit/>
+          </a:bodyPr>
+          <a:lstStyle/>
+          <a:p>
+            <a:pPr algn="ctr">
+              <a:lnSpc>
+                <a:spcPct val="116000"/>
+              </a:lnSpc>
+            </a:pPr>
+            <a:r>
+              <a:rPr sz="3300" b="0" i="0">
+                <a:solidFill>
+                  <a:srgbClr val="16231F"/>
+                </a:solidFill>
+                <a:latin typeface="Fraunces"/>
+              </a:rPr>
+              <a:t>Der Mut fängt klein an: einmal ruhig und freundlich sagen, was du wirklich denkst. Fast immer stellt sich heraus, dass mehr Menschen zustimmen, als du dachtest – und dass die befürchtete Ausgrenzung viel kleiner ausfällt.</a:t>
+            </a:r>
+          </a:p>
+        </p:txBody>
+      </p:sp>
+      <p:sp>
+        <p:nvSpPr>
+          <p:cNvPr id="5" name="TextBox 4"/>
+          <p:cNvSpPr txBox="1"/>
+          <p:nvPr/>
+        </p:nvSpPr>
+        <p:spPr>
+          <a:xfrm>
+            <a:off x="0" y="5806440"/>
+            <a:ext cx="12191695" cy="365760"/>
+          </a:xfrm>
+          <a:prstGeom prst="rect">
+            <a:avLst/>
+          </a:prstGeom>
+          <a:noFill/>
+        </p:spPr>
+        <p:txBody>
+          <a:bodyPr wrap="square" anchor="ctr" lIns="0" rIns="0" tIns="0" bIns="0">
+            <a:noAutofit/>
+          </a:bodyPr>
+          <a:lstStyle/>
+          <a:p>
+            <a:pPr algn="ctr"/>
+            <a:r>
+              <a:rPr sz="1100" b="1" i="0" spc="240">
+                <a:solidFill>
+                  <a:srgbClr val="7E6410"/>
+                </a:solidFill>
+                <a:latin typeface="Inter"/>
+              </a:rPr>
+              <a:t>GRUPPENDRUCK &amp; SCHWEIGESPIRALE</a:t>
+            </a:r>
+          </a:p>
+        </p:txBody>
+      </p:sp>
+    </p:spTree>
+  </p:cSld>
+  <p:clrMapOvr>
+    <a:masterClrMapping/>
+  </p:clrMapOvr>
+</p:sld>
+</file>
+
+<file path=ppt/slides/slide73.xml><?xml version="1.0" encoding="utf-8"?>
+<p:sld xmlns:a="http://schemas.openxmlformats.org/drawingml/2006/main" xmlns:p="http://schemas.openxmlformats.org/presentationml/2006/main" xmlns:r="http://schemas.openxmlformats.org/officeDocument/2006/relationships">
+  <p:cSld>
+    <p:bg>
+      <p:bgPr>
+        <a:solidFill>
+          <a:srgbClr val="F6F4EE"/>
+        </a:solidFill>
+        <a:effectLst/>
+      </p:bgPr>
+    </p:bg>
+    <p:spTree>
+      <p:nvGrpSpPr>
+        <p:cNvPr id="1" name=""/>
+        <p:cNvGrpSpPr/>
+        <p:nvPr/>
+      </p:nvGrpSpPr>
+      <p:grpSpPr/>
+      <p:sp>
+        <p:nvSpPr>
+          <p:cNvPr id="2" name="TextBox 1"/>
+          <p:cNvSpPr txBox="1"/>
+          <p:nvPr/>
+        </p:nvSpPr>
+        <p:spPr>
+          <a:xfrm>
+            <a:off x="868680" y="2286000"/>
+            <a:ext cx="10454335" cy="365760"/>
+          </a:xfrm>
+          <a:prstGeom prst="rect">
+            <a:avLst/>
+          </a:prstGeom>
+          <a:noFill/>
+        </p:spPr>
+        <p:txBody>
+          <a:bodyPr wrap="square" anchor="t" lIns="0" rIns="0" tIns="0" bIns="0">
+            <a:noAutofit/>
+          </a:bodyPr>
+          <a:lstStyle/>
+          <a:p>
+            <a:pPr algn="l"/>
+            <a:r>
+              <a:rPr sz="1250" b="1" i="0" spc="260">
+                <a:solidFill>
+                  <a:srgbClr val="7E6410"/>
+                </a:solidFill>
+                <a:latin typeface="Inter"/>
+              </a:rPr>
+              <a:t>MENTALE SELBSTVERTEIDIGUNG · 08</a:t>
+            </a:r>
+          </a:p>
+        </p:txBody>
+      </p:sp>
+      <p:sp>
+        <p:nvSpPr>
+          <p:cNvPr id="3" name="TextBox 2"/>
+          <p:cNvSpPr txBox="1"/>
+          <p:nvPr/>
+        </p:nvSpPr>
+        <p:spPr>
+          <a:xfrm>
+            <a:off x="868680" y="2743200"/>
+            <a:ext cx="10454335" cy="1828800"/>
+          </a:xfrm>
+          <a:prstGeom prst="rect">
+            <a:avLst/>
+          </a:prstGeom>
+          <a:noFill/>
+        </p:spPr>
+        <p:txBody>
+          <a:bodyPr wrap="square" anchor="t" lIns="0" rIns="0" tIns="0" bIns="0">
+            <a:noAutofit/>
+          </a:bodyPr>
+          <a:lstStyle/>
+          <a:p>
+            <a:pPr>
+              <a:lnSpc>
+                <a:spcPct val="102000"/>
+              </a:lnSpc>
+            </a:pPr>
+            <a:r>
+              <a:rPr sz="4200" b="1" i="0">
+                <a:solidFill>
+                  <a:srgbClr val="16231F"/>
+                </a:solidFill>
+                <a:latin typeface="Fraunces"/>
+              </a:rPr>
+              <a:t>Autorität &amp; Gehorsam</a:t>
+            </a:r>
+          </a:p>
+        </p:txBody>
+      </p:sp>
+      <p:sp>
+        <p:nvSpPr>
+          <p:cNvPr id="4" name="Rounded Rectangle 3"/>
+          <p:cNvSpPr/>
+          <p:nvPr/>
+        </p:nvSpPr>
+        <p:spPr>
+          <a:xfrm>
+            <a:off x="886968" y="4526280"/>
+            <a:ext cx="2377440" cy="54864"/>
+          </a:xfrm>
+          <a:prstGeom prst="roundRect">
+            <a:avLst>
+              <a:gd name="adj" fmla="val 50000"/>
+            </a:avLst>
+          </a:prstGeom>
+          <a:gradFill>
+            <a:gsLst>
+              <a:gs pos="0">
+                <a:srgbClr val="E8C15F"/>
+              </a:gs>
+              <a:gs pos="100000">
+                <a:srgbClr val="7E6410"/>
+              </a:gs>
+            </a:gsLst>
+            <a:lin ang="0" scaled="1"/>
+          </a:gradFill>
+          <a:ln>
+            <a:noFill/>
+          </a:ln>
+          <a:effectLst/>
+        </p:spPr>
+        <p:style>
+          <a:lnRef idx="1">
+            <a:schemeClr val="accent1"/>
+          </a:lnRef>
+          <a:fillRef idx="3">
+            <a:schemeClr val="accent1"/>
+          </a:fillRef>
+          <a:effectRef idx="2">
+            <a:schemeClr val="accent1"/>
+          </a:effectRef>
+          <a:fontRef idx="minor">
+            <a:schemeClr val="lt1"/>
+          </a:fontRef>
+        </p:style>
+        <p:txBody>
+          <a:bodyPr rtlCol="0" anchor="ctr"/>
+          <a:lstStyle/>
+          <a:p>
+            <a:pPr algn="ctr"/>
+          </a:p>
+        </p:txBody>
+      </p:sp>
+      <p:sp>
+        <p:nvSpPr>
+          <p:cNvPr id="5" name="TextBox 4"/>
+          <p:cNvSpPr txBox="1"/>
+          <p:nvPr/>
+        </p:nvSpPr>
+        <p:spPr>
+          <a:xfrm>
+            <a:off x="0" y="6355080"/>
+            <a:ext cx="12191695" cy="274320"/>
+          </a:xfrm>
+          <a:prstGeom prst="rect">
+            <a:avLst/>
+          </a:prstGeom>
+          <a:noFill/>
+        </p:spPr>
+        <p:txBody>
+          <a:bodyPr wrap="square" anchor="ctr" lIns="0" rIns="0" tIns="0" bIns="0">
+            <a:noAutofit/>
+          </a:bodyPr>
+          <a:lstStyle/>
+          <a:p>
+            <a:pPr algn="ctr"/>
+            <a:r>
+              <a:rPr sz="800" b="0" i="0" spc="260">
+                <a:solidFill>
+                  <a:srgbClr val="626B67"/>
+                </a:solidFill>
+                <a:latin typeface="Fraunces"/>
+              </a:rPr>
+              <a:t>WERDE MEISTER DEINER GEDANKEN</a:t>
+            </a:r>
+          </a:p>
+        </p:txBody>
+      </p:sp>
+    </p:spTree>
+  </p:cSld>
+  <p:clrMapOvr>
+    <a:masterClrMapping/>
+  </p:clrMapOvr>
+</p:sld>
+</file>
+
+<file path=ppt/slides/slide74.xml><?xml version="1.0" encoding="utf-8"?>
+<p:sld xmlns:a="http://schemas.openxmlformats.org/drawingml/2006/main" xmlns:p="http://schemas.openxmlformats.org/presentationml/2006/main" xmlns:r="http://schemas.openxmlformats.org/officeDocument/2006/relationships">
+  <p:cSld>
+    <p:bg>
+      <p:bgPr>
+        <a:solidFill>
+          <a:srgbClr val="F6F4EE"/>
+        </a:solidFill>
+        <a:effectLst/>
+      </p:bgPr>
+    </p:bg>
+    <p:spTree>
+      <p:nvGrpSpPr>
+        <p:cNvPr id="1" name=""/>
+        <p:cNvGrpSpPr/>
+        <p:nvPr/>
+      </p:nvGrpSpPr>
+      <p:grpSpPr/>
+      <p:sp>
+        <p:nvSpPr>
+          <p:cNvPr id="2" name="TextBox 1"/>
+          <p:cNvSpPr txBox="1"/>
+          <p:nvPr/>
+        </p:nvSpPr>
+        <p:spPr>
+          <a:xfrm>
+            <a:off x="0" y="1234440"/>
+            <a:ext cx="12191695" cy="365760"/>
+          </a:xfrm>
+          <a:prstGeom prst="rect">
+            <a:avLst/>
+          </a:prstGeom>
+          <a:noFill/>
+        </p:spPr>
+        <p:txBody>
+          <a:bodyPr wrap="square" anchor="t" lIns="0" rIns="0" tIns="0" bIns="0">
+            <a:noAutofit/>
+          </a:bodyPr>
+          <a:lstStyle/>
+          <a:p>
+            <a:pPr algn="ctr"/>
+            <a:r>
+              <a:rPr sz="1250" b="1" i="0" spc="260">
+                <a:solidFill>
+                  <a:srgbClr val="7E6410"/>
+                </a:solidFill>
+                <a:latin typeface="Inter"/>
+              </a:rPr>
+              <a:t>MERKSATZ · THEMA 08</a:t>
+            </a:r>
+          </a:p>
+        </p:txBody>
+      </p:sp>
+      <p:sp>
+        <p:nvSpPr>
+          <p:cNvPr id="3" name="TextBox 2"/>
+          <p:cNvSpPr txBox="1"/>
+          <p:nvPr/>
+        </p:nvSpPr>
+        <p:spPr>
+          <a:xfrm>
+            <a:off x="0" y="1508760"/>
+            <a:ext cx="12191695" cy="914400"/>
+          </a:xfrm>
+          <a:prstGeom prst="rect">
+            <a:avLst/>
+          </a:prstGeom>
+          <a:noFill/>
+        </p:spPr>
+        <p:txBody>
+          <a:bodyPr wrap="square" anchor="t" lIns="0" rIns="0" tIns="0" bIns="0">
+            <a:noAutofit/>
+          </a:bodyPr>
+          <a:lstStyle/>
+          <a:p>
+            <a:pPr algn="ctr"/>
+            <a:r>
+              <a:rPr sz="7000" b="1" i="0">
+                <a:solidFill>
+                  <a:srgbClr val="D9A93A"/>
+                </a:solidFill>
+                <a:latin typeface="Fraunces"/>
+              </a:rPr>
+              <a:t>“</a:t>
+            </a:r>
+          </a:p>
+        </p:txBody>
+      </p:sp>
+      <p:sp>
+        <p:nvSpPr>
+          <p:cNvPr id="4" name="TextBox 3"/>
+          <p:cNvSpPr txBox="1"/>
+          <p:nvPr/>
+        </p:nvSpPr>
+        <p:spPr>
+          <a:xfrm>
+            <a:off x="1463040" y="2514600"/>
+            <a:ext cx="9265615" cy="2743200"/>
+          </a:xfrm>
+          <a:prstGeom prst="rect">
+            <a:avLst/>
+          </a:prstGeom>
+          <a:noFill/>
+        </p:spPr>
+        <p:txBody>
+          <a:bodyPr wrap="square" anchor="ctr" lIns="0" rIns="0" tIns="0" bIns="0">
+            <a:noAutofit/>
+          </a:bodyPr>
+          <a:lstStyle/>
+          <a:p>
+            <a:pPr algn="ctr">
+              <a:lnSpc>
+                <a:spcPct val="116000"/>
+              </a:lnSpc>
+            </a:pPr>
+            <a:r>
+              <a:rPr sz="3300" b="0" i="0">
+                <a:solidFill>
+                  <a:srgbClr val="16231F"/>
+                </a:solidFill>
+                <a:latin typeface="Fraunces"/>
+              </a:rPr>
+              <a:t>Vertraue Fachwissen – aber hör nicht auf mitzudenken. Ein Titel ist ein Grund zuzuhören, kein Grund, nicht mehr zu prüfen.</a:t>
+            </a:r>
+          </a:p>
+        </p:txBody>
+      </p:sp>
+      <p:sp>
+        <p:nvSpPr>
+          <p:cNvPr id="5" name="TextBox 4"/>
+          <p:cNvSpPr txBox="1"/>
+          <p:nvPr/>
+        </p:nvSpPr>
+        <p:spPr>
+          <a:xfrm>
+            <a:off x="0" y="5806440"/>
+            <a:ext cx="12191695" cy="365760"/>
+          </a:xfrm>
+          <a:prstGeom prst="rect">
+            <a:avLst/>
+          </a:prstGeom>
+          <a:noFill/>
+        </p:spPr>
+        <p:txBody>
+          <a:bodyPr wrap="square" anchor="ctr" lIns="0" rIns="0" tIns="0" bIns="0">
+            <a:noAutofit/>
+          </a:bodyPr>
+          <a:lstStyle/>
+          <a:p>
+            <a:pPr algn="ctr"/>
+            <a:r>
+              <a:rPr sz="1100" b="1" i="0" spc="240">
+                <a:solidFill>
+                  <a:srgbClr val="7E6410"/>
+                </a:solidFill>
+                <a:latin typeface="Inter"/>
+              </a:rPr>
+              <a:t>AUTORITÄT &amp; GEHORSAM</a:t>
+            </a:r>
+          </a:p>
+        </p:txBody>
+      </p:sp>
+    </p:spTree>
+  </p:cSld>
+  <p:clrMapOvr>
+    <a:masterClrMapping/>
+  </p:clrMapOvr>
+</p:sld>
+</file>
+
+<file path=ppt/slides/slide75.xml><?xml version="1.0" encoding="utf-8"?>
+<p:sld xmlns:a="http://schemas.openxmlformats.org/drawingml/2006/main" xmlns:p="http://schemas.openxmlformats.org/presentationml/2006/main" xmlns:r="http://schemas.openxmlformats.org/officeDocument/2006/relationships">
+  <p:cSld>
+    <p:bg>
+      <p:bgPr>
+        <a:solidFill>
+          <a:srgbClr val="F6F4EE"/>
+        </a:solidFill>
+        <a:effectLst/>
+      </p:bgPr>
+    </p:bg>
+    <p:spTree>
+      <p:nvGrpSpPr>
+        <p:cNvPr id="1" name=""/>
+        <p:cNvGrpSpPr/>
+        <p:nvPr/>
+      </p:nvGrpSpPr>
+      <p:grpSpPr/>
+      <p:sp>
+        <p:nvSpPr>
+          <p:cNvPr id="2" name="TextBox 1"/>
+          <p:cNvSpPr txBox="1"/>
+          <p:nvPr/>
+        </p:nvSpPr>
+        <p:spPr>
+          <a:xfrm>
+            <a:off x="868680" y="2286000"/>
+            <a:ext cx="10454335" cy="365760"/>
+          </a:xfrm>
+          <a:prstGeom prst="rect">
+            <a:avLst/>
+          </a:prstGeom>
+          <a:noFill/>
+        </p:spPr>
+        <p:txBody>
+          <a:bodyPr wrap="square" anchor="t" lIns="0" rIns="0" tIns="0" bIns="0">
+            <a:noAutofit/>
+          </a:bodyPr>
+          <a:lstStyle/>
+          <a:p>
+            <a:pPr algn="l"/>
+            <a:r>
+              <a:rPr sz="1250" b="1" i="0" spc="260">
+                <a:solidFill>
+                  <a:srgbClr val="7E6410"/>
+                </a:solidFill>
+                <a:latin typeface="Inter"/>
+              </a:rPr>
+              <a:t>MENTALE SELBSTVERTEIDIGUNG · 09</a:t>
+            </a:r>
+          </a:p>
+        </p:txBody>
+      </p:sp>
+      <p:sp>
+        <p:nvSpPr>
+          <p:cNvPr id="3" name="TextBox 2"/>
+          <p:cNvSpPr txBox="1"/>
+          <p:nvPr/>
+        </p:nvSpPr>
+        <p:spPr>
+          <a:xfrm>
+            <a:off x="868680" y="2743200"/>
+            <a:ext cx="10454335" cy="1828800"/>
+          </a:xfrm>
+          <a:prstGeom prst="rect">
+            <a:avLst/>
+          </a:prstGeom>
+          <a:noFill/>
+        </p:spPr>
+        <p:txBody>
+          <a:bodyPr wrap="square" anchor="t" lIns="0" rIns="0" tIns="0" bIns="0">
+            <a:noAutofit/>
+          </a:bodyPr>
+          <a:lstStyle/>
+          <a:p>
+            <a:pPr>
+              <a:lnSpc>
+                <a:spcPct val="102000"/>
+              </a:lnSpc>
+            </a:pPr>
+            <a:r>
+              <a:rPr sz="4200" b="1" i="0">
+                <a:solidFill>
+                  <a:srgbClr val="16231F"/>
+                </a:solidFill>
+                <a:latin typeface="Fraunces"/>
+              </a:rPr>
+              <a:t>Angst als Steuerungsmittel</a:t>
+            </a:r>
+          </a:p>
+        </p:txBody>
+      </p:sp>
+      <p:sp>
+        <p:nvSpPr>
+          <p:cNvPr id="4" name="Rounded Rectangle 3"/>
+          <p:cNvSpPr/>
+          <p:nvPr/>
+        </p:nvSpPr>
+        <p:spPr>
+          <a:xfrm>
+            <a:off x="886968" y="4526280"/>
+            <a:ext cx="2377440" cy="54864"/>
+          </a:xfrm>
+          <a:prstGeom prst="roundRect">
+            <a:avLst>
+              <a:gd name="adj" fmla="val 50000"/>
+            </a:avLst>
+          </a:prstGeom>
+          <a:gradFill>
+            <a:gsLst>
+              <a:gs pos="0">
+                <a:srgbClr val="E8C15F"/>
+              </a:gs>
+              <a:gs pos="100000">
+                <a:srgbClr val="7E6410"/>
+              </a:gs>
+            </a:gsLst>
+            <a:lin ang="0" scaled="1"/>
+          </a:gradFill>
+          <a:ln>
+            <a:noFill/>
+          </a:ln>
+          <a:effectLst/>
+        </p:spPr>
+        <p:style>
+          <a:lnRef idx="1">
+            <a:schemeClr val="accent1"/>
+          </a:lnRef>
+          <a:fillRef idx="3">
+            <a:schemeClr val="accent1"/>
+          </a:fillRef>
+          <a:effectRef idx="2">
+            <a:schemeClr val="accent1"/>
+          </a:effectRef>
+          <a:fontRef idx="minor">
+            <a:schemeClr val="lt1"/>
+          </a:fontRef>
+        </p:style>
+        <p:txBody>
+          <a:bodyPr rtlCol="0" anchor="ctr"/>
+          <a:lstStyle/>
+          <a:p>
+            <a:pPr algn="ctr"/>
+          </a:p>
+        </p:txBody>
+      </p:sp>
+      <p:sp>
+        <p:nvSpPr>
+          <p:cNvPr id="5" name="TextBox 4"/>
+          <p:cNvSpPr txBox="1"/>
+          <p:nvPr/>
+        </p:nvSpPr>
+        <p:spPr>
+          <a:xfrm>
+            <a:off x="0" y="6355080"/>
+            <a:ext cx="12191695" cy="274320"/>
+          </a:xfrm>
+          <a:prstGeom prst="rect">
+            <a:avLst/>
+          </a:prstGeom>
+          <a:noFill/>
+        </p:spPr>
+        <p:txBody>
+          <a:bodyPr wrap="square" anchor="ctr" lIns="0" rIns="0" tIns="0" bIns="0">
+            <a:noAutofit/>
+          </a:bodyPr>
+          <a:lstStyle/>
+          <a:p>
+            <a:pPr algn="ctr"/>
+            <a:r>
+              <a:rPr sz="800" b="0" i="0" spc="260">
+                <a:solidFill>
+                  <a:srgbClr val="626B67"/>
+                </a:solidFill>
+                <a:latin typeface="Fraunces"/>
+              </a:rPr>
+              <a:t>WERDE MEISTER DEINER GEDANKEN</a:t>
+            </a:r>
+          </a:p>
+        </p:txBody>
+      </p:sp>
+    </p:spTree>
+  </p:cSld>
+  <p:clrMapOvr>
+    <a:masterClrMapping/>
+  </p:clrMapOvr>
+</p:sld>
+</file>
+
+<file path=ppt/slides/slide76.xml><?xml version="1.0" encoding="utf-8"?>
+<p:sld xmlns:a="http://schemas.openxmlformats.org/drawingml/2006/main" xmlns:p="http://schemas.openxmlformats.org/presentationml/2006/main" xmlns:r="http://schemas.openxmlformats.org/officeDocument/2006/relationships">
+  <p:cSld>
+    <p:bg>
+      <p:bgPr>
+        <a:solidFill>
+          <a:srgbClr val="F6F4EE"/>
+        </a:solidFill>
+        <a:effectLst/>
+      </p:bgPr>
+    </p:bg>
+    <p:spTree>
+      <p:nvGrpSpPr>
+        <p:cNvPr id="1" name=""/>
+        <p:cNvGrpSpPr/>
+        <p:nvPr/>
+      </p:nvGrpSpPr>
+      <p:grpSpPr/>
+      <p:sp>
+        <p:nvSpPr>
+          <p:cNvPr id="2" name="TextBox 1"/>
+          <p:cNvSpPr txBox="1"/>
+          <p:nvPr/>
+        </p:nvSpPr>
+        <p:spPr>
+          <a:xfrm>
+            <a:off x="0" y="1234440"/>
+            <a:ext cx="12191695" cy="365760"/>
+          </a:xfrm>
+          <a:prstGeom prst="rect">
+            <a:avLst/>
+          </a:prstGeom>
+          <a:noFill/>
+        </p:spPr>
+        <p:txBody>
+          <a:bodyPr wrap="square" anchor="t" lIns="0" rIns="0" tIns="0" bIns="0">
+            <a:noAutofit/>
+          </a:bodyPr>
+          <a:lstStyle/>
+          <a:p>
+            <a:pPr algn="ctr"/>
+            <a:r>
+              <a:rPr sz="1250" b="1" i="0" spc="260">
+                <a:solidFill>
+                  <a:srgbClr val="7E6410"/>
+                </a:solidFill>
+                <a:latin typeface="Inter"/>
+              </a:rPr>
+              <a:t>MERKSATZ · THEMA 09</a:t>
+            </a:r>
+          </a:p>
+        </p:txBody>
+      </p:sp>
+      <p:sp>
+        <p:nvSpPr>
+          <p:cNvPr id="3" name="TextBox 2"/>
+          <p:cNvSpPr txBox="1"/>
+          <p:nvPr/>
+        </p:nvSpPr>
+        <p:spPr>
+          <a:xfrm>
+            <a:off x="0" y="1508760"/>
+            <a:ext cx="12191695" cy="914400"/>
+          </a:xfrm>
+          <a:prstGeom prst="rect">
+            <a:avLst/>
+          </a:prstGeom>
+          <a:noFill/>
+        </p:spPr>
+        <p:txBody>
+          <a:bodyPr wrap="square" anchor="t" lIns="0" rIns="0" tIns="0" bIns="0">
+            <a:noAutofit/>
+          </a:bodyPr>
+          <a:lstStyle/>
+          <a:p>
+            <a:pPr algn="ctr"/>
+            <a:r>
+              <a:rPr sz="7000" b="1" i="0">
+                <a:solidFill>
+                  <a:srgbClr val="D9A93A"/>
+                </a:solidFill>
+                <a:latin typeface="Fraunces"/>
+              </a:rPr>
+              <a:t>“</a:t>
+            </a:r>
+          </a:p>
+        </p:txBody>
+      </p:sp>
+      <p:sp>
+        <p:nvSpPr>
+          <p:cNvPr id="4" name="TextBox 3"/>
+          <p:cNvSpPr txBox="1"/>
+          <p:nvPr/>
+        </p:nvSpPr>
+        <p:spPr>
+          <a:xfrm>
+            <a:off x="1463040" y="2514600"/>
+            <a:ext cx="9265615" cy="2743200"/>
+          </a:xfrm>
+          <a:prstGeom prst="rect">
+            <a:avLst/>
+          </a:prstGeom>
+          <a:noFill/>
+        </p:spPr>
+        <p:txBody>
+          <a:bodyPr wrap="square" anchor="ctr" lIns="0" rIns="0" tIns="0" bIns="0">
+            <a:noAutofit/>
+          </a:bodyPr>
+          <a:lstStyle/>
+          <a:p>
+            <a:pPr algn="ctr">
+              <a:lnSpc>
+                <a:spcPct val="116000"/>
+              </a:lnSpc>
+            </a:pPr>
+            <a:r>
+              <a:rPr sz="3300" b="0" i="0">
+                <a:solidFill>
+                  <a:srgbClr val="16231F"/>
+                </a:solidFill>
+                <a:latin typeface="Fraunces"/>
+              </a:rPr>
+              <a:t>Der Schutz beginnt im Körper: langsamer ausatmen, im Alarmzustand keine großen Entscheidungen treffen, und ehrlich fragen: Was liegt tatsächlich in meiner Hand? Angst verengt den Blick und macht lenkbar. Ruhe zurückzugewinnen ist Selbstschutz.</a:t>
+            </a:r>
+          </a:p>
+        </p:txBody>
+      </p:sp>
+      <p:sp>
+        <p:nvSpPr>
+          <p:cNvPr id="5" name="TextBox 4"/>
+          <p:cNvSpPr txBox="1"/>
+          <p:nvPr/>
+        </p:nvSpPr>
+        <p:spPr>
+          <a:xfrm>
+            <a:off x="0" y="5806440"/>
+            <a:ext cx="12191695" cy="365760"/>
+          </a:xfrm>
+          <a:prstGeom prst="rect">
+            <a:avLst/>
+          </a:prstGeom>
+          <a:noFill/>
+        </p:spPr>
+        <p:txBody>
+          <a:bodyPr wrap="square" anchor="ctr" lIns="0" rIns="0" tIns="0" bIns="0">
+            <a:noAutofit/>
+          </a:bodyPr>
+          <a:lstStyle/>
+          <a:p>
+            <a:pPr algn="ctr"/>
+            <a:r>
+              <a:rPr sz="1100" b="1" i="0" spc="240">
+                <a:solidFill>
+                  <a:srgbClr val="7E6410"/>
+                </a:solidFill>
+                <a:latin typeface="Inter"/>
+              </a:rPr>
+              <a:t>ANGST ALS STEUERUNGSMITTEL</a:t>
+            </a:r>
+          </a:p>
+        </p:txBody>
+      </p:sp>
+    </p:spTree>
+  </p:cSld>
+  <p:clrMapOvr>
+    <a:masterClrMapping/>
+  </p:clrMapOvr>
+</p:sld>
+</file>
+
+<file path=ppt/slides/slide77.xml><?xml version="1.0" encoding="utf-8"?>
+<p:sld xmlns:a="http://schemas.openxmlformats.org/drawingml/2006/main" xmlns:p="http://schemas.openxmlformats.org/presentationml/2006/main" xmlns:r="http://schemas.openxmlformats.org/officeDocument/2006/relationships">
+  <p:cSld>
+    <p:bg>
+      <p:bgPr>
+        <a:solidFill>
+          <a:srgbClr val="F6F4EE"/>
+        </a:solidFill>
+        <a:effectLst/>
+      </p:bgPr>
+    </p:bg>
+    <p:spTree>
+      <p:nvGrpSpPr>
+        <p:cNvPr id="1" name=""/>
+        <p:cNvGrpSpPr/>
+        <p:nvPr/>
+      </p:nvGrpSpPr>
+      <p:grpSpPr/>
+      <p:sp>
+        <p:nvSpPr>
+          <p:cNvPr id="2" name="TextBox 1"/>
+          <p:cNvSpPr txBox="1"/>
+          <p:nvPr/>
+        </p:nvSpPr>
+        <p:spPr>
+          <a:xfrm>
+            <a:off x="868680" y="2286000"/>
+            <a:ext cx="10454335" cy="365760"/>
+          </a:xfrm>
+          <a:prstGeom prst="rect">
+            <a:avLst/>
+          </a:prstGeom>
+          <a:noFill/>
+        </p:spPr>
+        <p:txBody>
+          <a:bodyPr wrap="square" anchor="t" lIns="0" rIns="0" tIns="0" bIns="0">
+            <a:noAutofit/>
+          </a:bodyPr>
+          <a:lstStyle/>
+          <a:p>
+            <a:pPr algn="l"/>
+            <a:r>
+              <a:rPr sz="1250" b="1" i="0" spc="260">
+                <a:solidFill>
+                  <a:srgbClr val="7E6410"/>
+                </a:solidFill>
+                <a:latin typeface="Inter"/>
+              </a:rPr>
+              <a:t>MENTALE SELBSTVERTEIDIGUNG · 10</a:t>
+            </a:r>
+          </a:p>
+        </p:txBody>
+      </p:sp>
+      <p:sp>
+        <p:nvSpPr>
+          <p:cNvPr id="3" name="TextBox 2"/>
+          <p:cNvSpPr txBox="1"/>
+          <p:nvPr/>
+        </p:nvSpPr>
+        <p:spPr>
+          <a:xfrm>
+            <a:off x="868680" y="2743200"/>
+            <a:ext cx="10454335" cy="1828800"/>
+          </a:xfrm>
+          <a:prstGeom prst="rect">
+            <a:avLst/>
+          </a:prstGeom>
+          <a:noFill/>
+        </p:spPr>
+        <p:txBody>
+          <a:bodyPr wrap="square" anchor="t" lIns="0" rIns="0" tIns="0" bIns="0">
+            <a:noAutofit/>
+          </a:bodyPr>
+          <a:lstStyle/>
+          <a:p>
+            <a:pPr>
+              <a:lnSpc>
+                <a:spcPct val="102000"/>
+              </a:lnSpc>
+            </a:pPr>
+            <a:r>
+              <a:rPr sz="4200" b="1" i="0">
+                <a:solidFill>
+                  <a:srgbClr val="16231F"/>
+                </a:solidFill>
+                <a:latin typeface="Fraunces"/>
+              </a:rPr>
+              <a:t>Wiederholung wird zur Wahrheit</a:t>
+            </a:r>
+          </a:p>
+        </p:txBody>
+      </p:sp>
+      <p:sp>
+        <p:nvSpPr>
+          <p:cNvPr id="4" name="Rounded Rectangle 3"/>
+          <p:cNvSpPr/>
+          <p:nvPr/>
+        </p:nvSpPr>
+        <p:spPr>
+          <a:xfrm>
+            <a:off x="886968" y="4526280"/>
+            <a:ext cx="2377440" cy="54864"/>
+          </a:xfrm>
+          <a:prstGeom prst="roundRect">
+            <a:avLst>
+              <a:gd name="adj" fmla="val 50000"/>
+            </a:avLst>
+          </a:prstGeom>
+          <a:gradFill>
+            <a:gsLst>
+              <a:gs pos="0">
+                <a:srgbClr val="E8C15F"/>
+              </a:gs>
+              <a:gs pos="100000">
+                <a:srgbClr val="7E6410"/>
+              </a:gs>
+            </a:gsLst>
+            <a:lin ang="0" scaled="1"/>
+          </a:gradFill>
+          <a:ln>
+            <a:noFill/>
+          </a:ln>
+          <a:effectLst/>
+        </p:spPr>
+        <p:style>
+          <a:lnRef idx="1">
+            <a:schemeClr val="accent1"/>
+          </a:lnRef>
+          <a:fillRef idx="3">
+            <a:schemeClr val="accent1"/>
+          </a:fillRef>
+          <a:effectRef idx="2">
+            <a:schemeClr val="accent1"/>
+          </a:effectRef>
+          <a:fontRef idx="minor">
+            <a:schemeClr val="lt1"/>
+          </a:fontRef>
+        </p:style>
+        <p:txBody>
+          <a:bodyPr rtlCol="0" anchor="ctr"/>
+          <a:lstStyle/>
+          <a:p>
+            <a:pPr algn="ctr"/>
+          </a:p>
+        </p:txBody>
+      </p:sp>
+      <p:sp>
+        <p:nvSpPr>
+          <p:cNvPr id="5" name="TextBox 4"/>
+          <p:cNvSpPr txBox="1"/>
+          <p:nvPr/>
+        </p:nvSpPr>
+        <p:spPr>
+          <a:xfrm>
+            <a:off x="0" y="6355080"/>
+            <a:ext cx="12191695" cy="274320"/>
+          </a:xfrm>
+          <a:prstGeom prst="rect">
+            <a:avLst/>
+          </a:prstGeom>
+          <a:noFill/>
+        </p:spPr>
+        <p:txBody>
+          <a:bodyPr wrap="square" anchor="ctr" lIns="0" rIns="0" tIns="0" bIns="0">
+            <a:noAutofit/>
+          </a:bodyPr>
+          <a:lstStyle/>
+          <a:p>
+            <a:pPr algn="ctr"/>
+            <a:r>
+              <a:rPr sz="800" b="0" i="0" spc="260">
+                <a:solidFill>
+                  <a:srgbClr val="626B67"/>
+                </a:solidFill>
+                <a:latin typeface="Fraunces"/>
+              </a:rPr>
+              <a:t>WERDE MEISTER DEINER GEDANKEN</a:t>
+            </a:r>
+          </a:p>
+        </p:txBody>
+      </p:sp>
+    </p:spTree>
+  </p:cSld>
+  <p:clrMapOvr>
+    <a:masterClrMapping/>
+  </p:clrMapOvr>
+</p:sld>
+</file>
+
+<file path=ppt/slides/slide78.xml><?xml version="1.0" encoding="utf-8"?>
+<p:sld xmlns:a="http://schemas.openxmlformats.org/drawingml/2006/main" xmlns:p="http://schemas.openxmlformats.org/presentationml/2006/main" xmlns:r="http://schemas.openxmlformats.org/officeDocument/2006/relationships">
+  <p:cSld>
+    <p:bg>
+      <p:bgPr>
+        <a:solidFill>
+          <a:srgbClr val="F6F4EE"/>
+        </a:solidFill>
+        <a:effectLst/>
+      </p:bgPr>
+    </p:bg>
+    <p:spTree>
+      <p:nvGrpSpPr>
+        <p:cNvPr id="1" name=""/>
+        <p:cNvGrpSpPr/>
+        <p:nvPr/>
+      </p:nvGrpSpPr>
+      <p:grpSpPr/>
+      <p:sp>
+        <p:nvSpPr>
+          <p:cNvPr id="2" name="TextBox 1"/>
+          <p:cNvSpPr txBox="1"/>
+          <p:nvPr/>
+        </p:nvSpPr>
+        <p:spPr>
+          <a:xfrm>
+            <a:off x="0" y="1234440"/>
+            <a:ext cx="12191695" cy="365760"/>
+          </a:xfrm>
+          <a:prstGeom prst="rect">
+            <a:avLst/>
+          </a:prstGeom>
+          <a:noFill/>
+        </p:spPr>
+        <p:txBody>
+          <a:bodyPr wrap="square" anchor="t" lIns="0" rIns="0" tIns="0" bIns="0">
+            <a:noAutofit/>
+          </a:bodyPr>
+          <a:lstStyle/>
+          <a:p>
+            <a:pPr algn="ctr"/>
+            <a:r>
+              <a:rPr sz="1250" b="1" i="0" spc="260">
+                <a:solidFill>
+                  <a:srgbClr val="7E6410"/>
+                </a:solidFill>
+                <a:latin typeface="Inter"/>
+              </a:rPr>
+              <a:t>MERKSATZ · THEMA 10</a:t>
+            </a:r>
+          </a:p>
+        </p:txBody>
+      </p:sp>
+      <p:sp>
+        <p:nvSpPr>
+          <p:cNvPr id="3" name="TextBox 2"/>
+          <p:cNvSpPr txBox="1"/>
+          <p:nvPr/>
+        </p:nvSpPr>
+        <p:spPr>
+          <a:xfrm>
+            <a:off x="0" y="1508760"/>
+            <a:ext cx="12191695" cy="914400"/>
+          </a:xfrm>
+          <a:prstGeom prst="rect">
+            <a:avLst/>
+          </a:prstGeom>
+          <a:noFill/>
+        </p:spPr>
+        <p:txBody>
+          <a:bodyPr wrap="square" anchor="t" lIns="0" rIns="0" tIns="0" bIns="0">
+            <a:noAutofit/>
+          </a:bodyPr>
+          <a:lstStyle/>
+          <a:p>
+            <a:pPr algn="ctr"/>
+            <a:r>
+              <a:rPr sz="7000" b="1" i="0">
+                <a:solidFill>
+                  <a:srgbClr val="D9A93A"/>
+                </a:solidFill>
+                <a:latin typeface="Fraunces"/>
+              </a:rPr>
+              <a:t>“</a:t>
+            </a:r>
+          </a:p>
+        </p:txBody>
+      </p:sp>
+      <p:sp>
+        <p:nvSpPr>
+          <p:cNvPr id="4" name="TextBox 3"/>
+          <p:cNvSpPr txBox="1"/>
+          <p:nvPr/>
+        </p:nvSpPr>
+        <p:spPr>
+          <a:xfrm>
+            <a:off x="1463040" y="2514600"/>
+            <a:ext cx="9265615" cy="2743200"/>
+          </a:xfrm>
+          <a:prstGeom prst="rect">
+            <a:avLst/>
+          </a:prstGeom>
+          <a:noFill/>
+        </p:spPr>
+        <p:txBody>
+          <a:bodyPr wrap="square" anchor="ctr" lIns="0" rIns="0" tIns="0" bIns="0">
+            <a:noAutofit/>
+          </a:bodyPr>
+          <a:lstStyle/>
+          <a:p>
+            <a:pPr algn="ctr">
+              <a:lnSpc>
+                <a:spcPct val="116000"/>
+              </a:lnSpc>
+            </a:pPr>
+            <a:r>
+              <a:rPr sz="3300" b="0" i="0">
+                <a:solidFill>
+                  <a:srgbClr val="16231F"/>
+                </a:solidFill>
+                <a:latin typeface="Fraunces"/>
+              </a:rPr>
+              <a:t>Behandle das, was du oft gehört hast, mit derselben Skepsis wie beim ersten Mal. Vertrautheit ist kein Beweis.</a:t>
+            </a:r>
+          </a:p>
+        </p:txBody>
+      </p:sp>
+      <p:sp>
+        <p:nvSpPr>
+          <p:cNvPr id="5" name="TextBox 4"/>
+          <p:cNvSpPr txBox="1"/>
+          <p:nvPr/>
+        </p:nvSpPr>
+        <p:spPr>
+          <a:xfrm>
+            <a:off x="0" y="5806440"/>
+            <a:ext cx="12191695" cy="365760"/>
+          </a:xfrm>
+          <a:prstGeom prst="rect">
+            <a:avLst/>
+          </a:prstGeom>
+          <a:noFill/>
+        </p:spPr>
+        <p:txBody>
+          <a:bodyPr wrap="square" anchor="ctr" lIns="0" rIns="0" tIns="0" bIns="0">
+            <a:noAutofit/>
+          </a:bodyPr>
+          <a:lstStyle/>
+          <a:p>
+            <a:pPr algn="ctr"/>
+            <a:r>
+              <a:rPr sz="1100" b="1" i="0" spc="240">
+                <a:solidFill>
+                  <a:srgbClr val="7E6410"/>
+                </a:solidFill>
+                <a:latin typeface="Inter"/>
+              </a:rPr>
+              <a:t>WIEDERHOLUNG WIRD ZUR WAHRHEIT</a:t>
+            </a:r>
+          </a:p>
+        </p:txBody>
+      </p:sp>
+    </p:spTree>
+  </p:cSld>
+  <p:clrMapOvr>
+    <a:masterClrMapping/>
+  </p:clrMapOvr>
+</p:sld>
+</file>
+
+<file path=ppt/slides/slide79.xml><?xml version="1.0" encoding="utf-8"?>
+<p:sld xmlns:a="http://schemas.openxmlformats.org/drawingml/2006/main" xmlns:p="http://schemas.openxmlformats.org/presentationml/2006/main" xmlns:r="http://schemas.openxmlformats.org/officeDocument/2006/relationships">
+  <p:cSld>
+    <p:bg>
+      <p:bgPr>
+        <a:solidFill>
+          <a:srgbClr val="F6F4EE"/>
+        </a:solidFill>
+        <a:effectLst/>
+      </p:bgPr>
+    </p:bg>
+    <p:spTree>
+      <p:nvGrpSpPr>
+        <p:cNvPr id="1" name=""/>
+        <p:cNvGrpSpPr/>
+        <p:nvPr/>
+      </p:nvGrpSpPr>
+      <p:grpSpPr/>
+      <p:sp>
+        <p:nvSpPr>
+          <p:cNvPr id="2" name="TextBox 1"/>
+          <p:cNvSpPr txBox="1"/>
+          <p:nvPr/>
+        </p:nvSpPr>
+        <p:spPr>
+          <a:xfrm>
+            <a:off x="868680" y="2286000"/>
+            <a:ext cx="10454335" cy="365760"/>
+          </a:xfrm>
+          <a:prstGeom prst="rect">
+            <a:avLst/>
+          </a:prstGeom>
+          <a:noFill/>
+        </p:spPr>
+        <p:txBody>
+          <a:bodyPr wrap="square" anchor="t" lIns="0" rIns="0" tIns="0" bIns="0">
+            <a:noAutofit/>
+          </a:bodyPr>
+          <a:lstStyle/>
+          <a:p>
+            <a:pPr algn="l"/>
+            <a:r>
+              <a:rPr sz="1250" b="1" i="0" spc="260">
+                <a:solidFill>
+                  <a:srgbClr val="7E6410"/>
+                </a:solidFill>
+                <a:latin typeface="Inter"/>
+              </a:rPr>
+              <a:t>MENTALE SELBSTVERTEIDIGUNG · 11</a:t>
+            </a:r>
+          </a:p>
+        </p:txBody>
+      </p:sp>
+      <p:sp>
+        <p:nvSpPr>
+          <p:cNvPr id="3" name="TextBox 2"/>
+          <p:cNvSpPr txBox="1"/>
+          <p:nvPr/>
+        </p:nvSpPr>
+        <p:spPr>
+          <a:xfrm>
+            <a:off x="868680" y="2743200"/>
+            <a:ext cx="10454335" cy="1828800"/>
+          </a:xfrm>
+          <a:prstGeom prst="rect">
+            <a:avLst/>
+          </a:prstGeom>
+          <a:noFill/>
+        </p:spPr>
+        <p:txBody>
+          <a:bodyPr wrap="square" anchor="t" lIns="0" rIns="0" tIns="0" bIns="0">
+            <a:noAutofit/>
+          </a:bodyPr>
+          <a:lstStyle/>
+          <a:p>
+            <a:pPr>
+              <a:lnSpc>
+                <a:spcPct val="102000"/>
+              </a:lnSpc>
+            </a:pPr>
+            <a:r>
+              <a:rPr sz="4200" b="1" i="0">
+                <a:solidFill>
+                  <a:srgbClr val="16231F"/>
+                </a:solidFill>
+                <a:latin typeface="Fraunces"/>
+              </a:rPr>
+              <a:t>Ablenkung &amp; Überflutung</a:t>
+            </a:r>
+          </a:p>
+        </p:txBody>
+      </p:sp>
+      <p:sp>
+        <p:nvSpPr>
+          <p:cNvPr id="4" name="Rounded Rectangle 3"/>
+          <p:cNvSpPr/>
+          <p:nvPr/>
+        </p:nvSpPr>
+        <p:spPr>
+          <a:xfrm>
+            <a:off x="886968" y="4526280"/>
+            <a:ext cx="2377440" cy="54864"/>
+          </a:xfrm>
+          <a:prstGeom prst="roundRect">
+            <a:avLst>
+              <a:gd name="adj" fmla="val 50000"/>
+            </a:avLst>
+          </a:prstGeom>
+          <a:gradFill>
+            <a:gsLst>
+              <a:gs pos="0">
+                <a:srgbClr val="E8C15F"/>
+              </a:gs>
+              <a:gs pos="100000">
+                <a:srgbClr val="7E6410"/>
+              </a:gs>
+            </a:gsLst>
+            <a:lin ang="0" scaled="1"/>
+          </a:gradFill>
+          <a:ln>
+            <a:noFill/>
+          </a:ln>
+          <a:effectLst/>
+        </p:spPr>
+        <p:style>
+          <a:lnRef idx="1">
+            <a:schemeClr val="accent1"/>
+          </a:lnRef>
+          <a:fillRef idx="3">
+            <a:schemeClr val="accent1"/>
+          </a:fillRef>
+          <a:effectRef idx="2">
+            <a:schemeClr val="accent1"/>
+          </a:effectRef>
+          <a:fontRef idx="minor">
+            <a:schemeClr val="lt1"/>
+          </a:fontRef>
+        </p:style>
+        <p:txBody>
+          <a:bodyPr rtlCol="0" anchor="ctr"/>
+          <a:lstStyle/>
+          <a:p>
+            <a:pPr algn="ctr"/>
+          </a:p>
+        </p:txBody>
+      </p:sp>
+      <p:sp>
+        <p:nvSpPr>
+          <p:cNvPr id="5" name="TextBox 4"/>
+          <p:cNvSpPr txBox="1"/>
+          <p:nvPr/>
+        </p:nvSpPr>
+        <p:spPr>
+          <a:xfrm>
+            <a:off x="0" y="6355080"/>
+            <a:ext cx="12191695" cy="274320"/>
+          </a:xfrm>
+          <a:prstGeom prst="rect">
+            <a:avLst/>
+          </a:prstGeom>
+          <a:noFill/>
+        </p:spPr>
+        <p:txBody>
+          <a:bodyPr wrap="square" anchor="ctr" lIns="0" rIns="0" tIns="0" bIns="0">
+            <a:noAutofit/>
+          </a:bodyPr>
+          <a:lstStyle/>
+          <a:p>
+            <a:pPr algn="ctr"/>
+            <a:r>
+              <a:rPr sz="800" b="0" i="0" spc="260">
+                <a:solidFill>
+                  <a:srgbClr val="626B67"/>
+                </a:solidFill>
+                <a:latin typeface="Fraunces"/>
+              </a:rPr>
+              <a:t>WERDE MEISTER DEINER GEDANKEN</a:t>
+            </a:r>
+          </a:p>
+        </p:txBody>
+      </p:sp>
+    </p:spTree>
+  </p:cSld>
+  <p:clrMapOvr>
+    <a:masterClrMapping/>
+  </p:clrMapOvr>
+</p:sld>
+</file>
+
 <file path=ppt/slides/slide8.xml><?xml version="1.0" encoding="utf-8"?>
 <p:sld xmlns:a="http://schemas.openxmlformats.org/drawingml/2006/main" xmlns:p="http://schemas.openxmlformats.org/presentationml/2006/main" xmlns:r="http://schemas.openxmlformats.org/officeDocument/2006/relationships">
   <p:cSld>
@@ -18526,6 +24767,1801 @@
                 <a:latin typeface="Inter"/>
               </a:rPr>
               <a:t>STUFE 03 · SELBSTBEOBACHTUNG</a:t>
+            </a:r>
+          </a:p>
+        </p:txBody>
+      </p:sp>
+    </p:spTree>
+  </p:cSld>
+  <p:clrMapOvr>
+    <a:masterClrMapping/>
+  </p:clrMapOvr>
+</p:sld>
+</file>
+
+<file path=ppt/slides/slide80.xml><?xml version="1.0" encoding="utf-8"?>
+<p:sld xmlns:a="http://schemas.openxmlformats.org/drawingml/2006/main" xmlns:p="http://schemas.openxmlformats.org/presentationml/2006/main" xmlns:r="http://schemas.openxmlformats.org/officeDocument/2006/relationships">
+  <p:cSld>
+    <p:bg>
+      <p:bgPr>
+        <a:solidFill>
+          <a:srgbClr val="F6F4EE"/>
+        </a:solidFill>
+        <a:effectLst/>
+      </p:bgPr>
+    </p:bg>
+    <p:spTree>
+      <p:nvGrpSpPr>
+        <p:cNvPr id="1" name=""/>
+        <p:cNvGrpSpPr/>
+        <p:nvPr/>
+      </p:nvGrpSpPr>
+      <p:grpSpPr/>
+      <p:sp>
+        <p:nvSpPr>
+          <p:cNvPr id="2" name="TextBox 1"/>
+          <p:cNvSpPr txBox="1"/>
+          <p:nvPr/>
+        </p:nvSpPr>
+        <p:spPr>
+          <a:xfrm>
+            <a:off x="0" y="1234440"/>
+            <a:ext cx="12191695" cy="365760"/>
+          </a:xfrm>
+          <a:prstGeom prst="rect">
+            <a:avLst/>
+          </a:prstGeom>
+          <a:noFill/>
+        </p:spPr>
+        <p:txBody>
+          <a:bodyPr wrap="square" anchor="t" lIns="0" rIns="0" tIns="0" bIns="0">
+            <a:noAutofit/>
+          </a:bodyPr>
+          <a:lstStyle/>
+          <a:p>
+            <a:pPr algn="ctr"/>
+            <a:r>
+              <a:rPr sz="1250" b="1" i="0" spc="260">
+                <a:solidFill>
+                  <a:srgbClr val="7E6410"/>
+                </a:solidFill>
+                <a:latin typeface="Inter"/>
+              </a:rPr>
+              <a:t>MERKSATZ · THEMA 11</a:t>
+            </a:r>
+          </a:p>
+        </p:txBody>
+      </p:sp>
+      <p:sp>
+        <p:nvSpPr>
+          <p:cNvPr id="3" name="TextBox 2"/>
+          <p:cNvSpPr txBox="1"/>
+          <p:nvPr/>
+        </p:nvSpPr>
+        <p:spPr>
+          <a:xfrm>
+            <a:off x="0" y="1508760"/>
+            <a:ext cx="12191695" cy="914400"/>
+          </a:xfrm>
+          <a:prstGeom prst="rect">
+            <a:avLst/>
+          </a:prstGeom>
+          <a:noFill/>
+        </p:spPr>
+        <p:txBody>
+          <a:bodyPr wrap="square" anchor="t" lIns="0" rIns="0" tIns="0" bIns="0">
+            <a:noAutofit/>
+          </a:bodyPr>
+          <a:lstStyle/>
+          <a:p>
+            <a:pPr algn="ctr"/>
+            <a:r>
+              <a:rPr sz="7000" b="1" i="0">
+                <a:solidFill>
+                  <a:srgbClr val="D9A93A"/>
+                </a:solidFill>
+                <a:latin typeface="Fraunces"/>
+              </a:rPr>
+              <a:t>“</a:t>
+            </a:r>
+          </a:p>
+        </p:txBody>
+      </p:sp>
+      <p:sp>
+        <p:nvSpPr>
+          <p:cNvPr id="4" name="TextBox 3"/>
+          <p:cNvSpPr txBox="1"/>
+          <p:nvPr/>
+        </p:nvSpPr>
+        <p:spPr>
+          <a:xfrm>
+            <a:off x="1463040" y="2514600"/>
+            <a:ext cx="9265615" cy="2743200"/>
+          </a:xfrm>
+          <a:prstGeom prst="rect">
+            <a:avLst/>
+          </a:prstGeom>
+          <a:noFill/>
+        </p:spPr>
+        <p:txBody>
+          <a:bodyPr wrap="square" anchor="ctr" lIns="0" rIns="0" tIns="0" bIns="0">
+            <a:noAutofit/>
+          </a:bodyPr>
+          <a:lstStyle/>
+          <a:p>
+            <a:pPr algn="ctr">
+              <a:lnSpc>
+                <a:spcPct val="116000"/>
+              </a:lnSpc>
+            </a:pPr>
+            <a:r>
+              <a:rPr sz="3300" b="0" i="0">
+                <a:solidFill>
+                  <a:srgbClr val="16231F"/>
+                </a:solidFill>
+                <a:latin typeface="Fraunces"/>
+              </a:rPr>
+              <a:t>Frag bei jedem Aufreger: Betrifft das mein Leben – oder nur meine Erregung? Kann ich etwas tun? Wenn nicht, ist es vor allem Ablenkung. Deine Aufmerksamkeit bewusst zu schützen, ist eine Form der geistigen Selbstbestimmung.</a:t>
+            </a:r>
+          </a:p>
+        </p:txBody>
+      </p:sp>
+      <p:sp>
+        <p:nvSpPr>
+          <p:cNvPr id="5" name="TextBox 4"/>
+          <p:cNvSpPr txBox="1"/>
+          <p:nvPr/>
+        </p:nvSpPr>
+        <p:spPr>
+          <a:xfrm>
+            <a:off x="0" y="5806440"/>
+            <a:ext cx="12191695" cy="365760"/>
+          </a:xfrm>
+          <a:prstGeom prst="rect">
+            <a:avLst/>
+          </a:prstGeom>
+          <a:noFill/>
+        </p:spPr>
+        <p:txBody>
+          <a:bodyPr wrap="square" anchor="ctr" lIns="0" rIns="0" tIns="0" bIns="0">
+            <a:noAutofit/>
+          </a:bodyPr>
+          <a:lstStyle/>
+          <a:p>
+            <a:pPr algn="ctr"/>
+            <a:r>
+              <a:rPr sz="1100" b="1" i="0" spc="240">
+                <a:solidFill>
+                  <a:srgbClr val="7E6410"/>
+                </a:solidFill>
+                <a:latin typeface="Inter"/>
+              </a:rPr>
+              <a:t>ABLENKUNG &amp; ÜBERFLUTUNG</a:t>
+            </a:r>
+          </a:p>
+        </p:txBody>
+      </p:sp>
+    </p:spTree>
+  </p:cSld>
+  <p:clrMapOvr>
+    <a:masterClrMapping/>
+  </p:clrMapOvr>
+</p:sld>
+</file>
+
+<file path=ppt/slides/slide81.xml><?xml version="1.0" encoding="utf-8"?>
+<p:sld xmlns:a="http://schemas.openxmlformats.org/drawingml/2006/main" xmlns:p="http://schemas.openxmlformats.org/presentationml/2006/main" xmlns:r="http://schemas.openxmlformats.org/officeDocument/2006/relationships">
+  <p:cSld>
+    <p:bg>
+      <p:bgPr>
+        <a:solidFill>
+          <a:srgbClr val="F6F4EE"/>
+        </a:solidFill>
+        <a:effectLst/>
+      </p:bgPr>
+    </p:bg>
+    <p:spTree>
+      <p:nvGrpSpPr>
+        <p:cNvPr id="1" name=""/>
+        <p:cNvGrpSpPr/>
+        <p:nvPr/>
+      </p:nvGrpSpPr>
+      <p:grpSpPr/>
+      <p:sp>
+        <p:nvSpPr>
+          <p:cNvPr id="2" name="TextBox 1"/>
+          <p:cNvSpPr txBox="1"/>
+          <p:nvPr/>
+        </p:nvSpPr>
+        <p:spPr>
+          <a:xfrm>
+            <a:off x="868680" y="2286000"/>
+            <a:ext cx="10454335" cy="365760"/>
+          </a:xfrm>
+          <a:prstGeom prst="rect">
+            <a:avLst/>
+          </a:prstGeom>
+          <a:noFill/>
+        </p:spPr>
+        <p:txBody>
+          <a:bodyPr wrap="square" anchor="t" lIns="0" rIns="0" tIns="0" bIns="0">
+            <a:noAutofit/>
+          </a:bodyPr>
+          <a:lstStyle/>
+          <a:p>
+            <a:pPr algn="l"/>
+            <a:r>
+              <a:rPr sz="1250" b="1" i="0" spc="260">
+                <a:solidFill>
+                  <a:srgbClr val="7E6410"/>
+                </a:solidFill>
+                <a:latin typeface="Inter"/>
+              </a:rPr>
+              <a:t>MENTALE SELBSTVERTEIDIGUNG · 12</a:t>
+            </a:r>
+          </a:p>
+        </p:txBody>
+      </p:sp>
+      <p:sp>
+        <p:nvSpPr>
+          <p:cNvPr id="3" name="TextBox 2"/>
+          <p:cNvSpPr txBox="1"/>
+          <p:nvPr/>
+        </p:nvSpPr>
+        <p:spPr>
+          <a:xfrm>
+            <a:off x="868680" y="2743200"/>
+            <a:ext cx="10454335" cy="1828800"/>
+          </a:xfrm>
+          <a:prstGeom prst="rect">
+            <a:avLst/>
+          </a:prstGeom>
+          <a:noFill/>
+        </p:spPr>
+        <p:txBody>
+          <a:bodyPr wrap="square" anchor="t" lIns="0" rIns="0" tIns="0" bIns="0">
+            <a:noAutofit/>
+          </a:bodyPr>
+          <a:lstStyle/>
+          <a:p>
+            <a:pPr>
+              <a:lnSpc>
+                <a:spcPct val="102000"/>
+              </a:lnSpc>
+            </a:pPr>
+            <a:r>
+              <a:rPr sz="4200" b="1" i="0">
+                <a:solidFill>
+                  <a:srgbClr val="16231F"/>
+                </a:solidFill>
+                <a:latin typeface="Fraunces"/>
+              </a:rPr>
+              <a:t>Kognitive Dissonanz</a:t>
+            </a:r>
+          </a:p>
+        </p:txBody>
+      </p:sp>
+      <p:sp>
+        <p:nvSpPr>
+          <p:cNvPr id="4" name="Rounded Rectangle 3"/>
+          <p:cNvSpPr/>
+          <p:nvPr/>
+        </p:nvSpPr>
+        <p:spPr>
+          <a:xfrm>
+            <a:off x="886968" y="4526280"/>
+            <a:ext cx="2377440" cy="54864"/>
+          </a:xfrm>
+          <a:prstGeom prst="roundRect">
+            <a:avLst>
+              <a:gd name="adj" fmla="val 50000"/>
+            </a:avLst>
+          </a:prstGeom>
+          <a:gradFill>
+            <a:gsLst>
+              <a:gs pos="0">
+                <a:srgbClr val="E8C15F"/>
+              </a:gs>
+              <a:gs pos="100000">
+                <a:srgbClr val="7E6410"/>
+              </a:gs>
+            </a:gsLst>
+            <a:lin ang="0" scaled="1"/>
+          </a:gradFill>
+          <a:ln>
+            <a:noFill/>
+          </a:ln>
+          <a:effectLst/>
+        </p:spPr>
+        <p:style>
+          <a:lnRef idx="1">
+            <a:schemeClr val="accent1"/>
+          </a:lnRef>
+          <a:fillRef idx="3">
+            <a:schemeClr val="accent1"/>
+          </a:fillRef>
+          <a:effectRef idx="2">
+            <a:schemeClr val="accent1"/>
+          </a:effectRef>
+          <a:fontRef idx="minor">
+            <a:schemeClr val="lt1"/>
+          </a:fontRef>
+        </p:style>
+        <p:txBody>
+          <a:bodyPr rtlCol="0" anchor="ctr"/>
+          <a:lstStyle/>
+          <a:p>
+            <a:pPr algn="ctr"/>
+          </a:p>
+        </p:txBody>
+      </p:sp>
+      <p:sp>
+        <p:nvSpPr>
+          <p:cNvPr id="5" name="TextBox 4"/>
+          <p:cNvSpPr txBox="1"/>
+          <p:nvPr/>
+        </p:nvSpPr>
+        <p:spPr>
+          <a:xfrm>
+            <a:off x="0" y="6355080"/>
+            <a:ext cx="12191695" cy="274320"/>
+          </a:xfrm>
+          <a:prstGeom prst="rect">
+            <a:avLst/>
+          </a:prstGeom>
+          <a:noFill/>
+        </p:spPr>
+        <p:txBody>
+          <a:bodyPr wrap="square" anchor="ctr" lIns="0" rIns="0" tIns="0" bIns="0">
+            <a:noAutofit/>
+          </a:bodyPr>
+          <a:lstStyle/>
+          <a:p>
+            <a:pPr algn="ctr"/>
+            <a:r>
+              <a:rPr sz="800" b="0" i="0" spc="260">
+                <a:solidFill>
+                  <a:srgbClr val="626B67"/>
+                </a:solidFill>
+                <a:latin typeface="Fraunces"/>
+              </a:rPr>
+              <a:t>WERDE MEISTER DEINER GEDANKEN</a:t>
+            </a:r>
+          </a:p>
+        </p:txBody>
+      </p:sp>
+    </p:spTree>
+  </p:cSld>
+  <p:clrMapOvr>
+    <a:masterClrMapping/>
+  </p:clrMapOvr>
+</p:sld>
+</file>
+
+<file path=ppt/slides/slide82.xml><?xml version="1.0" encoding="utf-8"?>
+<p:sld xmlns:a="http://schemas.openxmlformats.org/drawingml/2006/main" xmlns:p="http://schemas.openxmlformats.org/presentationml/2006/main" xmlns:r="http://schemas.openxmlformats.org/officeDocument/2006/relationships">
+  <p:cSld>
+    <p:bg>
+      <p:bgPr>
+        <a:solidFill>
+          <a:srgbClr val="F6F4EE"/>
+        </a:solidFill>
+        <a:effectLst/>
+      </p:bgPr>
+    </p:bg>
+    <p:spTree>
+      <p:nvGrpSpPr>
+        <p:cNvPr id="1" name=""/>
+        <p:cNvGrpSpPr/>
+        <p:nvPr/>
+      </p:nvGrpSpPr>
+      <p:grpSpPr/>
+      <p:sp>
+        <p:nvSpPr>
+          <p:cNvPr id="2" name="TextBox 1"/>
+          <p:cNvSpPr txBox="1"/>
+          <p:nvPr/>
+        </p:nvSpPr>
+        <p:spPr>
+          <a:xfrm>
+            <a:off x="0" y="1234440"/>
+            <a:ext cx="12191695" cy="365760"/>
+          </a:xfrm>
+          <a:prstGeom prst="rect">
+            <a:avLst/>
+          </a:prstGeom>
+          <a:noFill/>
+        </p:spPr>
+        <p:txBody>
+          <a:bodyPr wrap="square" anchor="t" lIns="0" rIns="0" tIns="0" bIns="0">
+            <a:noAutofit/>
+          </a:bodyPr>
+          <a:lstStyle/>
+          <a:p>
+            <a:pPr algn="ctr"/>
+            <a:r>
+              <a:rPr sz="1250" b="1" i="0" spc="260">
+                <a:solidFill>
+                  <a:srgbClr val="7E6410"/>
+                </a:solidFill>
+                <a:latin typeface="Inter"/>
+              </a:rPr>
+              <a:t>MERKSATZ · THEMA 12</a:t>
+            </a:r>
+          </a:p>
+        </p:txBody>
+      </p:sp>
+      <p:sp>
+        <p:nvSpPr>
+          <p:cNvPr id="3" name="TextBox 2"/>
+          <p:cNvSpPr txBox="1"/>
+          <p:nvPr/>
+        </p:nvSpPr>
+        <p:spPr>
+          <a:xfrm>
+            <a:off x="0" y="1508760"/>
+            <a:ext cx="12191695" cy="914400"/>
+          </a:xfrm>
+          <a:prstGeom prst="rect">
+            <a:avLst/>
+          </a:prstGeom>
+          <a:noFill/>
+        </p:spPr>
+        <p:txBody>
+          <a:bodyPr wrap="square" anchor="t" lIns="0" rIns="0" tIns="0" bIns="0">
+            <a:noAutofit/>
+          </a:bodyPr>
+          <a:lstStyle/>
+          <a:p>
+            <a:pPr algn="ctr"/>
+            <a:r>
+              <a:rPr sz="7000" b="1" i="0">
+                <a:solidFill>
+                  <a:srgbClr val="D9A93A"/>
+                </a:solidFill>
+                <a:latin typeface="Fraunces"/>
+              </a:rPr>
+              <a:t>“</a:t>
+            </a:r>
+          </a:p>
+        </p:txBody>
+      </p:sp>
+      <p:sp>
+        <p:nvSpPr>
+          <p:cNvPr id="4" name="TextBox 3"/>
+          <p:cNvSpPr txBox="1"/>
+          <p:nvPr/>
+        </p:nvSpPr>
+        <p:spPr>
+          <a:xfrm>
+            <a:off x="1463040" y="2514600"/>
+            <a:ext cx="9265615" cy="2743200"/>
+          </a:xfrm>
+          <a:prstGeom prst="rect">
+            <a:avLst/>
+          </a:prstGeom>
+          <a:noFill/>
+        </p:spPr>
+        <p:txBody>
+          <a:bodyPr wrap="square" anchor="ctr" lIns="0" rIns="0" tIns="0" bIns="0">
+            <a:noAutofit/>
+          </a:bodyPr>
+          <a:lstStyle/>
+          <a:p>
+            <a:pPr algn="ctr">
+              <a:lnSpc>
+                <a:spcPct val="116000"/>
+              </a:lnSpc>
+            </a:pPr>
+            <a:r>
+              <a:rPr sz="3300" b="0" i="0">
+                <a:solidFill>
+                  <a:srgbClr val="16231F"/>
+                </a:solidFill>
+                <a:latin typeface="Fraunces"/>
+              </a:rPr>
+              <a:t>Die reifere Fähigkeit ist, einen Abstand zwischen dich und deine Überzeugungen zu legen. Unbehagen ist ein Hinweis, genauer hinzuschauen – nicht wegzuschauen.</a:t>
+            </a:r>
+          </a:p>
+        </p:txBody>
+      </p:sp>
+      <p:sp>
+        <p:nvSpPr>
+          <p:cNvPr id="5" name="TextBox 4"/>
+          <p:cNvSpPr txBox="1"/>
+          <p:nvPr/>
+        </p:nvSpPr>
+        <p:spPr>
+          <a:xfrm>
+            <a:off x="0" y="5806440"/>
+            <a:ext cx="12191695" cy="365760"/>
+          </a:xfrm>
+          <a:prstGeom prst="rect">
+            <a:avLst/>
+          </a:prstGeom>
+          <a:noFill/>
+        </p:spPr>
+        <p:txBody>
+          <a:bodyPr wrap="square" anchor="ctr" lIns="0" rIns="0" tIns="0" bIns="0">
+            <a:noAutofit/>
+          </a:bodyPr>
+          <a:lstStyle/>
+          <a:p>
+            <a:pPr algn="ctr"/>
+            <a:r>
+              <a:rPr sz="1100" b="1" i="0" spc="240">
+                <a:solidFill>
+                  <a:srgbClr val="7E6410"/>
+                </a:solidFill>
+                <a:latin typeface="Inter"/>
+              </a:rPr>
+              <a:t>KOGNITIVE DISSONANZ</a:t>
+            </a:r>
+          </a:p>
+        </p:txBody>
+      </p:sp>
+    </p:spTree>
+  </p:cSld>
+  <p:clrMapOvr>
+    <a:masterClrMapping/>
+  </p:clrMapOvr>
+</p:sld>
+</file>
+
+<file path=ppt/slides/slide83.xml><?xml version="1.0" encoding="utf-8"?>
+<p:sld xmlns:a="http://schemas.openxmlformats.org/drawingml/2006/main" xmlns:p="http://schemas.openxmlformats.org/presentationml/2006/main" xmlns:r="http://schemas.openxmlformats.org/officeDocument/2006/relationships">
+  <p:cSld>
+    <p:bg>
+      <p:bgPr>
+        <a:solidFill>
+          <a:srgbClr val="F6F4EE"/>
+        </a:solidFill>
+        <a:effectLst/>
+      </p:bgPr>
+    </p:bg>
+    <p:spTree>
+      <p:nvGrpSpPr>
+        <p:cNvPr id="1" name=""/>
+        <p:cNvGrpSpPr/>
+        <p:nvPr/>
+      </p:nvGrpSpPr>
+      <p:grpSpPr/>
+      <p:sp>
+        <p:nvSpPr>
+          <p:cNvPr id="2" name="TextBox 1"/>
+          <p:cNvSpPr txBox="1"/>
+          <p:nvPr/>
+        </p:nvSpPr>
+        <p:spPr>
+          <a:xfrm>
+            <a:off x="868680" y="2286000"/>
+            <a:ext cx="10454335" cy="365760"/>
+          </a:xfrm>
+          <a:prstGeom prst="rect">
+            <a:avLst/>
+          </a:prstGeom>
+          <a:noFill/>
+        </p:spPr>
+        <p:txBody>
+          <a:bodyPr wrap="square" anchor="t" lIns="0" rIns="0" tIns="0" bIns="0">
+            <a:noAutofit/>
+          </a:bodyPr>
+          <a:lstStyle/>
+          <a:p>
+            <a:pPr algn="l"/>
+            <a:r>
+              <a:rPr sz="1250" b="1" i="0" spc="260">
+                <a:solidFill>
+                  <a:srgbClr val="7E6410"/>
+                </a:solidFill>
+                <a:latin typeface="Inter"/>
+              </a:rPr>
+              <a:t>MENTALE SELBSTVERTEIDIGUNG · 13</a:t>
+            </a:r>
+          </a:p>
+        </p:txBody>
+      </p:sp>
+      <p:sp>
+        <p:nvSpPr>
+          <p:cNvPr id="3" name="TextBox 2"/>
+          <p:cNvSpPr txBox="1"/>
+          <p:nvPr/>
+        </p:nvSpPr>
+        <p:spPr>
+          <a:xfrm>
+            <a:off x="868680" y="2743200"/>
+            <a:ext cx="10454335" cy="1828800"/>
+          </a:xfrm>
+          <a:prstGeom prst="rect">
+            <a:avLst/>
+          </a:prstGeom>
+          <a:noFill/>
+        </p:spPr>
+        <p:txBody>
+          <a:bodyPr wrap="square" anchor="t" lIns="0" rIns="0" tIns="0" bIns="0">
+            <a:noAutofit/>
+          </a:bodyPr>
+          <a:lstStyle/>
+          <a:p>
+            <a:pPr>
+              <a:lnSpc>
+                <a:spcPct val="102000"/>
+              </a:lnSpc>
+            </a:pPr>
+            <a:r>
+              <a:rPr sz="4200" b="1" i="0">
+                <a:solidFill>
+                  <a:srgbClr val="16231F"/>
+                </a:solidFill>
+                <a:latin typeface="Fraunces"/>
+              </a:rPr>
+              <a:t>Normalisierung</a:t>
+            </a:r>
+          </a:p>
+        </p:txBody>
+      </p:sp>
+      <p:sp>
+        <p:nvSpPr>
+          <p:cNvPr id="4" name="Rounded Rectangle 3"/>
+          <p:cNvSpPr/>
+          <p:nvPr/>
+        </p:nvSpPr>
+        <p:spPr>
+          <a:xfrm>
+            <a:off x="886968" y="4526280"/>
+            <a:ext cx="2377440" cy="54864"/>
+          </a:xfrm>
+          <a:prstGeom prst="roundRect">
+            <a:avLst>
+              <a:gd name="adj" fmla="val 50000"/>
+            </a:avLst>
+          </a:prstGeom>
+          <a:gradFill>
+            <a:gsLst>
+              <a:gs pos="0">
+                <a:srgbClr val="E8C15F"/>
+              </a:gs>
+              <a:gs pos="100000">
+                <a:srgbClr val="7E6410"/>
+              </a:gs>
+            </a:gsLst>
+            <a:lin ang="0" scaled="1"/>
+          </a:gradFill>
+          <a:ln>
+            <a:noFill/>
+          </a:ln>
+          <a:effectLst/>
+        </p:spPr>
+        <p:style>
+          <a:lnRef idx="1">
+            <a:schemeClr val="accent1"/>
+          </a:lnRef>
+          <a:fillRef idx="3">
+            <a:schemeClr val="accent1"/>
+          </a:fillRef>
+          <a:effectRef idx="2">
+            <a:schemeClr val="accent1"/>
+          </a:effectRef>
+          <a:fontRef idx="minor">
+            <a:schemeClr val="lt1"/>
+          </a:fontRef>
+        </p:style>
+        <p:txBody>
+          <a:bodyPr rtlCol="0" anchor="ctr"/>
+          <a:lstStyle/>
+          <a:p>
+            <a:pPr algn="ctr"/>
+          </a:p>
+        </p:txBody>
+      </p:sp>
+      <p:sp>
+        <p:nvSpPr>
+          <p:cNvPr id="5" name="TextBox 4"/>
+          <p:cNvSpPr txBox="1"/>
+          <p:nvPr/>
+        </p:nvSpPr>
+        <p:spPr>
+          <a:xfrm>
+            <a:off x="0" y="6355080"/>
+            <a:ext cx="12191695" cy="274320"/>
+          </a:xfrm>
+          <a:prstGeom prst="rect">
+            <a:avLst/>
+          </a:prstGeom>
+          <a:noFill/>
+        </p:spPr>
+        <p:txBody>
+          <a:bodyPr wrap="square" anchor="ctr" lIns="0" rIns="0" tIns="0" bIns="0">
+            <a:noAutofit/>
+          </a:bodyPr>
+          <a:lstStyle/>
+          <a:p>
+            <a:pPr algn="ctr"/>
+            <a:r>
+              <a:rPr sz="800" b="0" i="0" spc="260">
+                <a:solidFill>
+                  <a:srgbClr val="626B67"/>
+                </a:solidFill>
+                <a:latin typeface="Fraunces"/>
+              </a:rPr>
+              <a:t>WERDE MEISTER DEINER GEDANKEN</a:t>
+            </a:r>
+          </a:p>
+        </p:txBody>
+      </p:sp>
+    </p:spTree>
+  </p:cSld>
+  <p:clrMapOvr>
+    <a:masterClrMapping/>
+  </p:clrMapOvr>
+</p:sld>
+</file>
+
+<file path=ppt/slides/slide84.xml><?xml version="1.0" encoding="utf-8"?>
+<p:sld xmlns:a="http://schemas.openxmlformats.org/drawingml/2006/main" xmlns:p="http://schemas.openxmlformats.org/presentationml/2006/main" xmlns:r="http://schemas.openxmlformats.org/officeDocument/2006/relationships">
+  <p:cSld>
+    <p:bg>
+      <p:bgPr>
+        <a:solidFill>
+          <a:srgbClr val="F6F4EE"/>
+        </a:solidFill>
+        <a:effectLst/>
+      </p:bgPr>
+    </p:bg>
+    <p:spTree>
+      <p:nvGrpSpPr>
+        <p:cNvPr id="1" name=""/>
+        <p:cNvGrpSpPr/>
+        <p:nvPr/>
+      </p:nvGrpSpPr>
+      <p:grpSpPr/>
+      <p:sp>
+        <p:nvSpPr>
+          <p:cNvPr id="2" name="TextBox 1"/>
+          <p:cNvSpPr txBox="1"/>
+          <p:nvPr/>
+        </p:nvSpPr>
+        <p:spPr>
+          <a:xfrm>
+            <a:off x="0" y="1234440"/>
+            <a:ext cx="12191695" cy="365760"/>
+          </a:xfrm>
+          <a:prstGeom prst="rect">
+            <a:avLst/>
+          </a:prstGeom>
+          <a:noFill/>
+        </p:spPr>
+        <p:txBody>
+          <a:bodyPr wrap="square" anchor="t" lIns="0" rIns="0" tIns="0" bIns="0">
+            <a:noAutofit/>
+          </a:bodyPr>
+          <a:lstStyle/>
+          <a:p>
+            <a:pPr algn="ctr"/>
+            <a:r>
+              <a:rPr sz="1250" b="1" i="0" spc="260">
+                <a:solidFill>
+                  <a:srgbClr val="7E6410"/>
+                </a:solidFill>
+                <a:latin typeface="Inter"/>
+              </a:rPr>
+              <a:t>MERKSATZ · THEMA 13</a:t>
+            </a:r>
+          </a:p>
+        </p:txBody>
+      </p:sp>
+      <p:sp>
+        <p:nvSpPr>
+          <p:cNvPr id="3" name="TextBox 2"/>
+          <p:cNvSpPr txBox="1"/>
+          <p:nvPr/>
+        </p:nvSpPr>
+        <p:spPr>
+          <a:xfrm>
+            <a:off x="0" y="1508760"/>
+            <a:ext cx="12191695" cy="914400"/>
+          </a:xfrm>
+          <a:prstGeom prst="rect">
+            <a:avLst/>
+          </a:prstGeom>
+          <a:noFill/>
+        </p:spPr>
+        <p:txBody>
+          <a:bodyPr wrap="square" anchor="t" lIns="0" rIns="0" tIns="0" bIns="0">
+            <a:noAutofit/>
+          </a:bodyPr>
+          <a:lstStyle/>
+          <a:p>
+            <a:pPr algn="ctr"/>
+            <a:r>
+              <a:rPr sz="7000" b="1" i="0">
+                <a:solidFill>
+                  <a:srgbClr val="D9A93A"/>
+                </a:solidFill>
+                <a:latin typeface="Fraunces"/>
+              </a:rPr>
+              <a:t>“</a:t>
+            </a:r>
+          </a:p>
+        </p:txBody>
+      </p:sp>
+      <p:sp>
+        <p:nvSpPr>
+          <p:cNvPr id="4" name="TextBox 3"/>
+          <p:cNvSpPr txBox="1"/>
+          <p:nvPr/>
+        </p:nvSpPr>
+        <p:spPr>
+          <a:xfrm>
+            <a:off x="1463040" y="2514600"/>
+            <a:ext cx="9265615" cy="2743200"/>
+          </a:xfrm>
+          <a:prstGeom prst="rect">
+            <a:avLst/>
+          </a:prstGeom>
+          <a:noFill/>
+        </p:spPr>
+        <p:txBody>
+          <a:bodyPr wrap="square" anchor="ctr" lIns="0" rIns="0" tIns="0" bIns="0">
+            <a:noAutofit/>
+          </a:bodyPr>
+          <a:lstStyle/>
+          <a:p>
+            <a:pPr algn="ctr">
+              <a:lnSpc>
+                <a:spcPct val="116000"/>
+              </a:lnSpc>
+            </a:pPr>
+            <a:r>
+              <a:rPr sz="3300" b="0" i="0">
+                <a:solidFill>
+                  <a:srgbClr val="16231F"/>
+                </a:solidFill>
+                <a:latin typeface="Fraunces"/>
+              </a:rPr>
+              <a:t>Der Punkt ist nicht, jede Veränderung abzulehnen, sondern sie überhaupt zu bemerken. Nimm deine erste, noch wache Reaktion ernst, bevor die Gewöhnung sie überschreibt. Wer die Verschiebung sieht, behält die Wahl, ob er sie mitträgt.</a:t>
+            </a:r>
+          </a:p>
+        </p:txBody>
+      </p:sp>
+      <p:sp>
+        <p:nvSpPr>
+          <p:cNvPr id="5" name="TextBox 4"/>
+          <p:cNvSpPr txBox="1"/>
+          <p:nvPr/>
+        </p:nvSpPr>
+        <p:spPr>
+          <a:xfrm>
+            <a:off x="0" y="5806440"/>
+            <a:ext cx="12191695" cy="365760"/>
+          </a:xfrm>
+          <a:prstGeom prst="rect">
+            <a:avLst/>
+          </a:prstGeom>
+          <a:noFill/>
+        </p:spPr>
+        <p:txBody>
+          <a:bodyPr wrap="square" anchor="ctr" lIns="0" rIns="0" tIns="0" bIns="0">
+            <a:noAutofit/>
+          </a:bodyPr>
+          <a:lstStyle/>
+          <a:p>
+            <a:pPr algn="ctr"/>
+            <a:r>
+              <a:rPr sz="1100" b="1" i="0" spc="240">
+                <a:solidFill>
+                  <a:srgbClr val="7E6410"/>
+                </a:solidFill>
+                <a:latin typeface="Inter"/>
+              </a:rPr>
+              <a:t>NORMALISIERUNG</a:t>
+            </a:r>
+          </a:p>
+        </p:txBody>
+      </p:sp>
+    </p:spTree>
+  </p:cSld>
+  <p:clrMapOvr>
+    <a:masterClrMapping/>
+  </p:clrMapOvr>
+</p:sld>
+</file>
+
+<file path=ppt/slides/slide85.xml><?xml version="1.0" encoding="utf-8"?>
+<p:sld xmlns:a="http://schemas.openxmlformats.org/drawingml/2006/main" xmlns:p="http://schemas.openxmlformats.org/presentationml/2006/main" xmlns:r="http://schemas.openxmlformats.org/officeDocument/2006/relationships">
+  <p:cSld>
+    <p:bg>
+      <p:bgPr>
+        <a:solidFill>
+          <a:srgbClr val="F6F4EE"/>
+        </a:solidFill>
+        <a:effectLst/>
+      </p:bgPr>
+    </p:bg>
+    <p:spTree>
+      <p:nvGrpSpPr>
+        <p:cNvPr id="1" name=""/>
+        <p:cNvGrpSpPr/>
+        <p:nvPr/>
+      </p:nvGrpSpPr>
+      <p:grpSpPr/>
+      <p:sp>
+        <p:nvSpPr>
+          <p:cNvPr id="2" name="TextBox 1"/>
+          <p:cNvSpPr txBox="1"/>
+          <p:nvPr/>
+        </p:nvSpPr>
+        <p:spPr>
+          <a:xfrm>
+            <a:off x="868680" y="2286000"/>
+            <a:ext cx="10454335" cy="365760"/>
+          </a:xfrm>
+          <a:prstGeom prst="rect">
+            <a:avLst/>
+          </a:prstGeom>
+          <a:noFill/>
+        </p:spPr>
+        <p:txBody>
+          <a:bodyPr wrap="square" anchor="t" lIns="0" rIns="0" tIns="0" bIns="0">
+            <a:noAutofit/>
+          </a:bodyPr>
+          <a:lstStyle/>
+          <a:p>
+            <a:pPr algn="l"/>
+            <a:r>
+              <a:rPr sz="1250" b="1" i="0" spc="260">
+                <a:solidFill>
+                  <a:srgbClr val="7E6410"/>
+                </a:solidFill>
+                <a:latin typeface="Inter"/>
+              </a:rPr>
+              <a:t>MENTALE SELBSTVERTEIDIGUNG · 14</a:t>
+            </a:r>
+          </a:p>
+        </p:txBody>
+      </p:sp>
+      <p:sp>
+        <p:nvSpPr>
+          <p:cNvPr id="3" name="TextBox 2"/>
+          <p:cNvSpPr txBox="1"/>
+          <p:nvPr/>
+        </p:nvSpPr>
+        <p:spPr>
+          <a:xfrm>
+            <a:off x="868680" y="2743200"/>
+            <a:ext cx="10454335" cy="1828800"/>
+          </a:xfrm>
+          <a:prstGeom prst="rect">
+            <a:avLst/>
+          </a:prstGeom>
+          <a:noFill/>
+        </p:spPr>
+        <p:txBody>
+          <a:bodyPr wrap="square" anchor="t" lIns="0" rIns="0" tIns="0" bIns="0">
+            <a:noAutofit/>
+          </a:bodyPr>
+          <a:lstStyle/>
+          <a:p>
+            <a:pPr>
+              <a:lnSpc>
+                <a:spcPct val="102000"/>
+              </a:lnSpc>
+            </a:pPr>
+            <a:r>
+              <a:rPr sz="4200" b="1" i="0">
+                <a:solidFill>
+                  <a:srgbClr val="16231F"/>
+                </a:solidFill>
+                <a:latin typeface="Fraunces"/>
+              </a:rPr>
+              <a:t>Bilder statt Argumente</a:t>
+            </a:r>
+          </a:p>
+        </p:txBody>
+      </p:sp>
+      <p:sp>
+        <p:nvSpPr>
+          <p:cNvPr id="4" name="Rounded Rectangle 3"/>
+          <p:cNvSpPr/>
+          <p:nvPr/>
+        </p:nvSpPr>
+        <p:spPr>
+          <a:xfrm>
+            <a:off x="886968" y="4526280"/>
+            <a:ext cx="2377440" cy="54864"/>
+          </a:xfrm>
+          <a:prstGeom prst="roundRect">
+            <a:avLst>
+              <a:gd name="adj" fmla="val 50000"/>
+            </a:avLst>
+          </a:prstGeom>
+          <a:gradFill>
+            <a:gsLst>
+              <a:gs pos="0">
+                <a:srgbClr val="E8C15F"/>
+              </a:gs>
+              <a:gs pos="100000">
+                <a:srgbClr val="7E6410"/>
+              </a:gs>
+            </a:gsLst>
+            <a:lin ang="0" scaled="1"/>
+          </a:gradFill>
+          <a:ln>
+            <a:noFill/>
+          </a:ln>
+          <a:effectLst/>
+        </p:spPr>
+        <p:style>
+          <a:lnRef idx="1">
+            <a:schemeClr val="accent1"/>
+          </a:lnRef>
+          <a:fillRef idx="3">
+            <a:schemeClr val="accent1"/>
+          </a:fillRef>
+          <a:effectRef idx="2">
+            <a:schemeClr val="accent1"/>
+          </a:effectRef>
+          <a:fontRef idx="minor">
+            <a:schemeClr val="lt1"/>
+          </a:fontRef>
+        </p:style>
+        <p:txBody>
+          <a:bodyPr rtlCol="0" anchor="ctr"/>
+          <a:lstStyle/>
+          <a:p>
+            <a:pPr algn="ctr"/>
+          </a:p>
+        </p:txBody>
+      </p:sp>
+      <p:sp>
+        <p:nvSpPr>
+          <p:cNvPr id="5" name="TextBox 4"/>
+          <p:cNvSpPr txBox="1"/>
+          <p:nvPr/>
+        </p:nvSpPr>
+        <p:spPr>
+          <a:xfrm>
+            <a:off x="0" y="6355080"/>
+            <a:ext cx="12191695" cy="274320"/>
+          </a:xfrm>
+          <a:prstGeom prst="rect">
+            <a:avLst/>
+          </a:prstGeom>
+          <a:noFill/>
+        </p:spPr>
+        <p:txBody>
+          <a:bodyPr wrap="square" anchor="ctr" lIns="0" rIns="0" tIns="0" bIns="0">
+            <a:noAutofit/>
+          </a:bodyPr>
+          <a:lstStyle/>
+          <a:p>
+            <a:pPr algn="ctr"/>
+            <a:r>
+              <a:rPr sz="800" b="0" i="0" spc="260">
+                <a:solidFill>
+                  <a:srgbClr val="626B67"/>
+                </a:solidFill>
+                <a:latin typeface="Fraunces"/>
+              </a:rPr>
+              <a:t>WERDE MEISTER DEINER GEDANKEN</a:t>
+            </a:r>
+          </a:p>
+        </p:txBody>
+      </p:sp>
+    </p:spTree>
+  </p:cSld>
+  <p:clrMapOvr>
+    <a:masterClrMapping/>
+  </p:clrMapOvr>
+</p:sld>
+</file>
+
+<file path=ppt/slides/slide86.xml><?xml version="1.0" encoding="utf-8"?>
+<p:sld xmlns:a="http://schemas.openxmlformats.org/drawingml/2006/main" xmlns:p="http://schemas.openxmlformats.org/presentationml/2006/main" xmlns:r="http://schemas.openxmlformats.org/officeDocument/2006/relationships">
+  <p:cSld>
+    <p:bg>
+      <p:bgPr>
+        <a:solidFill>
+          <a:srgbClr val="F6F4EE"/>
+        </a:solidFill>
+        <a:effectLst/>
+      </p:bgPr>
+    </p:bg>
+    <p:spTree>
+      <p:nvGrpSpPr>
+        <p:cNvPr id="1" name=""/>
+        <p:cNvGrpSpPr/>
+        <p:nvPr/>
+      </p:nvGrpSpPr>
+      <p:grpSpPr/>
+      <p:sp>
+        <p:nvSpPr>
+          <p:cNvPr id="2" name="TextBox 1"/>
+          <p:cNvSpPr txBox="1"/>
+          <p:nvPr/>
+        </p:nvSpPr>
+        <p:spPr>
+          <a:xfrm>
+            <a:off x="0" y="1234440"/>
+            <a:ext cx="12191695" cy="365760"/>
+          </a:xfrm>
+          <a:prstGeom prst="rect">
+            <a:avLst/>
+          </a:prstGeom>
+          <a:noFill/>
+        </p:spPr>
+        <p:txBody>
+          <a:bodyPr wrap="square" anchor="t" lIns="0" rIns="0" tIns="0" bIns="0">
+            <a:noAutofit/>
+          </a:bodyPr>
+          <a:lstStyle/>
+          <a:p>
+            <a:pPr algn="ctr"/>
+            <a:r>
+              <a:rPr sz="1250" b="1" i="0" spc="260">
+                <a:solidFill>
+                  <a:srgbClr val="7E6410"/>
+                </a:solidFill>
+                <a:latin typeface="Inter"/>
+              </a:rPr>
+              <a:t>MERKSATZ · THEMA 14</a:t>
+            </a:r>
+          </a:p>
+        </p:txBody>
+      </p:sp>
+      <p:sp>
+        <p:nvSpPr>
+          <p:cNvPr id="3" name="TextBox 2"/>
+          <p:cNvSpPr txBox="1"/>
+          <p:nvPr/>
+        </p:nvSpPr>
+        <p:spPr>
+          <a:xfrm>
+            <a:off x="0" y="1508760"/>
+            <a:ext cx="12191695" cy="914400"/>
+          </a:xfrm>
+          <a:prstGeom prst="rect">
+            <a:avLst/>
+          </a:prstGeom>
+          <a:noFill/>
+        </p:spPr>
+        <p:txBody>
+          <a:bodyPr wrap="square" anchor="t" lIns="0" rIns="0" tIns="0" bIns="0">
+            <a:noAutofit/>
+          </a:bodyPr>
+          <a:lstStyle/>
+          <a:p>
+            <a:pPr algn="ctr"/>
+            <a:r>
+              <a:rPr sz="7000" b="1" i="0">
+                <a:solidFill>
+                  <a:srgbClr val="D9A93A"/>
+                </a:solidFill>
+                <a:latin typeface="Fraunces"/>
+              </a:rPr>
+              <a:t>“</a:t>
+            </a:r>
+          </a:p>
+        </p:txBody>
+      </p:sp>
+      <p:sp>
+        <p:nvSpPr>
+          <p:cNvPr id="4" name="TextBox 3"/>
+          <p:cNvSpPr txBox="1"/>
+          <p:nvPr/>
+        </p:nvSpPr>
+        <p:spPr>
+          <a:xfrm>
+            <a:off x="1463040" y="2514600"/>
+            <a:ext cx="9265615" cy="2743200"/>
+          </a:xfrm>
+          <a:prstGeom prst="rect">
+            <a:avLst/>
+          </a:prstGeom>
+          <a:noFill/>
+        </p:spPr>
+        <p:txBody>
+          <a:bodyPr wrap="square" anchor="ctr" lIns="0" rIns="0" tIns="0" bIns="0">
+            <a:noAutofit/>
+          </a:bodyPr>
+          <a:lstStyle/>
+          <a:p>
+            <a:pPr algn="ctr">
+              <a:lnSpc>
+                <a:spcPct val="116000"/>
+              </a:lnSpc>
+            </a:pPr>
+            <a:r>
+              <a:rPr sz="3300" b="0" i="0">
+                <a:solidFill>
+                  <a:srgbClr val="16231F"/>
+                </a:solidFill>
+                <a:latin typeface="Fraunces"/>
+              </a:rPr>
+              <a:t>Frag bei einem wirkmächtigen Bild: Was könnte außerhalb des Ausschnitts liegen? Und trenne das Gefühl, das es weckt, von der Frage, was es wirklich belegt. Ein Bild ist ein gewählter Ausschnitt, kein vollständiger Beweis.</a:t>
+            </a:r>
+          </a:p>
+        </p:txBody>
+      </p:sp>
+      <p:sp>
+        <p:nvSpPr>
+          <p:cNvPr id="5" name="TextBox 4"/>
+          <p:cNvSpPr txBox="1"/>
+          <p:nvPr/>
+        </p:nvSpPr>
+        <p:spPr>
+          <a:xfrm>
+            <a:off x="0" y="5806440"/>
+            <a:ext cx="12191695" cy="365760"/>
+          </a:xfrm>
+          <a:prstGeom prst="rect">
+            <a:avLst/>
+          </a:prstGeom>
+          <a:noFill/>
+        </p:spPr>
+        <p:txBody>
+          <a:bodyPr wrap="square" anchor="ctr" lIns="0" rIns="0" tIns="0" bIns="0">
+            <a:noAutofit/>
+          </a:bodyPr>
+          <a:lstStyle/>
+          <a:p>
+            <a:pPr algn="ctr"/>
+            <a:r>
+              <a:rPr sz="1100" b="1" i="0" spc="240">
+                <a:solidFill>
+                  <a:srgbClr val="7E6410"/>
+                </a:solidFill>
+                <a:latin typeface="Inter"/>
+              </a:rPr>
+              <a:t>BILDER STATT ARGUMENTE</a:t>
+            </a:r>
+          </a:p>
+        </p:txBody>
+      </p:sp>
+    </p:spTree>
+  </p:cSld>
+  <p:clrMapOvr>
+    <a:masterClrMapping/>
+  </p:clrMapOvr>
+</p:sld>
+</file>
+
+<file path=ppt/slides/slide87.xml><?xml version="1.0" encoding="utf-8"?>
+<p:sld xmlns:a="http://schemas.openxmlformats.org/drawingml/2006/main" xmlns:p="http://schemas.openxmlformats.org/presentationml/2006/main" xmlns:r="http://schemas.openxmlformats.org/officeDocument/2006/relationships">
+  <p:cSld>
+    <p:bg>
+      <p:bgPr>
+        <a:solidFill>
+          <a:srgbClr val="F6F4EE"/>
+        </a:solidFill>
+        <a:effectLst/>
+      </p:bgPr>
+    </p:bg>
+    <p:spTree>
+      <p:nvGrpSpPr>
+        <p:cNvPr id="1" name=""/>
+        <p:cNvGrpSpPr/>
+        <p:nvPr/>
+      </p:nvGrpSpPr>
+      <p:grpSpPr/>
+      <p:sp>
+        <p:nvSpPr>
+          <p:cNvPr id="2" name="TextBox 1"/>
+          <p:cNvSpPr txBox="1"/>
+          <p:nvPr/>
+        </p:nvSpPr>
+        <p:spPr>
+          <a:xfrm>
+            <a:off x="868680" y="2286000"/>
+            <a:ext cx="10454335" cy="365760"/>
+          </a:xfrm>
+          <a:prstGeom prst="rect">
+            <a:avLst/>
+          </a:prstGeom>
+          <a:noFill/>
+        </p:spPr>
+        <p:txBody>
+          <a:bodyPr wrap="square" anchor="t" lIns="0" rIns="0" tIns="0" bIns="0">
+            <a:noAutofit/>
+          </a:bodyPr>
+          <a:lstStyle/>
+          <a:p>
+            <a:pPr algn="l"/>
+            <a:r>
+              <a:rPr sz="1250" b="1" i="0" spc="260">
+                <a:solidFill>
+                  <a:srgbClr val="7E6410"/>
+                </a:solidFill>
+                <a:latin typeface="Inter"/>
+              </a:rPr>
+              <a:t>MENTALE SELBSTVERTEIDIGUNG · 15</a:t>
+            </a:r>
+          </a:p>
+        </p:txBody>
+      </p:sp>
+      <p:sp>
+        <p:nvSpPr>
+          <p:cNvPr id="3" name="TextBox 2"/>
+          <p:cNvSpPr txBox="1"/>
+          <p:nvPr/>
+        </p:nvSpPr>
+        <p:spPr>
+          <a:xfrm>
+            <a:off x="868680" y="2743200"/>
+            <a:ext cx="10454335" cy="1828800"/>
+          </a:xfrm>
+          <a:prstGeom prst="rect">
+            <a:avLst/>
+          </a:prstGeom>
+          <a:noFill/>
+        </p:spPr>
+        <p:txBody>
+          <a:bodyPr wrap="square" anchor="t" lIns="0" rIns="0" tIns="0" bIns="0">
+            <a:noAutofit/>
+          </a:bodyPr>
+          <a:lstStyle/>
+          <a:p>
+            <a:pPr>
+              <a:lnSpc>
+                <a:spcPct val="102000"/>
+              </a:lnSpc>
+            </a:pPr>
+            <a:r>
+              <a:rPr sz="4200" b="1" i="0">
+                <a:solidFill>
+                  <a:srgbClr val="16231F"/>
+                </a:solidFill>
+                <a:latin typeface="Fraunces"/>
+              </a:rPr>
+              <a:t>Identität &amp; Meinung</a:t>
+            </a:r>
+          </a:p>
+        </p:txBody>
+      </p:sp>
+      <p:sp>
+        <p:nvSpPr>
+          <p:cNvPr id="4" name="Rounded Rectangle 3"/>
+          <p:cNvSpPr/>
+          <p:nvPr/>
+        </p:nvSpPr>
+        <p:spPr>
+          <a:xfrm>
+            <a:off x="886968" y="4526280"/>
+            <a:ext cx="2377440" cy="54864"/>
+          </a:xfrm>
+          <a:prstGeom prst="roundRect">
+            <a:avLst>
+              <a:gd name="adj" fmla="val 50000"/>
+            </a:avLst>
+          </a:prstGeom>
+          <a:gradFill>
+            <a:gsLst>
+              <a:gs pos="0">
+                <a:srgbClr val="E8C15F"/>
+              </a:gs>
+              <a:gs pos="100000">
+                <a:srgbClr val="7E6410"/>
+              </a:gs>
+            </a:gsLst>
+            <a:lin ang="0" scaled="1"/>
+          </a:gradFill>
+          <a:ln>
+            <a:noFill/>
+          </a:ln>
+          <a:effectLst/>
+        </p:spPr>
+        <p:style>
+          <a:lnRef idx="1">
+            <a:schemeClr val="accent1"/>
+          </a:lnRef>
+          <a:fillRef idx="3">
+            <a:schemeClr val="accent1"/>
+          </a:fillRef>
+          <a:effectRef idx="2">
+            <a:schemeClr val="accent1"/>
+          </a:effectRef>
+          <a:fontRef idx="minor">
+            <a:schemeClr val="lt1"/>
+          </a:fontRef>
+        </p:style>
+        <p:txBody>
+          <a:bodyPr rtlCol="0" anchor="ctr"/>
+          <a:lstStyle/>
+          <a:p>
+            <a:pPr algn="ctr"/>
+          </a:p>
+        </p:txBody>
+      </p:sp>
+      <p:sp>
+        <p:nvSpPr>
+          <p:cNvPr id="5" name="TextBox 4"/>
+          <p:cNvSpPr txBox="1"/>
+          <p:nvPr/>
+        </p:nvSpPr>
+        <p:spPr>
+          <a:xfrm>
+            <a:off x="0" y="6355080"/>
+            <a:ext cx="12191695" cy="274320"/>
+          </a:xfrm>
+          <a:prstGeom prst="rect">
+            <a:avLst/>
+          </a:prstGeom>
+          <a:noFill/>
+        </p:spPr>
+        <p:txBody>
+          <a:bodyPr wrap="square" anchor="ctr" lIns="0" rIns="0" tIns="0" bIns="0">
+            <a:noAutofit/>
+          </a:bodyPr>
+          <a:lstStyle/>
+          <a:p>
+            <a:pPr algn="ctr"/>
+            <a:r>
+              <a:rPr sz="800" b="0" i="0" spc="260">
+                <a:solidFill>
+                  <a:srgbClr val="626B67"/>
+                </a:solidFill>
+                <a:latin typeface="Fraunces"/>
+              </a:rPr>
+              <a:t>WERDE MEISTER DEINER GEDANKEN</a:t>
+            </a:r>
+          </a:p>
+        </p:txBody>
+      </p:sp>
+    </p:spTree>
+  </p:cSld>
+  <p:clrMapOvr>
+    <a:masterClrMapping/>
+  </p:clrMapOvr>
+</p:sld>
+</file>
+
+<file path=ppt/slides/slide88.xml><?xml version="1.0" encoding="utf-8"?>
+<p:sld xmlns:a="http://schemas.openxmlformats.org/drawingml/2006/main" xmlns:p="http://schemas.openxmlformats.org/presentationml/2006/main" xmlns:r="http://schemas.openxmlformats.org/officeDocument/2006/relationships">
+  <p:cSld>
+    <p:bg>
+      <p:bgPr>
+        <a:solidFill>
+          <a:srgbClr val="F6F4EE"/>
+        </a:solidFill>
+        <a:effectLst/>
+      </p:bgPr>
+    </p:bg>
+    <p:spTree>
+      <p:nvGrpSpPr>
+        <p:cNvPr id="1" name=""/>
+        <p:cNvGrpSpPr/>
+        <p:nvPr/>
+      </p:nvGrpSpPr>
+      <p:grpSpPr/>
+      <p:sp>
+        <p:nvSpPr>
+          <p:cNvPr id="2" name="TextBox 1"/>
+          <p:cNvSpPr txBox="1"/>
+          <p:nvPr/>
+        </p:nvSpPr>
+        <p:spPr>
+          <a:xfrm>
+            <a:off x="0" y="1234440"/>
+            <a:ext cx="12191695" cy="365760"/>
+          </a:xfrm>
+          <a:prstGeom prst="rect">
+            <a:avLst/>
+          </a:prstGeom>
+          <a:noFill/>
+        </p:spPr>
+        <p:txBody>
+          <a:bodyPr wrap="square" anchor="t" lIns="0" rIns="0" tIns="0" bIns="0">
+            <a:noAutofit/>
+          </a:bodyPr>
+          <a:lstStyle/>
+          <a:p>
+            <a:pPr algn="ctr"/>
+            <a:r>
+              <a:rPr sz="1250" b="1" i="0" spc="260">
+                <a:solidFill>
+                  <a:srgbClr val="7E6410"/>
+                </a:solidFill>
+                <a:latin typeface="Inter"/>
+              </a:rPr>
+              <a:t>MERKSATZ · THEMA 15</a:t>
+            </a:r>
+          </a:p>
+        </p:txBody>
+      </p:sp>
+      <p:sp>
+        <p:nvSpPr>
+          <p:cNvPr id="3" name="TextBox 2"/>
+          <p:cNvSpPr txBox="1"/>
+          <p:nvPr/>
+        </p:nvSpPr>
+        <p:spPr>
+          <a:xfrm>
+            <a:off x="0" y="1508760"/>
+            <a:ext cx="12191695" cy="914400"/>
+          </a:xfrm>
+          <a:prstGeom prst="rect">
+            <a:avLst/>
+          </a:prstGeom>
+          <a:noFill/>
+        </p:spPr>
+        <p:txBody>
+          <a:bodyPr wrap="square" anchor="t" lIns="0" rIns="0" tIns="0" bIns="0">
+            <a:noAutofit/>
+          </a:bodyPr>
+          <a:lstStyle/>
+          <a:p>
+            <a:pPr algn="ctr"/>
+            <a:r>
+              <a:rPr sz="7000" b="1" i="0">
+                <a:solidFill>
+                  <a:srgbClr val="D9A93A"/>
+                </a:solidFill>
+                <a:latin typeface="Fraunces"/>
+              </a:rPr>
+              <a:t>“</a:t>
+            </a:r>
+          </a:p>
+        </p:txBody>
+      </p:sp>
+      <p:sp>
+        <p:nvSpPr>
+          <p:cNvPr id="4" name="TextBox 3"/>
+          <p:cNvSpPr txBox="1"/>
+          <p:nvPr/>
+        </p:nvSpPr>
+        <p:spPr>
+          <a:xfrm>
+            <a:off x="1463040" y="2514600"/>
+            <a:ext cx="9265615" cy="2743200"/>
+          </a:xfrm>
+          <a:prstGeom prst="rect">
+            <a:avLst/>
+          </a:prstGeom>
+          <a:noFill/>
+        </p:spPr>
+        <p:txBody>
+          <a:bodyPr wrap="square" anchor="ctr" lIns="0" rIns="0" tIns="0" bIns="0">
+            <a:noAutofit/>
+          </a:bodyPr>
+          <a:lstStyle/>
+          <a:p>
+            <a:pPr algn="ctr">
+              <a:lnSpc>
+                <a:spcPct val="116000"/>
+              </a:lnSpc>
+            </a:pPr>
+            <a:r>
+              <a:rPr sz="3300" b="0" i="0">
+                <a:solidFill>
+                  <a:srgbClr val="16231F"/>
+                </a:solidFill>
+                <a:latin typeface="Fraunces"/>
+              </a:rPr>
+              <a:t>Die Freiheit liegt darin, einen Abstand zwischen dich und deine Meinungen zu legen. Eine Überzeugung ändern zu können ist keine Schwäche, sondern Reife. Eine Meinung ist ein Werkzeug, kein Körperteil.</a:t>
+            </a:r>
+          </a:p>
+        </p:txBody>
+      </p:sp>
+      <p:sp>
+        <p:nvSpPr>
+          <p:cNvPr id="5" name="TextBox 4"/>
+          <p:cNvSpPr txBox="1"/>
+          <p:nvPr/>
+        </p:nvSpPr>
+        <p:spPr>
+          <a:xfrm>
+            <a:off x="0" y="5806440"/>
+            <a:ext cx="12191695" cy="365760"/>
+          </a:xfrm>
+          <a:prstGeom prst="rect">
+            <a:avLst/>
+          </a:prstGeom>
+          <a:noFill/>
+        </p:spPr>
+        <p:txBody>
+          <a:bodyPr wrap="square" anchor="ctr" lIns="0" rIns="0" tIns="0" bIns="0">
+            <a:noAutofit/>
+          </a:bodyPr>
+          <a:lstStyle/>
+          <a:p>
+            <a:pPr algn="ctr"/>
+            <a:r>
+              <a:rPr sz="1100" b="1" i="0" spc="240">
+                <a:solidFill>
+                  <a:srgbClr val="7E6410"/>
+                </a:solidFill>
+                <a:latin typeface="Inter"/>
+              </a:rPr>
+              <a:t>IDENTITÄT &amp; MEINUNG</a:t>
+            </a:r>
+          </a:p>
+        </p:txBody>
+      </p:sp>
+    </p:spTree>
+  </p:cSld>
+  <p:clrMapOvr>
+    <a:masterClrMapping/>
+  </p:clrMapOvr>
+</p:sld>
+</file>
+
+<file path=ppt/slides/slide89.xml><?xml version="1.0" encoding="utf-8"?>
+<p:sld xmlns:a="http://schemas.openxmlformats.org/drawingml/2006/main" xmlns:p="http://schemas.openxmlformats.org/presentationml/2006/main" xmlns:r="http://schemas.openxmlformats.org/officeDocument/2006/relationships">
+  <p:cSld>
+    <p:bg>
+      <p:bgPr>
+        <a:solidFill>
+          <a:srgbClr val="F6F4EE"/>
+        </a:solidFill>
+        <a:effectLst/>
+      </p:bgPr>
+    </p:bg>
+    <p:spTree>
+      <p:nvGrpSpPr>
+        <p:cNvPr id="1" name=""/>
+        <p:cNvGrpSpPr/>
+        <p:nvPr/>
+      </p:nvGrpSpPr>
+      <p:grpSpPr/>
+      <p:sp>
+        <p:nvSpPr>
+          <p:cNvPr id="2" name="TextBox 1"/>
+          <p:cNvSpPr txBox="1"/>
+          <p:nvPr/>
+        </p:nvSpPr>
+        <p:spPr>
+          <a:xfrm>
+            <a:off x="868680" y="2286000"/>
+            <a:ext cx="10454335" cy="365760"/>
+          </a:xfrm>
+          <a:prstGeom prst="rect">
+            <a:avLst/>
+          </a:prstGeom>
+          <a:noFill/>
+        </p:spPr>
+        <p:txBody>
+          <a:bodyPr wrap="square" anchor="t" lIns="0" rIns="0" tIns="0" bIns="0">
+            <a:noAutofit/>
+          </a:bodyPr>
+          <a:lstStyle/>
+          <a:p>
+            <a:pPr algn="l"/>
+            <a:r>
+              <a:rPr sz="1250" b="1" i="0" spc="260">
+                <a:solidFill>
+                  <a:srgbClr val="7E6410"/>
+                </a:solidFill>
+                <a:latin typeface="Inter"/>
+              </a:rPr>
+              <a:t>MENTALE SELBSTVERTEIDIGUNG · 16</a:t>
+            </a:r>
+          </a:p>
+        </p:txBody>
+      </p:sp>
+      <p:sp>
+        <p:nvSpPr>
+          <p:cNvPr id="3" name="TextBox 2"/>
+          <p:cNvSpPr txBox="1"/>
+          <p:nvPr/>
+        </p:nvSpPr>
+        <p:spPr>
+          <a:xfrm>
+            <a:off x="868680" y="2743200"/>
+            <a:ext cx="10454335" cy="1828800"/>
+          </a:xfrm>
+          <a:prstGeom prst="rect">
+            <a:avLst/>
+          </a:prstGeom>
+          <a:noFill/>
+        </p:spPr>
+        <p:txBody>
+          <a:bodyPr wrap="square" anchor="t" lIns="0" rIns="0" tIns="0" bIns="0">
+            <a:noAutofit/>
+          </a:bodyPr>
+          <a:lstStyle/>
+          <a:p>
+            <a:pPr>
+              <a:lnSpc>
+                <a:spcPct val="102000"/>
+              </a:lnSpc>
+            </a:pPr>
+            <a:r>
+              <a:rPr sz="4200" b="1" i="0">
+                <a:solidFill>
+                  <a:srgbClr val="16231F"/>
+                </a:solidFill>
+                <a:latin typeface="Fraunces"/>
+              </a:rPr>
+              <a:t>Reizüberflutung &amp; Alarmbereitschaft</a:t>
+            </a:r>
+          </a:p>
+        </p:txBody>
+      </p:sp>
+      <p:sp>
+        <p:nvSpPr>
+          <p:cNvPr id="4" name="Rounded Rectangle 3"/>
+          <p:cNvSpPr/>
+          <p:nvPr/>
+        </p:nvSpPr>
+        <p:spPr>
+          <a:xfrm>
+            <a:off x="886968" y="4526280"/>
+            <a:ext cx="2377440" cy="54864"/>
+          </a:xfrm>
+          <a:prstGeom prst="roundRect">
+            <a:avLst>
+              <a:gd name="adj" fmla="val 50000"/>
+            </a:avLst>
+          </a:prstGeom>
+          <a:gradFill>
+            <a:gsLst>
+              <a:gs pos="0">
+                <a:srgbClr val="E8C15F"/>
+              </a:gs>
+              <a:gs pos="100000">
+                <a:srgbClr val="7E6410"/>
+              </a:gs>
+            </a:gsLst>
+            <a:lin ang="0" scaled="1"/>
+          </a:gradFill>
+          <a:ln>
+            <a:noFill/>
+          </a:ln>
+          <a:effectLst/>
+        </p:spPr>
+        <p:style>
+          <a:lnRef idx="1">
+            <a:schemeClr val="accent1"/>
+          </a:lnRef>
+          <a:fillRef idx="3">
+            <a:schemeClr val="accent1"/>
+          </a:fillRef>
+          <a:effectRef idx="2">
+            <a:schemeClr val="accent1"/>
+          </a:effectRef>
+          <a:fontRef idx="minor">
+            <a:schemeClr val="lt1"/>
+          </a:fontRef>
+        </p:style>
+        <p:txBody>
+          <a:bodyPr rtlCol="0" anchor="ctr"/>
+          <a:lstStyle/>
+          <a:p>
+            <a:pPr algn="ctr"/>
+          </a:p>
+        </p:txBody>
+      </p:sp>
+      <p:sp>
+        <p:nvSpPr>
+          <p:cNvPr id="5" name="TextBox 4"/>
+          <p:cNvSpPr txBox="1"/>
+          <p:nvPr/>
+        </p:nvSpPr>
+        <p:spPr>
+          <a:xfrm>
+            <a:off x="0" y="6355080"/>
+            <a:ext cx="12191695" cy="274320"/>
+          </a:xfrm>
+          <a:prstGeom prst="rect">
+            <a:avLst/>
+          </a:prstGeom>
+          <a:noFill/>
+        </p:spPr>
+        <p:txBody>
+          <a:bodyPr wrap="square" anchor="ctr" lIns="0" rIns="0" tIns="0" bIns="0">
+            <a:noAutofit/>
+          </a:bodyPr>
+          <a:lstStyle/>
+          <a:p>
+            <a:pPr algn="ctr"/>
+            <a:r>
+              <a:rPr sz="800" b="0" i="0" spc="260">
+                <a:solidFill>
+                  <a:srgbClr val="626B67"/>
+                </a:solidFill>
+                <a:latin typeface="Fraunces"/>
+              </a:rPr>
+              <a:t>WERDE MEISTER DEINER GEDANKEN</a:t>
             </a:r>
           </a:p>
         </p:txBody>
@@ -18817,6 +26853,176 @@
                 <a:latin typeface="Fraunces"/>
               </a:rPr>
               <a:t>WERDE MEISTER DEINER GEDANKEN</a:t>
+            </a:r>
+          </a:p>
+        </p:txBody>
+      </p:sp>
+    </p:spTree>
+  </p:cSld>
+  <p:clrMapOvr>
+    <a:masterClrMapping/>
+  </p:clrMapOvr>
+</p:sld>
+</file>
+
+<file path=ppt/slides/slide90.xml><?xml version="1.0" encoding="utf-8"?>
+<p:sld xmlns:a="http://schemas.openxmlformats.org/drawingml/2006/main" xmlns:p="http://schemas.openxmlformats.org/presentationml/2006/main" xmlns:r="http://schemas.openxmlformats.org/officeDocument/2006/relationships">
+  <p:cSld>
+    <p:bg>
+      <p:bgPr>
+        <a:solidFill>
+          <a:srgbClr val="F6F4EE"/>
+        </a:solidFill>
+        <a:effectLst/>
+      </p:bgPr>
+    </p:bg>
+    <p:spTree>
+      <p:nvGrpSpPr>
+        <p:cNvPr id="1" name=""/>
+        <p:cNvGrpSpPr/>
+        <p:nvPr/>
+      </p:nvGrpSpPr>
+      <p:grpSpPr/>
+      <p:sp>
+        <p:nvSpPr>
+          <p:cNvPr id="2" name="TextBox 1"/>
+          <p:cNvSpPr txBox="1"/>
+          <p:nvPr/>
+        </p:nvSpPr>
+        <p:spPr>
+          <a:xfrm>
+            <a:off x="0" y="1234440"/>
+            <a:ext cx="12191695" cy="365760"/>
+          </a:xfrm>
+          <a:prstGeom prst="rect">
+            <a:avLst/>
+          </a:prstGeom>
+          <a:noFill/>
+        </p:spPr>
+        <p:txBody>
+          <a:bodyPr wrap="square" anchor="t" lIns="0" rIns="0" tIns="0" bIns="0">
+            <a:noAutofit/>
+          </a:bodyPr>
+          <a:lstStyle/>
+          <a:p>
+            <a:pPr algn="ctr"/>
+            <a:r>
+              <a:rPr sz="1250" b="1" i="0" spc="260">
+                <a:solidFill>
+                  <a:srgbClr val="7E6410"/>
+                </a:solidFill>
+                <a:latin typeface="Inter"/>
+              </a:rPr>
+              <a:t>MERKSATZ · THEMA 16</a:t>
+            </a:r>
+          </a:p>
+        </p:txBody>
+      </p:sp>
+      <p:sp>
+        <p:nvSpPr>
+          <p:cNvPr id="3" name="TextBox 2"/>
+          <p:cNvSpPr txBox="1"/>
+          <p:nvPr/>
+        </p:nvSpPr>
+        <p:spPr>
+          <a:xfrm>
+            <a:off x="0" y="1508760"/>
+            <a:ext cx="12191695" cy="914400"/>
+          </a:xfrm>
+          <a:prstGeom prst="rect">
+            <a:avLst/>
+          </a:prstGeom>
+          <a:noFill/>
+        </p:spPr>
+        <p:txBody>
+          <a:bodyPr wrap="square" anchor="t" lIns="0" rIns="0" tIns="0" bIns="0">
+            <a:noAutofit/>
+          </a:bodyPr>
+          <a:lstStyle/>
+          <a:p>
+            <a:pPr algn="ctr"/>
+            <a:r>
+              <a:rPr sz="7000" b="1" i="0">
+                <a:solidFill>
+                  <a:srgbClr val="D9A93A"/>
+                </a:solidFill>
+                <a:latin typeface="Fraunces"/>
+              </a:rPr>
+              <a:t>“</a:t>
+            </a:r>
+          </a:p>
+        </p:txBody>
+      </p:sp>
+      <p:sp>
+        <p:nvSpPr>
+          <p:cNvPr id="4" name="TextBox 3"/>
+          <p:cNvSpPr txBox="1"/>
+          <p:nvPr/>
+        </p:nvSpPr>
+        <p:spPr>
+          <a:xfrm>
+            <a:off x="1463040" y="2514600"/>
+            <a:ext cx="9265615" cy="2743200"/>
+          </a:xfrm>
+          <a:prstGeom prst="rect">
+            <a:avLst/>
+          </a:prstGeom>
+          <a:noFill/>
+        </p:spPr>
+        <p:txBody>
+          <a:bodyPr wrap="square" anchor="ctr" lIns="0" rIns="0" tIns="0" bIns="0">
+            <a:noAutofit/>
+          </a:bodyPr>
+          <a:lstStyle/>
+          <a:p>
+            <a:pPr algn="ctr">
+              <a:lnSpc>
+                <a:spcPct val="116000"/>
+              </a:lnSpc>
+            </a:pPr>
+            <a:r>
+              <a:rPr sz="3300" b="0" i="0">
+                <a:solidFill>
+                  <a:srgbClr val="16231F"/>
+                </a:solidFill>
+                <a:latin typeface="Fraunces"/>
+              </a:rPr>
+              <a:t>Der Ausweg ist kein Input, sondern Ruhe. Erst wenn dein System herunterfährt, entsteht wieder der Raum zwischen Reiz und Reaktion, in dem du frei bist. Ruhe ist keine Zeitverschwendung – sie ist der Zustand, in dem du wieder wählen kannst.</a:t>
+            </a:r>
+          </a:p>
+        </p:txBody>
+      </p:sp>
+      <p:sp>
+        <p:nvSpPr>
+          <p:cNvPr id="5" name="TextBox 4"/>
+          <p:cNvSpPr txBox="1"/>
+          <p:nvPr/>
+        </p:nvSpPr>
+        <p:spPr>
+          <a:xfrm>
+            <a:off x="0" y="5806440"/>
+            <a:ext cx="12191695" cy="365760"/>
+          </a:xfrm>
+          <a:prstGeom prst="rect">
+            <a:avLst/>
+          </a:prstGeom>
+          <a:noFill/>
+        </p:spPr>
+        <p:txBody>
+          <a:bodyPr wrap="square" anchor="ctr" lIns="0" rIns="0" tIns="0" bIns="0">
+            <a:noAutofit/>
+          </a:bodyPr>
+          <a:lstStyle/>
+          <a:p>
+            <a:pPr algn="ctr"/>
+            <a:r>
+              <a:rPr sz="1100" b="1" i="0" spc="240">
+                <a:solidFill>
+                  <a:srgbClr val="7E6410"/>
+                </a:solidFill>
+                <a:latin typeface="Inter"/>
+              </a:rPr>
+              <a:t>REIZÜBERFLUTUNG &amp; ALARMBEREITSCHAFT</a:t>
             </a:r>
           </a:p>
         </p:txBody>

--- a/docs/video/WMDG-Video-Folien.pptx
+++ b/docs/video/WMDG-Video-Folien.pptx
@@ -9539,7 +9539,7 @@
       </p:sp>
       <p:pic>
         <p:nvPicPr>
-          <p:cNvPr id="3" name="Picture 2" descr="brain-freigestellt.png"/>
+          <p:cNvPr id="3" name="Picture 2" descr="logo-brain-gold.png"/>
           <p:cNvPicPr>
             <a:picLocks noChangeAspect="1"/>
           </p:cNvPicPr>
@@ -9554,7 +9554,7 @@
         <p:spPr>
           <a:xfrm>
             <a:off x="5272887" y="1234440"/>
-            <a:ext cx="1645920" cy="1645920"/>
+            <a:ext cx="1645920" cy="1571854"/>
           </a:xfrm>
           <a:prstGeom prst="rect">
             <a:avLst/>
